--- a/presentation/presentation_slides.pptx
+++ b/presentation/presentation_slides.pptx
@@ -33,11 +33,18 @@
   <p:notesSz cx="6858000" cy="9144000"/>
   <p:embeddedFontLst>
     <p:embeddedFont>
-      <p:font typeface="Lora SemiBold"/>
+      <p:font typeface="Ubuntu"/>
       <p:regular r:id="rId27"/>
       <p:bold r:id="rId28"/>
       <p:italic r:id="rId29"/>
       <p:boldItalic r:id="rId30"/>
+    </p:embeddedFont>
+    <p:embeddedFont>
+      <p:font typeface="Lora SemiBold"/>
+      <p:regular r:id="rId31"/>
+      <p:bold r:id="rId32"/>
+      <p:italic r:id="rId33"/>
+      <p:boldItalic r:id="rId34"/>
     </p:embeddedFont>
   </p:embeddedFontLst>
   <p:defaultTextStyle>
@@ -22244,7 +22251,7 @@
         <p:spPr>
           <a:xfrm>
             <a:off x="514364" y="1405889"/>
-            <a:ext cx="3909164" cy="1028700"/>
+            <a:ext cx="3909300" cy="674100"/>
           </a:xfrm>
           <a:prstGeom prst="rect">
             <a:avLst/>
@@ -22278,25 +22285,25 @@
               <a:buNone/>
             </a:pPr>
             <a:r>
-              <a:rPr b="0" i="0" lang="en-GB" sz="1100" u="none" cap="none" strike="noStrike">
+              <a:rPr i="0" lang="en-GB" sz="1200" u="none" cap="none" strike="noStrike">
                 <a:solidFill>
                   <a:srgbClr val="1A1D2B"/>
                 </a:solidFill>
-                <a:latin typeface="Calibri"/>
-                <a:ea typeface="Calibri"/>
-                <a:cs typeface="Calibri"/>
-                <a:sym typeface="Calibri"/>
+                <a:latin typeface="Ubuntu"/>
+                <a:ea typeface="Ubuntu"/>
+                <a:cs typeface="Ubuntu"/>
+                <a:sym typeface="Ubuntu"/>
               </a:rPr>
               <a:t>A negatív érzelmi töltetű szalagcímek átlagosan magasabb fontossági pontszámot kapnak, mint a semleges hírek.</a:t>
             </a:r>
-            <a:endParaRPr b="0" i="0" sz="1100" u="none" cap="none" strike="noStrike">
+            <a:endParaRPr i="0" sz="1200" u="none" cap="none" strike="noStrike">
               <a:solidFill>
                 <a:srgbClr val="000000"/>
               </a:solidFill>
-              <a:latin typeface="Arial"/>
-              <a:ea typeface="Arial"/>
-              <a:cs typeface="Arial"/>
-              <a:sym typeface="Arial"/>
+              <a:latin typeface="Ubuntu"/>
+              <a:ea typeface="Ubuntu"/>
+              <a:cs typeface="Ubuntu"/>
+              <a:sym typeface="Ubuntu"/>
             </a:endParaRPr>
           </a:p>
         </p:txBody>
@@ -22310,7 +22317,7 @@
         <p:spPr>
           <a:xfrm>
             <a:off x="4732146" y="1062990"/>
-            <a:ext cx="4114910" cy="274320"/>
+            <a:ext cx="4114800" cy="150900"/>
           </a:xfrm>
           <a:prstGeom prst="rect">
             <a:avLst/>
@@ -22348,21 +22355,21 @@
                 <a:solidFill>
                   <a:srgbClr val="1E2761"/>
                 </a:solidFill>
-                <a:latin typeface="Calibri"/>
-                <a:ea typeface="Calibri"/>
-                <a:cs typeface="Calibri"/>
-                <a:sym typeface="Calibri"/>
+                <a:latin typeface="Ubuntu"/>
+                <a:ea typeface="Ubuntu"/>
+                <a:cs typeface="Ubuntu"/>
+                <a:sym typeface="Ubuntu"/>
               </a:rPr>
               <a:t>HÁROM LÉPCSŐS VIZSGÁLAT</a:t>
             </a:r>
-            <a:endParaRPr b="0" i="0" sz="1100" u="none" cap="none" strike="noStrike">
+            <a:endParaRPr b="1" i="0" sz="1100" u="none" cap="none" strike="noStrike">
               <a:solidFill>
                 <a:srgbClr val="000000"/>
               </a:solidFill>
-              <a:latin typeface="Arial"/>
-              <a:ea typeface="Arial"/>
-              <a:cs typeface="Arial"/>
-              <a:sym typeface="Arial"/>
+              <a:latin typeface="Ubuntu"/>
+              <a:ea typeface="Ubuntu"/>
+              <a:cs typeface="Ubuntu"/>
+              <a:sym typeface="Ubuntu"/>
             </a:endParaRPr>
           </a:p>
         </p:txBody>
@@ -22451,7 +22458,7 @@
         <p:spPr>
           <a:xfrm>
             <a:off x="5177928" y="1323594"/>
-            <a:ext cx="3634837" cy="240030"/>
+            <a:ext cx="3634800" cy="181500"/>
           </a:xfrm>
           <a:prstGeom prst="rect">
             <a:avLst/>
@@ -22489,21 +22496,21 @@
                 <a:solidFill>
                   <a:srgbClr val="1E2761"/>
                 </a:solidFill>
-                <a:latin typeface="Calibri"/>
-                <a:ea typeface="Calibri"/>
-                <a:cs typeface="Calibri"/>
-                <a:sym typeface="Calibri"/>
+                <a:latin typeface="Ubuntu"/>
+                <a:ea typeface="Ubuntu"/>
+                <a:cs typeface="Ubuntu"/>
+                <a:sym typeface="Ubuntu"/>
               </a:rPr>
               <a:t>Spearman-rangkorreláció</a:t>
             </a:r>
-            <a:endParaRPr b="0" i="0" sz="1100" u="none" cap="none" strike="noStrike">
+            <a:endParaRPr b="1" i="0" sz="1100" u="none" cap="none" strike="noStrike">
               <a:solidFill>
                 <a:srgbClr val="000000"/>
               </a:solidFill>
-              <a:latin typeface="Arial"/>
-              <a:ea typeface="Arial"/>
-              <a:cs typeface="Arial"/>
-              <a:sym typeface="Arial"/>
+              <a:latin typeface="Ubuntu"/>
+              <a:ea typeface="Ubuntu"/>
+              <a:cs typeface="Ubuntu"/>
+              <a:sym typeface="Ubuntu"/>
             </a:endParaRPr>
           </a:p>
         </p:txBody>
@@ -22517,7 +22524,7 @@
         <p:spPr>
           <a:xfrm>
             <a:off x="5177928" y="1522475"/>
-            <a:ext cx="3634837" cy="240030"/>
+            <a:ext cx="3634800" cy="166200"/>
           </a:xfrm>
           <a:prstGeom prst="rect">
             <a:avLst/>
@@ -22551,25 +22558,25 @@
               <a:buNone/>
             </a:pPr>
             <a:r>
-              <a:rPr b="0" i="0" lang="en-GB" sz="800" u="none" cap="none" strike="noStrike">
+              <a:rPr i="0" lang="en-GB" sz="900" u="none" cap="none" strike="noStrike">
                 <a:solidFill>
                   <a:srgbClr val="1A1D2B"/>
                 </a:solidFill>
-                <a:latin typeface="Calibri"/>
-                <a:ea typeface="Calibri"/>
-                <a:cs typeface="Calibri"/>
-                <a:sym typeface="Calibri"/>
+                <a:latin typeface="Ubuntu"/>
+                <a:ea typeface="Ubuntu"/>
+                <a:cs typeface="Ubuntu"/>
+                <a:sym typeface="Ubuntu"/>
               </a:rPr>
               <a:t>együttjár-e a szentiment és a norm_score?</a:t>
             </a:r>
-            <a:endParaRPr b="0" i="0" sz="1100" u="none" cap="none" strike="noStrike">
+            <a:endParaRPr i="0" sz="1200" u="none" cap="none" strike="noStrike">
               <a:solidFill>
                 <a:srgbClr val="000000"/>
               </a:solidFill>
-              <a:latin typeface="Arial"/>
-              <a:ea typeface="Arial"/>
-              <a:cs typeface="Arial"/>
-              <a:sym typeface="Arial"/>
+              <a:latin typeface="Ubuntu"/>
+              <a:ea typeface="Ubuntu"/>
+              <a:cs typeface="Ubuntu"/>
+              <a:sym typeface="Ubuntu"/>
             </a:endParaRPr>
           </a:p>
         </p:txBody>
@@ -22658,7 +22665,7 @@
         <p:spPr>
           <a:xfrm>
             <a:off x="5177928" y="1837944"/>
-            <a:ext cx="3634837" cy="240030"/>
+            <a:ext cx="3634800" cy="181500"/>
           </a:xfrm>
           <a:prstGeom prst="rect">
             <a:avLst/>
@@ -22696,21 +22703,21 @@
                 <a:solidFill>
                   <a:srgbClr val="1E2761"/>
                 </a:solidFill>
-                <a:latin typeface="Calibri"/>
-                <a:ea typeface="Calibri"/>
-                <a:cs typeface="Calibri"/>
-                <a:sym typeface="Calibri"/>
+                <a:latin typeface="Ubuntu"/>
+                <a:ea typeface="Ubuntu"/>
+                <a:cs typeface="Ubuntu"/>
+                <a:sym typeface="Ubuntu"/>
               </a:rPr>
               <a:t>Mann–Whitney U</a:t>
             </a:r>
-            <a:endParaRPr b="0" i="0" sz="1100" u="none" cap="none" strike="noStrike">
+            <a:endParaRPr b="1" i="0" sz="1100" u="none" cap="none" strike="noStrike">
               <a:solidFill>
                 <a:srgbClr val="000000"/>
               </a:solidFill>
-              <a:latin typeface="Arial"/>
-              <a:ea typeface="Arial"/>
-              <a:cs typeface="Arial"/>
-              <a:sym typeface="Arial"/>
+              <a:latin typeface="Ubuntu"/>
+              <a:ea typeface="Ubuntu"/>
+              <a:cs typeface="Ubuntu"/>
+              <a:sym typeface="Ubuntu"/>
             </a:endParaRPr>
           </a:p>
         </p:txBody>
@@ -22724,7 +22731,7 @@
         <p:spPr>
           <a:xfrm>
             <a:off x="5177928" y="2036826"/>
-            <a:ext cx="3634837" cy="240030"/>
+            <a:ext cx="3634800" cy="166200"/>
           </a:xfrm>
           <a:prstGeom prst="rect">
             <a:avLst/>
@@ -22758,25 +22765,25 @@
               <a:buNone/>
             </a:pPr>
             <a:r>
-              <a:rPr b="0" i="0" lang="en-GB" sz="800" u="none" cap="none" strike="noStrike">
+              <a:rPr i="0" lang="en-GB" sz="900" u="none" cap="none" strike="noStrike">
                 <a:solidFill>
                   <a:srgbClr val="1A1D2B"/>
                 </a:solidFill>
-                <a:latin typeface="Calibri"/>
-                <a:ea typeface="Calibri"/>
-                <a:cs typeface="Calibri"/>
-                <a:sym typeface="Calibri"/>
+                <a:latin typeface="Ubuntu"/>
+                <a:ea typeface="Ubuntu"/>
+                <a:cs typeface="Ubuntu"/>
+                <a:sym typeface="Ubuntu"/>
               </a:rPr>
               <a:t>Negatív / Semleges / Pozitív sávok összevetése.</a:t>
             </a:r>
-            <a:endParaRPr b="0" i="0" sz="1100" u="none" cap="none" strike="noStrike">
+            <a:endParaRPr i="0" sz="1200" u="none" cap="none" strike="noStrike">
               <a:solidFill>
                 <a:srgbClr val="000000"/>
               </a:solidFill>
-              <a:latin typeface="Arial"/>
-              <a:ea typeface="Arial"/>
-              <a:cs typeface="Arial"/>
-              <a:sym typeface="Arial"/>
+              <a:latin typeface="Ubuntu"/>
+              <a:ea typeface="Ubuntu"/>
+              <a:cs typeface="Ubuntu"/>
+              <a:sym typeface="Ubuntu"/>
             </a:endParaRPr>
           </a:p>
         </p:txBody>
@@ -22865,7 +22872,7 @@
         <p:spPr>
           <a:xfrm>
             <a:off x="5177928" y="2352294"/>
-            <a:ext cx="3634837" cy="240030"/>
+            <a:ext cx="3634800" cy="181500"/>
           </a:xfrm>
           <a:prstGeom prst="rect">
             <a:avLst/>
@@ -22903,21 +22910,21 @@
                 <a:solidFill>
                   <a:srgbClr val="1E2761"/>
                 </a:solidFill>
-                <a:latin typeface="Calibri"/>
-                <a:ea typeface="Calibri"/>
-                <a:cs typeface="Calibri"/>
-                <a:sym typeface="Calibri"/>
+                <a:latin typeface="Ubuntu"/>
+                <a:ea typeface="Ubuntu"/>
+                <a:cs typeface="Ubuntu"/>
+                <a:sym typeface="Ubuntu"/>
               </a:rPr>
               <a:t>OLS regresszió interakcióval</a:t>
             </a:r>
-            <a:endParaRPr b="0" i="0" sz="1100" u="none" cap="none" strike="noStrike">
+            <a:endParaRPr b="1" i="0" sz="1100" u="none" cap="none" strike="noStrike">
               <a:solidFill>
                 <a:srgbClr val="000000"/>
               </a:solidFill>
-              <a:latin typeface="Arial"/>
-              <a:ea typeface="Arial"/>
-              <a:cs typeface="Arial"/>
-              <a:sym typeface="Arial"/>
+              <a:latin typeface="Ubuntu"/>
+              <a:ea typeface="Ubuntu"/>
+              <a:cs typeface="Ubuntu"/>
+              <a:sym typeface="Ubuntu"/>
             </a:endParaRPr>
           </a:p>
         </p:txBody>
@@ -22931,7 +22938,7 @@
         <p:spPr>
           <a:xfrm>
             <a:off x="5177928" y="2551176"/>
-            <a:ext cx="3634837" cy="240030"/>
+            <a:ext cx="3634800" cy="166200"/>
           </a:xfrm>
           <a:prstGeom prst="rect">
             <a:avLst/>
@@ -22965,25 +22972,25 @@
               <a:buNone/>
             </a:pPr>
             <a:r>
-              <a:rPr b="0" i="0" lang="en-GB" sz="800" u="none" cap="none" strike="noStrike">
+              <a:rPr i="0" lang="en-GB" sz="900" u="none" cap="none" strike="noStrike">
                 <a:solidFill>
                   <a:srgbClr val="1A1D2B"/>
                 </a:solidFill>
-                <a:latin typeface="Calibri"/>
-                <a:ea typeface="Calibri"/>
-                <a:cs typeface="Calibri"/>
-                <a:sym typeface="Calibri"/>
+                <a:latin typeface="Ubuntu"/>
+                <a:ea typeface="Ubuntu"/>
+                <a:cs typeface="Ubuntu"/>
+                <a:sym typeface="Ubuntu"/>
               </a:rPr>
               <a:t>norm_score ~ sentiment × gov.</a:t>
             </a:r>
-            <a:endParaRPr b="0" i="0" sz="1100" u="none" cap="none" strike="noStrike">
+            <a:endParaRPr i="0" sz="1200" u="none" cap="none" strike="noStrike">
               <a:solidFill>
                 <a:srgbClr val="000000"/>
               </a:solidFill>
-              <a:latin typeface="Arial"/>
-              <a:ea typeface="Arial"/>
-              <a:cs typeface="Arial"/>
-              <a:sym typeface="Arial"/>
+              <a:latin typeface="Ubuntu"/>
+              <a:ea typeface="Ubuntu"/>
+              <a:cs typeface="Ubuntu"/>
+              <a:sym typeface="Ubuntu"/>
             </a:endParaRPr>
           </a:p>
         </p:txBody>
@@ -23262,7 +23269,7 @@
         <p:spPr>
           <a:xfrm>
             <a:off x="514364" y="3840480"/>
-            <a:ext cx="3909164" cy="274320"/>
+            <a:ext cx="3909300" cy="181500"/>
           </a:xfrm>
           <a:prstGeom prst="rect">
             <a:avLst/>
@@ -23296,7 +23303,7 @@
               <a:buNone/>
             </a:pPr>
             <a:r>
-              <a:rPr b="0" i="0" lang="en-GB" sz="900" u="none" cap="none" strike="noStrike">
+              <a:rPr b="0" i="0" lang="en-GB" sz="1000" u="none" cap="none" strike="noStrike">
                 <a:solidFill>
                   <a:srgbClr val="EAEEF9"/>
                 </a:solidFill>
@@ -23307,7 +23314,7 @@
               </a:rPr>
               <a:t>Negatívabb címek → nagyobb vizuális hangsúly.</a:t>
             </a:r>
-            <a:endParaRPr b="0" i="0" sz="1100" u="none" cap="none" strike="noStrike">
+            <a:endParaRPr b="0" i="0" sz="1200" u="none" cap="none" strike="noStrike">
               <a:solidFill>
                 <a:srgbClr val="000000"/>
               </a:solidFill>
@@ -23461,7 +23468,7 @@
         <p:spPr>
           <a:xfrm>
             <a:off x="4903601" y="3291840"/>
-            <a:ext cx="3772001" cy="822960"/>
+            <a:ext cx="3771900" cy="637200"/>
           </a:xfrm>
           <a:prstGeom prst="rect">
             <a:avLst/>
@@ -23495,25 +23502,25 @@
               <a:buNone/>
             </a:pPr>
             <a:r>
-              <a:rPr b="0" i="0" lang="en-GB" sz="900" u="none" cap="none" strike="noStrike">
+              <a:rPr i="0" lang="en-GB" sz="1100" u="none" cap="none" strike="noStrike">
                 <a:solidFill>
                   <a:srgbClr val="1A1D2B"/>
                 </a:solidFill>
-                <a:latin typeface="Calibri"/>
-                <a:ea typeface="Calibri"/>
-                <a:cs typeface="Calibri"/>
-                <a:sym typeface="Calibri"/>
+                <a:latin typeface="Ubuntu"/>
+                <a:ea typeface="Ubuntu"/>
+                <a:cs typeface="Ubuntu"/>
+                <a:sym typeface="Ubuntu"/>
               </a:rPr>
               <a:t>Összejár-e a szalagcím érzelmi töltete és a főoldali kiemelés mértéke — és ez a két médiablokkban másként működik-e.</a:t>
             </a:r>
-            <a:endParaRPr b="0" i="0" sz="1100" u="none" cap="none" strike="noStrike">
+            <a:endParaRPr i="0" sz="1300" u="none" cap="none" strike="noStrike">
               <a:solidFill>
                 <a:srgbClr val="000000"/>
               </a:solidFill>
-              <a:latin typeface="Arial"/>
-              <a:ea typeface="Arial"/>
-              <a:cs typeface="Arial"/>
-              <a:sym typeface="Arial"/>
+              <a:latin typeface="Ubuntu"/>
+              <a:ea typeface="Ubuntu"/>
+              <a:cs typeface="Ubuntu"/>
+              <a:sym typeface="Ubuntu"/>
             </a:endParaRPr>
           </a:p>
         </p:txBody>
@@ -24191,8 +24198,8 @@
         </p:nvSpPr>
         <p:spPr>
           <a:xfrm>
-            <a:off x="6309528" y="1392173"/>
-            <a:ext cx="2503237" cy="274320"/>
+            <a:off x="6309528" y="1522364"/>
+            <a:ext cx="2503200" cy="181500"/>
           </a:xfrm>
           <a:prstGeom prst="rect">
             <a:avLst/>
@@ -24226,25 +24233,25 @@
               <a:buNone/>
             </a:pPr>
             <a:r>
-              <a:rPr b="1" i="0" lang="en-GB" sz="900" u="none" cap="none" strike="noStrike">
+              <a:rPr b="1" i="0" lang="en-GB" sz="1000" u="none" cap="none" strike="noStrike">
                 <a:solidFill>
                   <a:srgbClr val="1E2761"/>
                 </a:solidFill>
-                <a:latin typeface="Calibri"/>
-                <a:ea typeface="Calibri"/>
-                <a:cs typeface="Calibri"/>
-                <a:sym typeface="Calibri"/>
+                <a:latin typeface="Ubuntu"/>
+                <a:ea typeface="Ubuntu"/>
+                <a:cs typeface="Ubuntu"/>
+                <a:sym typeface="Ubuntu"/>
               </a:rPr>
               <a:t>Mindkét oldal negatív-dominált</a:t>
             </a:r>
-            <a:endParaRPr b="0" i="0" sz="1100" u="none" cap="none" strike="noStrike">
+            <a:endParaRPr b="1" i="0" sz="1200" u="none" cap="none" strike="noStrike">
               <a:solidFill>
                 <a:srgbClr val="000000"/>
               </a:solidFill>
-              <a:latin typeface="Arial"/>
-              <a:ea typeface="Arial"/>
-              <a:cs typeface="Arial"/>
-              <a:sym typeface="Arial"/>
+              <a:latin typeface="Ubuntu"/>
+              <a:ea typeface="Ubuntu"/>
+              <a:cs typeface="Ubuntu"/>
+              <a:sym typeface="Ubuntu"/>
             </a:endParaRPr>
           </a:p>
         </p:txBody>
@@ -24257,8 +24264,8 @@
         </p:nvSpPr>
         <p:spPr>
           <a:xfrm>
-            <a:off x="6309528" y="1625345"/>
-            <a:ext cx="2503237" cy="582930"/>
+            <a:off x="6309528" y="1755536"/>
+            <a:ext cx="2503200" cy="166200"/>
           </a:xfrm>
           <a:prstGeom prst="rect">
             <a:avLst/>
@@ -24292,25 +24299,25 @@
               <a:buNone/>
             </a:pPr>
             <a:r>
-              <a:rPr b="0" i="0" lang="en-GB" sz="800" u="none" cap="none" strike="noStrike">
+              <a:rPr i="0" lang="en-GB" sz="900" u="none" cap="none" strike="noStrike">
                 <a:solidFill>
                   <a:srgbClr val="1A1D2B"/>
                 </a:solidFill>
-                <a:latin typeface="Calibri"/>
-                <a:ea typeface="Calibri"/>
-                <a:cs typeface="Calibri"/>
-                <a:sym typeface="Calibri"/>
+                <a:latin typeface="Ubuntu"/>
+                <a:ea typeface="Ubuntu"/>
+                <a:cs typeface="Ubuntu"/>
+                <a:sym typeface="Ubuntu"/>
               </a:rPr>
               <a:t>a minta nem kiegyensúlyozott.</a:t>
             </a:r>
-            <a:endParaRPr b="0" i="0" sz="1100" u="none" cap="none" strike="noStrike">
+            <a:endParaRPr i="0" sz="1200" u="none" cap="none" strike="noStrike">
               <a:solidFill>
                 <a:srgbClr val="000000"/>
               </a:solidFill>
-              <a:latin typeface="Arial"/>
-              <a:ea typeface="Arial"/>
-              <a:cs typeface="Arial"/>
-              <a:sym typeface="Arial"/>
+              <a:latin typeface="Ubuntu"/>
+              <a:ea typeface="Ubuntu"/>
+              <a:cs typeface="Ubuntu"/>
+              <a:sym typeface="Ubuntu"/>
             </a:endParaRPr>
           </a:p>
         </p:txBody>
@@ -24389,8 +24396,8 @@
         </p:nvSpPr>
         <p:spPr>
           <a:xfrm>
-            <a:off x="6309528" y="2180843"/>
-            <a:ext cx="2503237" cy="274320"/>
+            <a:off x="6309528" y="2311034"/>
+            <a:ext cx="2503200" cy="181500"/>
           </a:xfrm>
           <a:prstGeom prst="rect">
             <a:avLst/>
@@ -24424,25 +24431,25 @@
               <a:buNone/>
             </a:pPr>
             <a:r>
-              <a:rPr b="1" i="0" lang="en-GB" sz="900" u="none" cap="none" strike="noStrike">
+              <a:rPr b="1" i="0" lang="en-GB" sz="1000" u="none" cap="none" strike="noStrike">
                 <a:solidFill>
                   <a:srgbClr val="1E2761"/>
                 </a:solidFill>
-                <a:latin typeface="Calibri"/>
-                <a:ea typeface="Calibri"/>
-                <a:cs typeface="Calibri"/>
-                <a:sym typeface="Calibri"/>
+                <a:latin typeface="Ubuntu"/>
+                <a:ea typeface="Ubuntu"/>
+                <a:cs typeface="Ubuntu"/>
+                <a:sym typeface="Ubuntu"/>
               </a:rPr>
               <a:t>Ezért sávokon belül tesztelünk</a:t>
             </a:r>
-            <a:endParaRPr b="0" i="0" sz="1100" u="none" cap="none" strike="noStrike">
+            <a:endParaRPr b="1" i="0" sz="1200" u="none" cap="none" strike="noStrike">
               <a:solidFill>
                 <a:srgbClr val="000000"/>
               </a:solidFill>
-              <a:latin typeface="Arial"/>
-              <a:ea typeface="Arial"/>
-              <a:cs typeface="Arial"/>
-              <a:sym typeface="Arial"/>
+              <a:latin typeface="Ubuntu"/>
+              <a:ea typeface="Ubuntu"/>
+              <a:cs typeface="Ubuntu"/>
+              <a:sym typeface="Ubuntu"/>
             </a:endParaRPr>
           </a:p>
         </p:txBody>
@@ -24455,8 +24462,8 @@
         </p:nvSpPr>
         <p:spPr>
           <a:xfrm>
-            <a:off x="6309528" y="2414015"/>
-            <a:ext cx="2503237" cy="582930"/>
+            <a:off x="6309528" y="2544206"/>
+            <a:ext cx="2503200" cy="166200"/>
           </a:xfrm>
           <a:prstGeom prst="rect">
             <a:avLst/>
@@ -24490,25 +24497,25 @@
               <a:buNone/>
             </a:pPr>
             <a:r>
-              <a:rPr b="0" i="0" lang="en-GB" sz="800" u="none" cap="none" strike="noStrike">
+              <a:rPr i="0" lang="en-GB" sz="900" u="none" cap="none" strike="noStrike">
                 <a:solidFill>
                   <a:srgbClr val="1A1D2B"/>
                 </a:solidFill>
-                <a:latin typeface="Calibri"/>
-                <a:ea typeface="Calibri"/>
-                <a:cs typeface="Calibri"/>
-                <a:sym typeface="Calibri"/>
+                <a:latin typeface="Ubuntu"/>
+                <a:ea typeface="Ubuntu"/>
+                <a:cs typeface="Ubuntu"/>
+                <a:sym typeface="Ubuntu"/>
               </a:rPr>
               <a:t>hogy a kiegyensúlyozatlanság ne torzítson.</a:t>
             </a:r>
-            <a:endParaRPr b="0" i="0" sz="1100" u="none" cap="none" strike="noStrike">
+            <a:endParaRPr i="0" sz="1200" u="none" cap="none" strike="noStrike">
               <a:solidFill>
                 <a:srgbClr val="000000"/>
               </a:solidFill>
-              <a:latin typeface="Arial"/>
-              <a:ea typeface="Arial"/>
-              <a:cs typeface="Arial"/>
-              <a:sym typeface="Arial"/>
+              <a:latin typeface="Ubuntu"/>
+              <a:ea typeface="Ubuntu"/>
+              <a:cs typeface="Ubuntu"/>
+              <a:sym typeface="Ubuntu"/>
             </a:endParaRPr>
           </a:p>
         </p:txBody>
@@ -25591,7 +25598,7 @@
             <a:tbl>
               <a:tblPr>
                 <a:noFill/>
-                <a:tableStyleId>{02B4F9B2-E791-447A-981E-08FD4EC66F5B}</a:tableStyleId>
+                <a:tableStyleId>{29A1324E-E767-48CC-B2B4-CB8A3D8B7874}</a:tableStyleId>
               </a:tblPr>
               <a:tblGrid>
                 <a:gridCol w="844925"/>
@@ -26614,7 +26621,7 @@
         <p:spPr>
           <a:xfrm>
             <a:off x="6035201" y="2983229"/>
-            <a:ext cx="2743273" cy="960120"/>
+            <a:ext cx="2743200" cy="581700"/>
           </a:xfrm>
           <a:prstGeom prst="rect">
             <a:avLst/>
@@ -26648,25 +26655,25 @@
               <a:buNone/>
             </a:pPr>
             <a:r>
-              <a:rPr b="0" i="0" lang="en-GB" sz="900" u="none" cap="none" strike="noStrike">
+              <a:rPr i="0" lang="en-GB" sz="1000" u="none" cap="none" strike="noStrike">
                 <a:solidFill>
                   <a:srgbClr val="1A1D2B"/>
                 </a:solidFill>
-                <a:latin typeface="Calibri"/>
-                <a:ea typeface="Calibri"/>
-                <a:cs typeface="Calibri"/>
-                <a:sym typeface="Calibri"/>
+                <a:latin typeface="Ubuntu"/>
+                <a:ea typeface="Ubuntu"/>
+                <a:cs typeface="Ubuntu"/>
+                <a:sym typeface="Ubuntu"/>
               </a:rPr>
               <a:t>Mindkét portáltípusnál lefelé lejt a trendvonal. A kapcsolat gyenge, de konzisztensen negatív és szignifikáns.</a:t>
             </a:r>
-            <a:endParaRPr b="0" i="0" sz="1100" u="none" cap="none" strike="noStrike">
+            <a:endParaRPr i="0" sz="1200" u="none" cap="none" strike="noStrike">
               <a:solidFill>
                 <a:srgbClr val="000000"/>
               </a:solidFill>
-              <a:latin typeface="Arial"/>
-              <a:ea typeface="Arial"/>
-              <a:cs typeface="Arial"/>
-              <a:sym typeface="Arial"/>
+              <a:latin typeface="Ubuntu"/>
+              <a:ea typeface="Ubuntu"/>
+              <a:cs typeface="Ubuntu"/>
+              <a:sym typeface="Ubuntu"/>
             </a:endParaRPr>
           </a:p>
         </p:txBody>
@@ -27920,8 +27927,8 @@
         </p:blipFill>
         <p:spPr>
           <a:xfrm>
-            <a:off x="342909" y="1028700"/>
-            <a:ext cx="4457819" cy="2194560"/>
+            <a:off x="342900" y="1104900"/>
+            <a:ext cx="4457825" cy="1728275"/>
           </a:xfrm>
           <a:prstGeom prst="rect">
             <a:avLst/>
@@ -27939,7 +27946,7 @@
           <p:nvPr/>
         </p:nvGraphicFramePr>
         <p:xfrm>
-          <a:off x="4869310" y="1028700"/>
+          <a:off x="4869310" y="1104900"/>
           <a:ext cx="3000000" cy="3000000"/>
         </p:xfrm>
         <a:graphic>
@@ -27947,11 +27954,11 @@
             <a:tbl>
               <a:tblPr>
                 <a:noFill/>
-                <a:tableStyleId>{02B4F9B2-E791-447A-981E-08FD4EC66F5B}</a:tableStyleId>
+                <a:tableStyleId>{29A1324E-E767-48CC-B2B4-CB8A3D8B7874}</a:tableStyleId>
               </a:tblPr>
               <a:tblGrid>
-                <a:gridCol w="857250"/>
-                <a:gridCol w="1234475"/>
+                <a:gridCol w="964450"/>
+                <a:gridCol w="1127275"/>
                 <a:gridCol w="480050"/>
                 <a:gridCol w="480050"/>
                 <a:gridCol w="514350"/>
@@ -28241,18 +28248,23 @@
                         <a:buNone/>
                       </a:pPr>
                       <a:r>
-                        <a:rPr b="1" lang="en-GB" sz="700" u="none" cap="none" strike="noStrike">
+                        <a:rPr b="1" lang="en-GB" sz="900" u="none" cap="none" strike="noStrike">
                           <a:solidFill>
                             <a:srgbClr val="1A1D2B"/>
                           </a:solidFill>
-                          <a:latin typeface="Calibri"/>
-                          <a:ea typeface="Calibri"/>
-                          <a:cs typeface="Calibri"/>
-                          <a:sym typeface="Calibri"/>
+                          <a:latin typeface="Ubuntu"/>
+                          <a:ea typeface="Ubuntu"/>
+                          <a:cs typeface="Ubuntu"/>
+                          <a:sym typeface="Ubuntu"/>
                         </a:rPr>
                         <a:t>Összes</a:t>
                       </a:r>
-                      <a:endParaRPr sz="1100" u="none" cap="none" strike="noStrike"/>
+                      <a:endParaRPr b="1" sz="1300" u="none" cap="none" strike="noStrike">
+                        <a:latin typeface="Ubuntu"/>
+                        <a:ea typeface="Ubuntu"/>
+                        <a:cs typeface="Ubuntu"/>
+                        <a:sym typeface="Ubuntu"/>
+                      </a:endParaRPr>
                     </a:p>
                   </a:txBody>
                   <a:tcPr marT="27425" marB="27425" marR="54875" marL="54875" anchor="ctr">
@@ -28284,18 +28296,23 @@
                         <a:buNone/>
                       </a:pPr>
                       <a:r>
-                        <a:rPr lang="en-GB" sz="700" u="none" cap="none" strike="noStrike">
+                        <a:rPr lang="en-GB" sz="800" u="none" cap="none" strike="noStrike">
                           <a:solidFill>
                             <a:srgbClr val="1A1D2B"/>
                           </a:solidFill>
-                          <a:latin typeface="Calibri"/>
-                          <a:ea typeface="Calibri"/>
-                          <a:cs typeface="Calibri"/>
-                          <a:sym typeface="Calibri"/>
+                          <a:latin typeface="Ubuntu"/>
+                          <a:ea typeface="Ubuntu"/>
+                          <a:cs typeface="Ubuntu"/>
+                          <a:sym typeface="Ubuntu"/>
                         </a:rPr>
                         <a:t>Negatív vs. Semleges</a:t>
                       </a:r>
-                      <a:endParaRPr sz="1100" u="none" cap="none" strike="noStrike"/>
+                      <a:endParaRPr sz="1200" u="none" cap="none" strike="noStrike">
+                        <a:latin typeface="Ubuntu"/>
+                        <a:ea typeface="Ubuntu"/>
+                        <a:cs typeface="Ubuntu"/>
+                        <a:sym typeface="Ubuntu"/>
+                      </a:endParaRPr>
                     </a:p>
                   </a:txBody>
                   <a:tcPr marT="27425" marB="27425" marR="54875" marL="54875" anchor="ctr">
@@ -28327,7 +28344,7 @@
                         <a:buNone/>
                       </a:pPr>
                       <a:r>
-                        <a:rPr lang="en-GB" sz="700" u="none" cap="none" strike="noStrike">
+                        <a:rPr lang="en-GB" sz="800" u="none" cap="none" strike="noStrike">
                           <a:solidFill>
                             <a:srgbClr val="1A1D2B"/>
                           </a:solidFill>
@@ -28338,7 +28355,7 @@
                         </a:rPr>
                         <a:t>12 720</a:t>
                       </a:r>
-                      <a:endParaRPr sz="1100" u="none" cap="none" strike="noStrike"/>
+                      <a:endParaRPr sz="1200" u="none" cap="none" strike="noStrike"/>
                     </a:p>
                   </a:txBody>
                   <a:tcPr marT="27425" marB="27425" marR="54875" marL="54875" anchor="ctr">
@@ -28370,7 +28387,7 @@
                         <a:buNone/>
                       </a:pPr>
                       <a:r>
-                        <a:rPr lang="en-GB" sz="700" u="none" cap="none" strike="noStrike">
+                        <a:rPr lang="en-GB" sz="800" u="none" cap="none" strike="noStrike">
                           <a:solidFill>
                             <a:srgbClr val="1A1D2B"/>
                           </a:solidFill>
@@ -28381,7 +28398,7 @@
                         </a:rPr>
                         <a:t>10 252</a:t>
                       </a:r>
-                      <a:endParaRPr sz="1100" u="none" cap="none" strike="noStrike"/>
+                      <a:endParaRPr sz="1200" u="none" cap="none" strike="noStrike"/>
                     </a:p>
                   </a:txBody>
                   <a:tcPr marT="27425" marB="27425" marR="54875" marL="54875" anchor="ctr">
@@ -28413,7 +28430,7 @@
                         <a:buNone/>
                       </a:pPr>
                       <a:r>
-                        <a:rPr lang="en-GB" sz="700" u="none" cap="none" strike="noStrike">
+                        <a:rPr lang="en-GB" sz="800" u="none" cap="none" strike="noStrike">
                           <a:solidFill>
                             <a:srgbClr val="1A1D2B"/>
                           </a:solidFill>
@@ -28424,7 +28441,7 @@
                         </a:rPr>
                         <a:t>&lt; 0.001</a:t>
                       </a:r>
-                      <a:endParaRPr sz="1100" u="none" cap="none" strike="noStrike"/>
+                      <a:endParaRPr sz="1200" u="none" cap="none" strike="noStrike"/>
                     </a:p>
                   </a:txBody>
                   <a:tcPr marT="27425" marB="27425" marR="54875" marL="54875" anchor="ctr">
@@ -28456,7 +28473,7 @@
                         <a:buNone/>
                       </a:pPr>
                       <a:r>
-                        <a:rPr lang="en-GB" sz="700" u="none" cap="none" strike="noStrike">
+                        <a:rPr lang="en-GB" sz="800" u="none" cap="none" strike="noStrike">
                           <a:solidFill>
                             <a:srgbClr val="1A1D2B"/>
                           </a:solidFill>
@@ -28467,7 +28484,7 @@
                         </a:rPr>
                         <a:t>−0.058</a:t>
                       </a:r>
-                      <a:endParaRPr sz="1100" u="none" cap="none" strike="noStrike"/>
+                      <a:endParaRPr sz="1200" u="none" cap="none" strike="noStrike"/>
                     </a:p>
                   </a:txBody>
                   <a:tcPr marT="27425" marB="27425" marR="54875" marL="54875" anchor="ctr">
@@ -28501,18 +28518,23 @@
                         <a:buNone/>
                       </a:pPr>
                       <a:r>
-                        <a:rPr b="1" lang="en-GB" sz="700" u="none" cap="none" strike="noStrike">
+                        <a:rPr b="1" lang="en-GB" sz="900" u="none" cap="none" strike="noStrike">
                           <a:solidFill>
                             <a:srgbClr val="1A1D2B"/>
                           </a:solidFill>
-                          <a:latin typeface="Calibri"/>
-                          <a:ea typeface="Calibri"/>
-                          <a:cs typeface="Calibri"/>
-                          <a:sym typeface="Calibri"/>
+                          <a:latin typeface="Ubuntu"/>
+                          <a:ea typeface="Ubuntu"/>
+                          <a:cs typeface="Ubuntu"/>
+                          <a:sym typeface="Ubuntu"/>
                         </a:rPr>
                         <a:t>Összes</a:t>
                       </a:r>
-                      <a:endParaRPr sz="1100" u="none" cap="none" strike="noStrike"/>
+                      <a:endParaRPr b="1" sz="1300" u="none" cap="none" strike="noStrike">
+                        <a:latin typeface="Ubuntu"/>
+                        <a:ea typeface="Ubuntu"/>
+                        <a:cs typeface="Ubuntu"/>
+                        <a:sym typeface="Ubuntu"/>
+                      </a:endParaRPr>
                     </a:p>
                   </a:txBody>
                   <a:tcPr marT="27425" marB="27425" marR="54875" marL="54875" anchor="ctr">
@@ -28544,18 +28566,23 @@
                         <a:buNone/>
                       </a:pPr>
                       <a:r>
-                        <a:rPr lang="en-GB" sz="700" u="none" cap="none" strike="noStrike">
+                        <a:rPr lang="en-GB" sz="800" u="none" cap="none" strike="noStrike">
                           <a:solidFill>
                             <a:srgbClr val="1A1D2B"/>
                           </a:solidFill>
-                          <a:latin typeface="Calibri"/>
-                          <a:ea typeface="Calibri"/>
-                          <a:cs typeface="Calibri"/>
-                          <a:sym typeface="Calibri"/>
+                          <a:latin typeface="Ubuntu"/>
+                          <a:ea typeface="Ubuntu"/>
+                          <a:cs typeface="Ubuntu"/>
+                          <a:sym typeface="Ubuntu"/>
                         </a:rPr>
                         <a:t>Negatív vs. Pozitív</a:t>
                       </a:r>
-                      <a:endParaRPr sz="1100" u="none" cap="none" strike="noStrike"/>
+                      <a:endParaRPr sz="1200" u="none" cap="none" strike="noStrike">
+                        <a:latin typeface="Ubuntu"/>
+                        <a:ea typeface="Ubuntu"/>
+                        <a:cs typeface="Ubuntu"/>
+                        <a:sym typeface="Ubuntu"/>
+                      </a:endParaRPr>
                     </a:p>
                   </a:txBody>
                   <a:tcPr marT="27425" marB="27425" marR="54875" marL="54875" anchor="ctr">
@@ -28587,7 +28614,7 @@
                         <a:buNone/>
                       </a:pPr>
                       <a:r>
-                        <a:rPr lang="en-GB" sz="700" u="none" cap="none" strike="noStrike">
+                        <a:rPr lang="en-GB" sz="800" u="none" cap="none" strike="noStrike">
                           <a:solidFill>
                             <a:srgbClr val="1A1D2B"/>
                           </a:solidFill>
@@ -28598,7 +28625,7 @@
                         </a:rPr>
                         <a:t>12 720</a:t>
                       </a:r>
-                      <a:endParaRPr sz="1100" u="none" cap="none" strike="noStrike"/>
+                      <a:endParaRPr sz="1200" u="none" cap="none" strike="noStrike"/>
                     </a:p>
                   </a:txBody>
                   <a:tcPr marT="27425" marB="27425" marR="54875" marL="54875" anchor="ctr">
@@ -28630,7 +28657,7 @@
                         <a:buNone/>
                       </a:pPr>
                       <a:r>
-                        <a:rPr lang="en-GB" sz="700" u="none" cap="none" strike="noStrike">
+                        <a:rPr lang="en-GB" sz="800" u="none" cap="none" strike="noStrike">
                           <a:solidFill>
                             <a:srgbClr val="1A1D2B"/>
                           </a:solidFill>
@@ -28641,7 +28668,7 @@
                         </a:rPr>
                         <a:t>6 714</a:t>
                       </a:r>
-                      <a:endParaRPr sz="1100" u="none" cap="none" strike="noStrike"/>
+                      <a:endParaRPr sz="1200" u="none" cap="none" strike="noStrike"/>
                     </a:p>
                   </a:txBody>
                   <a:tcPr marT="27425" marB="27425" marR="54875" marL="54875" anchor="ctr">
@@ -28673,7 +28700,7 @@
                         <a:buNone/>
                       </a:pPr>
                       <a:r>
-                        <a:rPr lang="en-GB" sz="700" u="none" cap="none" strike="noStrike">
+                        <a:rPr lang="en-GB" sz="800" u="none" cap="none" strike="noStrike">
                           <a:solidFill>
                             <a:srgbClr val="1A1D2B"/>
                           </a:solidFill>
@@ -28684,7 +28711,7 @@
                         </a:rPr>
                         <a:t>&lt; 0.001</a:t>
                       </a:r>
-                      <a:endParaRPr sz="1100" u="none" cap="none" strike="noStrike"/>
+                      <a:endParaRPr sz="1200" u="none" cap="none" strike="noStrike"/>
                     </a:p>
                   </a:txBody>
                   <a:tcPr marT="27425" marB="27425" marR="54875" marL="54875" anchor="ctr">
@@ -28716,7 +28743,7 @@
                         <a:buNone/>
                       </a:pPr>
                       <a:r>
-                        <a:rPr lang="en-GB" sz="700" u="none" cap="none" strike="noStrike">
+                        <a:rPr lang="en-GB" sz="800" u="none" cap="none" strike="noStrike">
                           <a:solidFill>
                             <a:srgbClr val="1A1D2B"/>
                           </a:solidFill>
@@ -28727,7 +28754,7 @@
                         </a:rPr>
                         <a:t>−0.137</a:t>
                       </a:r>
-                      <a:endParaRPr sz="1100" u="none" cap="none" strike="noStrike"/>
+                      <a:endParaRPr sz="1200" u="none" cap="none" strike="noStrike"/>
                     </a:p>
                   </a:txBody>
                   <a:tcPr marT="27425" marB="27425" marR="54875" marL="54875" anchor="ctr">
@@ -28761,18 +28788,23 @@
                         <a:buNone/>
                       </a:pPr>
                       <a:r>
-                        <a:rPr b="1" lang="en-GB" sz="700" u="none" cap="none" strike="noStrike">
+                        <a:rPr b="1" lang="en-GB" sz="900" u="none" cap="none" strike="noStrike">
                           <a:solidFill>
                             <a:srgbClr val="1A1D2B"/>
                           </a:solidFill>
-                          <a:latin typeface="Calibri"/>
-                          <a:ea typeface="Calibri"/>
-                          <a:cs typeface="Calibri"/>
-                          <a:sym typeface="Calibri"/>
+                          <a:latin typeface="Ubuntu"/>
+                          <a:ea typeface="Ubuntu"/>
+                          <a:cs typeface="Ubuntu"/>
+                          <a:sym typeface="Ubuntu"/>
                         </a:rPr>
                         <a:t>Összes</a:t>
                       </a:r>
-                      <a:endParaRPr sz="1100" u="none" cap="none" strike="noStrike"/>
+                      <a:endParaRPr b="1" sz="1300" u="none" cap="none" strike="noStrike">
+                        <a:latin typeface="Ubuntu"/>
+                        <a:ea typeface="Ubuntu"/>
+                        <a:cs typeface="Ubuntu"/>
+                        <a:sym typeface="Ubuntu"/>
+                      </a:endParaRPr>
                     </a:p>
                   </a:txBody>
                   <a:tcPr marT="27425" marB="27425" marR="54875" marL="54875" anchor="ctr">
@@ -28804,18 +28836,23 @@
                         <a:buNone/>
                       </a:pPr>
                       <a:r>
-                        <a:rPr lang="en-GB" sz="700" u="none" cap="none" strike="noStrike">
+                        <a:rPr lang="en-GB" sz="800" u="none" cap="none" strike="noStrike">
                           <a:solidFill>
                             <a:srgbClr val="1A1D2B"/>
                           </a:solidFill>
-                          <a:latin typeface="Calibri"/>
-                          <a:ea typeface="Calibri"/>
-                          <a:cs typeface="Calibri"/>
-                          <a:sym typeface="Calibri"/>
+                          <a:latin typeface="Ubuntu"/>
+                          <a:ea typeface="Ubuntu"/>
+                          <a:cs typeface="Ubuntu"/>
+                          <a:sym typeface="Ubuntu"/>
                         </a:rPr>
                         <a:t>Semleges vs. Pozitív</a:t>
                       </a:r>
-                      <a:endParaRPr sz="1100" u="none" cap="none" strike="noStrike"/>
+                      <a:endParaRPr sz="1200" u="none" cap="none" strike="noStrike">
+                        <a:latin typeface="Ubuntu"/>
+                        <a:ea typeface="Ubuntu"/>
+                        <a:cs typeface="Ubuntu"/>
+                        <a:sym typeface="Ubuntu"/>
+                      </a:endParaRPr>
                     </a:p>
                   </a:txBody>
                   <a:tcPr marT="27425" marB="27425" marR="54875" marL="54875" anchor="ctr">
@@ -28847,7 +28884,7 @@
                         <a:buNone/>
                       </a:pPr>
                       <a:r>
-                        <a:rPr lang="en-GB" sz="700" u="none" cap="none" strike="noStrike">
+                        <a:rPr lang="en-GB" sz="800" u="none" cap="none" strike="noStrike">
                           <a:solidFill>
                             <a:srgbClr val="1A1D2B"/>
                           </a:solidFill>
@@ -28858,7 +28895,7 @@
                         </a:rPr>
                         <a:t>10 252</a:t>
                       </a:r>
-                      <a:endParaRPr sz="1100" u="none" cap="none" strike="noStrike"/>
+                      <a:endParaRPr sz="1200" u="none" cap="none" strike="noStrike"/>
                     </a:p>
                   </a:txBody>
                   <a:tcPr marT="27425" marB="27425" marR="54875" marL="54875" anchor="ctr">
@@ -28890,7 +28927,7 @@
                         <a:buNone/>
                       </a:pPr>
                       <a:r>
-                        <a:rPr lang="en-GB" sz="700" u="none" cap="none" strike="noStrike">
+                        <a:rPr lang="en-GB" sz="800" u="none" cap="none" strike="noStrike">
                           <a:solidFill>
                             <a:srgbClr val="1A1D2B"/>
                           </a:solidFill>
@@ -28901,7 +28938,7 @@
                         </a:rPr>
                         <a:t>6 714</a:t>
                       </a:r>
-                      <a:endParaRPr sz="1100" u="none" cap="none" strike="noStrike"/>
+                      <a:endParaRPr sz="1200" u="none" cap="none" strike="noStrike"/>
                     </a:p>
                   </a:txBody>
                   <a:tcPr marT="27425" marB="27425" marR="54875" marL="54875" anchor="ctr">
@@ -28933,7 +28970,7 @@
                         <a:buNone/>
                       </a:pPr>
                       <a:r>
-                        <a:rPr lang="en-GB" sz="700" u="none" cap="none" strike="noStrike">
+                        <a:rPr lang="en-GB" sz="800" u="none" cap="none" strike="noStrike">
                           <a:solidFill>
                             <a:srgbClr val="1A1D2B"/>
                           </a:solidFill>
@@ -28944,7 +28981,7 @@
                         </a:rPr>
                         <a:t>&lt; 0.001</a:t>
                       </a:r>
-                      <a:endParaRPr sz="1100" u="none" cap="none" strike="noStrike"/>
+                      <a:endParaRPr sz="1200" u="none" cap="none" strike="noStrike"/>
                     </a:p>
                   </a:txBody>
                   <a:tcPr marT="27425" marB="27425" marR="54875" marL="54875" anchor="ctr">
@@ -28976,7 +29013,7 @@
                         <a:buNone/>
                       </a:pPr>
                       <a:r>
-                        <a:rPr lang="en-GB" sz="700" u="none" cap="none" strike="noStrike">
+                        <a:rPr lang="en-GB" sz="800" u="none" cap="none" strike="noStrike">
                           <a:solidFill>
                             <a:srgbClr val="1A1D2B"/>
                           </a:solidFill>
@@ -28987,7 +29024,7 @@
                         </a:rPr>
                         <a:t>−0.074</a:t>
                       </a:r>
-                      <a:endParaRPr sz="1100" u="none" cap="none" strike="noStrike"/>
+                      <a:endParaRPr sz="1200" u="none" cap="none" strike="noStrike"/>
                     </a:p>
                   </a:txBody>
                   <a:tcPr marT="27425" marB="27425" marR="54875" marL="54875" anchor="ctr">
@@ -29021,18 +29058,23 @@
                         <a:buNone/>
                       </a:pPr>
                       <a:r>
-                        <a:rPr b="1" lang="en-GB" sz="700" u="none" cap="none" strike="noStrike">
+                        <a:rPr b="1" lang="en-GB" sz="900" u="none" cap="none" strike="noStrike">
                           <a:solidFill>
                             <a:srgbClr val="1A1D2B"/>
                           </a:solidFill>
-                          <a:latin typeface="Calibri"/>
-                          <a:ea typeface="Calibri"/>
-                          <a:cs typeface="Calibri"/>
-                          <a:sym typeface="Calibri"/>
+                          <a:latin typeface="Ubuntu"/>
+                          <a:ea typeface="Ubuntu"/>
+                          <a:cs typeface="Ubuntu"/>
+                          <a:sym typeface="Ubuntu"/>
                         </a:rPr>
                         <a:t>Kormányközeli</a:t>
                       </a:r>
-                      <a:endParaRPr sz="1100" u="none" cap="none" strike="noStrike"/>
+                      <a:endParaRPr b="1" sz="1300" u="none" cap="none" strike="noStrike">
+                        <a:latin typeface="Ubuntu"/>
+                        <a:ea typeface="Ubuntu"/>
+                        <a:cs typeface="Ubuntu"/>
+                        <a:sym typeface="Ubuntu"/>
+                      </a:endParaRPr>
                     </a:p>
                   </a:txBody>
                   <a:tcPr marT="27425" marB="27425" marR="54875" marL="54875" anchor="ctr">
@@ -29064,18 +29106,23 @@
                         <a:buNone/>
                       </a:pPr>
                       <a:r>
-                        <a:rPr lang="en-GB" sz="700" u="none" cap="none" strike="noStrike">
+                        <a:rPr lang="en-GB" sz="800" u="none" cap="none" strike="noStrike">
                           <a:solidFill>
                             <a:srgbClr val="1A1D2B"/>
                           </a:solidFill>
-                          <a:latin typeface="Calibri"/>
-                          <a:ea typeface="Calibri"/>
-                          <a:cs typeface="Calibri"/>
-                          <a:sym typeface="Calibri"/>
+                          <a:latin typeface="Ubuntu"/>
+                          <a:ea typeface="Ubuntu"/>
+                          <a:cs typeface="Ubuntu"/>
+                          <a:sym typeface="Ubuntu"/>
                         </a:rPr>
                         <a:t>Negatív vs. Semleges</a:t>
                       </a:r>
-                      <a:endParaRPr sz="1100" u="none" cap="none" strike="noStrike"/>
+                      <a:endParaRPr sz="1200" u="none" cap="none" strike="noStrike">
+                        <a:latin typeface="Ubuntu"/>
+                        <a:ea typeface="Ubuntu"/>
+                        <a:cs typeface="Ubuntu"/>
+                        <a:sym typeface="Ubuntu"/>
+                      </a:endParaRPr>
                     </a:p>
                   </a:txBody>
                   <a:tcPr marT="27425" marB="27425" marR="54875" marL="54875" anchor="ctr">
@@ -29107,7 +29154,7 @@
                         <a:buNone/>
                       </a:pPr>
                       <a:r>
-                        <a:rPr lang="en-GB" sz="700" u="none" cap="none" strike="noStrike">
+                        <a:rPr lang="en-GB" sz="800" u="none" cap="none" strike="noStrike">
                           <a:solidFill>
                             <a:srgbClr val="1A1D2B"/>
                           </a:solidFill>
@@ -29118,7 +29165,7 @@
                         </a:rPr>
                         <a:t>7 914</a:t>
                       </a:r>
-                      <a:endParaRPr sz="1100" u="none" cap="none" strike="noStrike"/>
+                      <a:endParaRPr sz="1200" u="none" cap="none" strike="noStrike"/>
                     </a:p>
                   </a:txBody>
                   <a:tcPr marT="27425" marB="27425" marR="54875" marL="54875" anchor="ctr">
@@ -29150,7 +29197,7 @@
                         <a:buNone/>
                       </a:pPr>
                       <a:r>
-                        <a:rPr lang="en-GB" sz="700" u="none" cap="none" strike="noStrike">
+                        <a:rPr lang="en-GB" sz="800" u="none" cap="none" strike="noStrike">
                           <a:solidFill>
                             <a:srgbClr val="1A1D2B"/>
                           </a:solidFill>
@@ -29161,7 +29208,7 @@
                         </a:rPr>
                         <a:t>5 521</a:t>
                       </a:r>
-                      <a:endParaRPr sz="1100" u="none" cap="none" strike="noStrike"/>
+                      <a:endParaRPr sz="1200" u="none" cap="none" strike="noStrike"/>
                     </a:p>
                   </a:txBody>
                   <a:tcPr marT="27425" marB="27425" marR="54875" marL="54875" anchor="ctr">
@@ -29193,7 +29240,7 @@
                         <a:buNone/>
                       </a:pPr>
                       <a:r>
-                        <a:rPr lang="en-GB" sz="700" u="none" cap="none" strike="noStrike">
+                        <a:rPr lang="en-GB" sz="800" u="none" cap="none" strike="noStrike">
                           <a:solidFill>
                             <a:srgbClr val="1A1D2B"/>
                           </a:solidFill>
@@ -29204,7 +29251,7 @@
                         </a:rPr>
                         <a:t>0.0018</a:t>
                       </a:r>
-                      <a:endParaRPr sz="1100" u="none" cap="none" strike="noStrike"/>
+                      <a:endParaRPr sz="1200" u="none" cap="none" strike="noStrike"/>
                     </a:p>
                   </a:txBody>
                   <a:tcPr marT="27425" marB="27425" marR="54875" marL="54875" anchor="ctr">
@@ -29236,7 +29283,7 @@
                         <a:buNone/>
                       </a:pPr>
                       <a:r>
-                        <a:rPr lang="en-GB" sz="700" u="none" cap="none" strike="noStrike">
+                        <a:rPr lang="en-GB" sz="800" u="none" cap="none" strike="noStrike">
                           <a:solidFill>
                             <a:srgbClr val="1A1D2B"/>
                           </a:solidFill>
@@ -29247,7 +29294,7 @@
                         </a:rPr>
                         <a:t>−0.029</a:t>
                       </a:r>
-                      <a:endParaRPr sz="1100" u="none" cap="none" strike="noStrike"/>
+                      <a:endParaRPr sz="1200" u="none" cap="none" strike="noStrike"/>
                     </a:p>
                   </a:txBody>
                   <a:tcPr marT="27425" marB="27425" marR="54875" marL="54875" anchor="ctr">
@@ -29281,18 +29328,23 @@
                         <a:buNone/>
                       </a:pPr>
                       <a:r>
-                        <a:rPr b="1" lang="en-GB" sz="700" u="none" cap="none" strike="noStrike">
+                        <a:rPr b="1" lang="en-GB" sz="900" u="none" cap="none" strike="noStrike">
                           <a:solidFill>
                             <a:srgbClr val="1A1D2B"/>
                           </a:solidFill>
-                          <a:latin typeface="Calibri"/>
-                          <a:ea typeface="Calibri"/>
-                          <a:cs typeface="Calibri"/>
-                          <a:sym typeface="Calibri"/>
+                          <a:latin typeface="Ubuntu"/>
+                          <a:ea typeface="Ubuntu"/>
+                          <a:cs typeface="Ubuntu"/>
+                          <a:sym typeface="Ubuntu"/>
                         </a:rPr>
                         <a:t>Kormányközeli</a:t>
                       </a:r>
-                      <a:endParaRPr sz="1100" u="none" cap="none" strike="noStrike"/>
+                      <a:endParaRPr b="1" sz="1300" u="none" cap="none" strike="noStrike">
+                        <a:latin typeface="Ubuntu"/>
+                        <a:ea typeface="Ubuntu"/>
+                        <a:cs typeface="Ubuntu"/>
+                        <a:sym typeface="Ubuntu"/>
+                      </a:endParaRPr>
                     </a:p>
                   </a:txBody>
                   <a:tcPr marT="27425" marB="27425" marR="54875" marL="54875" anchor="ctr">
@@ -29324,18 +29376,23 @@
                         <a:buNone/>
                       </a:pPr>
                       <a:r>
-                        <a:rPr lang="en-GB" sz="700" u="none" cap="none" strike="noStrike">
+                        <a:rPr lang="en-GB" sz="800" u="none" cap="none" strike="noStrike">
                           <a:solidFill>
                             <a:srgbClr val="1A1D2B"/>
                           </a:solidFill>
-                          <a:latin typeface="Calibri"/>
-                          <a:ea typeface="Calibri"/>
-                          <a:cs typeface="Calibri"/>
-                          <a:sym typeface="Calibri"/>
+                          <a:latin typeface="Ubuntu"/>
+                          <a:ea typeface="Ubuntu"/>
+                          <a:cs typeface="Ubuntu"/>
+                          <a:sym typeface="Ubuntu"/>
                         </a:rPr>
                         <a:t>Negatív vs. Pozitív</a:t>
                       </a:r>
-                      <a:endParaRPr sz="1100" u="none" cap="none" strike="noStrike"/>
+                      <a:endParaRPr sz="1200" u="none" cap="none" strike="noStrike">
+                        <a:latin typeface="Ubuntu"/>
+                        <a:ea typeface="Ubuntu"/>
+                        <a:cs typeface="Ubuntu"/>
+                        <a:sym typeface="Ubuntu"/>
+                      </a:endParaRPr>
                     </a:p>
                   </a:txBody>
                   <a:tcPr marT="27425" marB="27425" marR="54875" marL="54875" anchor="ctr">
@@ -29367,7 +29424,7 @@
                         <a:buNone/>
                       </a:pPr>
                       <a:r>
-                        <a:rPr lang="en-GB" sz="700" u="none" cap="none" strike="noStrike">
+                        <a:rPr lang="en-GB" sz="800" u="none" cap="none" strike="noStrike">
                           <a:solidFill>
                             <a:srgbClr val="1A1D2B"/>
                           </a:solidFill>
@@ -29378,7 +29435,7 @@
                         </a:rPr>
                         <a:t>7 914</a:t>
                       </a:r>
-                      <a:endParaRPr sz="1100" u="none" cap="none" strike="noStrike"/>
+                      <a:endParaRPr sz="1200" u="none" cap="none" strike="noStrike"/>
                     </a:p>
                   </a:txBody>
                   <a:tcPr marT="27425" marB="27425" marR="54875" marL="54875" anchor="ctr">
@@ -29410,7 +29467,7 @@
                         <a:buNone/>
                       </a:pPr>
                       <a:r>
-                        <a:rPr lang="en-GB" sz="700" u="none" cap="none" strike="noStrike">
+                        <a:rPr lang="en-GB" sz="800" u="none" cap="none" strike="noStrike">
                           <a:solidFill>
                             <a:srgbClr val="1A1D2B"/>
                           </a:solidFill>
@@ -29421,7 +29478,7 @@
                         </a:rPr>
                         <a:t>4 213</a:t>
                       </a:r>
-                      <a:endParaRPr sz="1100" u="none" cap="none" strike="noStrike"/>
+                      <a:endParaRPr sz="1200" u="none" cap="none" strike="noStrike"/>
                     </a:p>
                   </a:txBody>
                   <a:tcPr marT="27425" marB="27425" marR="54875" marL="54875" anchor="ctr">
@@ -29453,7 +29510,7 @@
                         <a:buNone/>
                       </a:pPr>
                       <a:r>
-                        <a:rPr lang="en-GB" sz="700" u="none" cap="none" strike="noStrike">
+                        <a:rPr lang="en-GB" sz="800" u="none" cap="none" strike="noStrike">
                           <a:solidFill>
                             <a:srgbClr val="1A1D2B"/>
                           </a:solidFill>
@@ -29464,7 +29521,7 @@
                         </a:rPr>
                         <a:t>&lt; 0.001</a:t>
                       </a:r>
-                      <a:endParaRPr sz="1100" u="none" cap="none" strike="noStrike"/>
+                      <a:endParaRPr sz="1200" u="none" cap="none" strike="noStrike"/>
                     </a:p>
                   </a:txBody>
                   <a:tcPr marT="27425" marB="27425" marR="54875" marL="54875" anchor="ctr">
@@ -29496,7 +29553,7 @@
                         <a:buNone/>
                       </a:pPr>
                       <a:r>
-                        <a:rPr lang="en-GB" sz="700" u="none" cap="none" strike="noStrike">
+                        <a:rPr lang="en-GB" sz="800" u="none" cap="none" strike="noStrike">
                           <a:solidFill>
                             <a:srgbClr val="1A1D2B"/>
                           </a:solidFill>
@@ -29507,7 +29564,7 @@
                         </a:rPr>
                         <a:t>−0.120</a:t>
                       </a:r>
-                      <a:endParaRPr sz="1100" u="none" cap="none" strike="noStrike"/>
+                      <a:endParaRPr sz="1200" u="none" cap="none" strike="noStrike"/>
                     </a:p>
                   </a:txBody>
                   <a:tcPr marT="27425" marB="27425" marR="54875" marL="54875" anchor="ctr">
@@ -29541,18 +29598,23 @@
                         <a:buNone/>
                       </a:pPr>
                       <a:r>
-                        <a:rPr b="1" lang="en-GB" sz="700" u="none" cap="none" strike="noStrike">
+                        <a:rPr b="1" lang="en-GB" sz="900" u="none" cap="none" strike="noStrike">
                           <a:solidFill>
                             <a:srgbClr val="1A1D2B"/>
                           </a:solidFill>
-                          <a:latin typeface="Calibri"/>
-                          <a:ea typeface="Calibri"/>
-                          <a:cs typeface="Calibri"/>
-                          <a:sym typeface="Calibri"/>
+                          <a:latin typeface="Ubuntu"/>
+                          <a:ea typeface="Ubuntu"/>
+                          <a:cs typeface="Ubuntu"/>
+                          <a:sym typeface="Ubuntu"/>
                         </a:rPr>
                         <a:t>Kormányközeli</a:t>
                       </a:r>
-                      <a:endParaRPr sz="1100" u="none" cap="none" strike="noStrike"/>
+                      <a:endParaRPr b="1" sz="1300" u="none" cap="none" strike="noStrike">
+                        <a:latin typeface="Ubuntu"/>
+                        <a:ea typeface="Ubuntu"/>
+                        <a:cs typeface="Ubuntu"/>
+                        <a:sym typeface="Ubuntu"/>
+                      </a:endParaRPr>
                     </a:p>
                   </a:txBody>
                   <a:tcPr marT="27425" marB="27425" marR="54875" marL="54875" anchor="ctr">
@@ -29584,18 +29646,23 @@
                         <a:buNone/>
                       </a:pPr>
                       <a:r>
-                        <a:rPr lang="en-GB" sz="700" u="none" cap="none" strike="noStrike">
+                        <a:rPr lang="en-GB" sz="800" u="none" cap="none" strike="noStrike">
                           <a:solidFill>
                             <a:srgbClr val="1A1D2B"/>
                           </a:solidFill>
-                          <a:latin typeface="Calibri"/>
-                          <a:ea typeface="Calibri"/>
-                          <a:cs typeface="Calibri"/>
-                          <a:sym typeface="Calibri"/>
+                          <a:latin typeface="Ubuntu"/>
+                          <a:ea typeface="Ubuntu"/>
+                          <a:cs typeface="Ubuntu"/>
+                          <a:sym typeface="Ubuntu"/>
                         </a:rPr>
                         <a:t>Semleges vs. Pozitív</a:t>
                       </a:r>
-                      <a:endParaRPr sz="1100" u="none" cap="none" strike="noStrike"/>
+                      <a:endParaRPr sz="1200" u="none" cap="none" strike="noStrike">
+                        <a:latin typeface="Ubuntu"/>
+                        <a:ea typeface="Ubuntu"/>
+                        <a:cs typeface="Ubuntu"/>
+                        <a:sym typeface="Ubuntu"/>
+                      </a:endParaRPr>
                     </a:p>
                   </a:txBody>
                   <a:tcPr marT="27425" marB="27425" marR="54875" marL="54875" anchor="ctr">
@@ -29627,7 +29694,7 @@
                         <a:buNone/>
                       </a:pPr>
                       <a:r>
-                        <a:rPr lang="en-GB" sz="700" u="none" cap="none" strike="noStrike">
+                        <a:rPr lang="en-GB" sz="800" u="none" cap="none" strike="noStrike">
                           <a:solidFill>
                             <a:srgbClr val="1A1D2B"/>
                           </a:solidFill>
@@ -29638,7 +29705,7 @@
                         </a:rPr>
                         <a:t>5 521</a:t>
                       </a:r>
-                      <a:endParaRPr sz="1100" u="none" cap="none" strike="noStrike"/>
+                      <a:endParaRPr sz="1200" u="none" cap="none" strike="noStrike"/>
                     </a:p>
                   </a:txBody>
                   <a:tcPr marT="27425" marB="27425" marR="54875" marL="54875" anchor="ctr">
@@ -29670,7 +29737,7 @@
                         <a:buNone/>
                       </a:pPr>
                       <a:r>
-                        <a:rPr lang="en-GB" sz="700" u="none" cap="none" strike="noStrike">
+                        <a:rPr lang="en-GB" sz="800" u="none" cap="none" strike="noStrike">
                           <a:solidFill>
                             <a:srgbClr val="1A1D2B"/>
                           </a:solidFill>
@@ -29681,7 +29748,7 @@
                         </a:rPr>
                         <a:t>4 213</a:t>
                       </a:r>
-                      <a:endParaRPr sz="1100" u="none" cap="none" strike="noStrike"/>
+                      <a:endParaRPr sz="1200" u="none" cap="none" strike="noStrike"/>
                     </a:p>
                   </a:txBody>
                   <a:tcPr marT="27425" marB="27425" marR="54875" marL="54875" anchor="ctr">
@@ -29713,7 +29780,7 @@
                         <a:buNone/>
                       </a:pPr>
                       <a:r>
-                        <a:rPr lang="en-GB" sz="700" u="none" cap="none" strike="noStrike">
+                        <a:rPr lang="en-GB" sz="800" u="none" cap="none" strike="noStrike">
                           <a:solidFill>
                             <a:srgbClr val="1A1D2B"/>
                           </a:solidFill>
@@ -29724,7 +29791,7 @@
                         </a:rPr>
                         <a:t>&lt; 0.001</a:t>
                       </a:r>
-                      <a:endParaRPr sz="1100" u="none" cap="none" strike="noStrike"/>
+                      <a:endParaRPr sz="1200" u="none" cap="none" strike="noStrike"/>
                     </a:p>
                   </a:txBody>
                   <a:tcPr marT="27425" marB="27425" marR="54875" marL="54875" anchor="ctr">
@@ -29756,7 +29823,7 @@
                         <a:buNone/>
                       </a:pPr>
                       <a:r>
-                        <a:rPr lang="en-GB" sz="700" u="none" cap="none" strike="noStrike">
+                        <a:rPr lang="en-GB" sz="800" u="none" cap="none" strike="noStrike">
                           <a:solidFill>
                             <a:srgbClr val="1A1D2B"/>
                           </a:solidFill>
@@ -29767,7 +29834,7 @@
                         </a:rPr>
                         <a:t>−0.093</a:t>
                       </a:r>
-                      <a:endParaRPr sz="1100" u="none" cap="none" strike="noStrike"/>
+                      <a:endParaRPr sz="1200" u="none" cap="none" strike="noStrike"/>
                     </a:p>
                   </a:txBody>
                   <a:tcPr marT="27425" marB="27425" marR="54875" marL="54875" anchor="ctr">
@@ -29801,18 +29868,23 @@
                         <a:buNone/>
                       </a:pPr>
                       <a:r>
-                        <a:rPr b="1" lang="en-GB" sz="700" u="none" cap="none" strike="noStrike">
+                        <a:rPr b="1" lang="en-GB" sz="900" u="none" cap="none" strike="noStrike">
                           <a:solidFill>
                             <a:srgbClr val="1A1D2B"/>
                           </a:solidFill>
-                          <a:latin typeface="Calibri"/>
-                          <a:ea typeface="Calibri"/>
-                          <a:cs typeface="Calibri"/>
-                          <a:sym typeface="Calibri"/>
+                          <a:latin typeface="Ubuntu"/>
+                          <a:ea typeface="Ubuntu"/>
+                          <a:cs typeface="Ubuntu"/>
+                          <a:sym typeface="Ubuntu"/>
                         </a:rPr>
                         <a:t>Független</a:t>
                       </a:r>
-                      <a:endParaRPr sz="1100" u="none" cap="none" strike="noStrike"/>
+                      <a:endParaRPr b="1" sz="1300" u="none" cap="none" strike="noStrike">
+                        <a:latin typeface="Ubuntu"/>
+                        <a:ea typeface="Ubuntu"/>
+                        <a:cs typeface="Ubuntu"/>
+                        <a:sym typeface="Ubuntu"/>
+                      </a:endParaRPr>
                     </a:p>
                   </a:txBody>
                   <a:tcPr marT="27425" marB="27425" marR="54875" marL="54875" anchor="ctr">
@@ -29844,18 +29916,23 @@
                         <a:buNone/>
                       </a:pPr>
                       <a:r>
-                        <a:rPr lang="en-GB" sz="700" u="none" cap="none" strike="noStrike">
+                        <a:rPr lang="en-GB" sz="800" u="none" cap="none" strike="noStrike">
                           <a:solidFill>
                             <a:srgbClr val="1A1D2B"/>
                           </a:solidFill>
-                          <a:latin typeface="Calibri"/>
-                          <a:ea typeface="Calibri"/>
-                          <a:cs typeface="Calibri"/>
-                          <a:sym typeface="Calibri"/>
+                          <a:latin typeface="Ubuntu"/>
+                          <a:ea typeface="Ubuntu"/>
+                          <a:cs typeface="Ubuntu"/>
+                          <a:sym typeface="Ubuntu"/>
                         </a:rPr>
                         <a:t>Negatív vs. Semleges</a:t>
                       </a:r>
-                      <a:endParaRPr sz="1100" u="none" cap="none" strike="noStrike"/>
+                      <a:endParaRPr sz="1200" u="none" cap="none" strike="noStrike">
+                        <a:latin typeface="Ubuntu"/>
+                        <a:ea typeface="Ubuntu"/>
+                        <a:cs typeface="Ubuntu"/>
+                        <a:sym typeface="Ubuntu"/>
+                      </a:endParaRPr>
                     </a:p>
                   </a:txBody>
                   <a:tcPr marT="27425" marB="27425" marR="54875" marL="54875" anchor="ctr">
@@ -29887,7 +29964,7 @@
                         <a:buNone/>
                       </a:pPr>
                       <a:r>
-                        <a:rPr lang="en-GB" sz="700" u="none" cap="none" strike="noStrike">
+                        <a:rPr lang="en-GB" sz="800" u="none" cap="none" strike="noStrike">
                           <a:solidFill>
                             <a:srgbClr val="1A1D2B"/>
                           </a:solidFill>
@@ -29898,7 +29975,7 @@
                         </a:rPr>
                         <a:t>4 806</a:t>
                       </a:r>
-                      <a:endParaRPr sz="1100" u="none" cap="none" strike="noStrike"/>
+                      <a:endParaRPr sz="1200" u="none" cap="none" strike="noStrike"/>
                     </a:p>
                   </a:txBody>
                   <a:tcPr marT="27425" marB="27425" marR="54875" marL="54875" anchor="ctr">
@@ -29930,7 +30007,7 @@
                         <a:buNone/>
                       </a:pPr>
                       <a:r>
-                        <a:rPr lang="en-GB" sz="700" u="none" cap="none" strike="noStrike">
+                        <a:rPr lang="en-GB" sz="800" u="none" cap="none" strike="noStrike">
                           <a:solidFill>
                             <a:srgbClr val="1A1D2B"/>
                           </a:solidFill>
@@ -29941,7 +30018,7 @@
                         </a:rPr>
                         <a:t>4 731</a:t>
                       </a:r>
-                      <a:endParaRPr sz="1100" u="none" cap="none" strike="noStrike"/>
+                      <a:endParaRPr sz="1200" u="none" cap="none" strike="noStrike"/>
                     </a:p>
                   </a:txBody>
                   <a:tcPr marT="27425" marB="27425" marR="54875" marL="54875" anchor="ctr">
@@ -29973,7 +30050,7 @@
                         <a:buNone/>
                       </a:pPr>
                       <a:r>
-                        <a:rPr lang="en-GB" sz="700" u="none" cap="none" strike="noStrike">
+                        <a:rPr lang="en-GB" sz="800" u="none" cap="none" strike="noStrike">
                           <a:solidFill>
                             <a:srgbClr val="1A1D2B"/>
                           </a:solidFill>
@@ -29984,7 +30061,7 @@
                         </a:rPr>
                         <a:t>&lt; 0.001</a:t>
                       </a:r>
-                      <a:endParaRPr sz="1100" u="none" cap="none" strike="noStrike"/>
+                      <a:endParaRPr sz="1200" u="none" cap="none" strike="noStrike"/>
                     </a:p>
                   </a:txBody>
                   <a:tcPr marT="27425" marB="27425" marR="54875" marL="54875" anchor="ctr">
@@ -30016,7 +30093,7 @@
                         <a:buNone/>
                       </a:pPr>
                       <a:r>
-                        <a:rPr lang="en-GB" sz="700" u="none" cap="none" strike="noStrike">
+                        <a:rPr lang="en-GB" sz="800" u="none" cap="none" strike="noStrike">
                           <a:solidFill>
                             <a:srgbClr val="1A1D2B"/>
                           </a:solidFill>
@@ -30027,7 +30104,7 @@
                         </a:rPr>
                         <a:t>−0.052</a:t>
                       </a:r>
-                      <a:endParaRPr sz="1100" u="none" cap="none" strike="noStrike"/>
+                      <a:endParaRPr sz="1200" u="none" cap="none" strike="noStrike"/>
                     </a:p>
                   </a:txBody>
                   <a:tcPr marT="27425" marB="27425" marR="54875" marL="54875" anchor="ctr">
@@ -30061,18 +30138,23 @@
                         <a:buNone/>
                       </a:pPr>
                       <a:r>
-                        <a:rPr b="1" lang="en-GB" sz="700" u="none" cap="none" strike="noStrike">
+                        <a:rPr b="1" lang="en-GB" sz="900" u="none" cap="none" strike="noStrike">
                           <a:solidFill>
                             <a:srgbClr val="1A1D2B"/>
                           </a:solidFill>
-                          <a:latin typeface="Calibri"/>
-                          <a:ea typeface="Calibri"/>
-                          <a:cs typeface="Calibri"/>
-                          <a:sym typeface="Calibri"/>
+                          <a:latin typeface="Ubuntu"/>
+                          <a:ea typeface="Ubuntu"/>
+                          <a:cs typeface="Ubuntu"/>
+                          <a:sym typeface="Ubuntu"/>
                         </a:rPr>
                         <a:t>Független</a:t>
                       </a:r>
-                      <a:endParaRPr sz="1100" u="none" cap="none" strike="noStrike"/>
+                      <a:endParaRPr b="1" sz="1300" u="none" cap="none" strike="noStrike">
+                        <a:latin typeface="Ubuntu"/>
+                        <a:ea typeface="Ubuntu"/>
+                        <a:cs typeface="Ubuntu"/>
+                        <a:sym typeface="Ubuntu"/>
+                      </a:endParaRPr>
                     </a:p>
                   </a:txBody>
                   <a:tcPr marT="27425" marB="27425" marR="54875" marL="54875" anchor="ctr">
@@ -30104,18 +30186,23 @@
                         <a:buNone/>
                       </a:pPr>
                       <a:r>
-                        <a:rPr lang="en-GB" sz="700" u="none" cap="none" strike="noStrike">
+                        <a:rPr lang="en-GB" sz="800" u="none" cap="none" strike="noStrike">
                           <a:solidFill>
                             <a:srgbClr val="1A1D2B"/>
                           </a:solidFill>
-                          <a:latin typeface="Calibri"/>
-                          <a:ea typeface="Calibri"/>
-                          <a:cs typeface="Calibri"/>
-                          <a:sym typeface="Calibri"/>
+                          <a:latin typeface="Ubuntu"/>
+                          <a:ea typeface="Ubuntu"/>
+                          <a:cs typeface="Ubuntu"/>
+                          <a:sym typeface="Ubuntu"/>
                         </a:rPr>
                         <a:t>Negatív vs. Pozitív</a:t>
                       </a:r>
-                      <a:endParaRPr sz="1100" u="none" cap="none" strike="noStrike"/>
+                      <a:endParaRPr sz="1200" u="none" cap="none" strike="noStrike">
+                        <a:latin typeface="Ubuntu"/>
+                        <a:ea typeface="Ubuntu"/>
+                        <a:cs typeface="Ubuntu"/>
+                        <a:sym typeface="Ubuntu"/>
+                      </a:endParaRPr>
                     </a:p>
                   </a:txBody>
                   <a:tcPr marT="27425" marB="27425" marR="54875" marL="54875" anchor="ctr">
@@ -30147,7 +30234,7 @@
                         <a:buNone/>
                       </a:pPr>
                       <a:r>
-                        <a:rPr lang="en-GB" sz="700" u="none" cap="none" strike="noStrike">
+                        <a:rPr lang="en-GB" sz="800" u="none" cap="none" strike="noStrike">
                           <a:solidFill>
                             <a:srgbClr val="1A1D2B"/>
                           </a:solidFill>
@@ -30158,7 +30245,7 @@
                         </a:rPr>
                         <a:t>4 806</a:t>
                       </a:r>
-                      <a:endParaRPr sz="1100" u="none" cap="none" strike="noStrike"/>
+                      <a:endParaRPr sz="1200" u="none" cap="none" strike="noStrike"/>
                     </a:p>
                   </a:txBody>
                   <a:tcPr marT="27425" marB="27425" marR="54875" marL="54875" anchor="ctr">
@@ -30190,7 +30277,7 @@
                         <a:buNone/>
                       </a:pPr>
                       <a:r>
-                        <a:rPr lang="en-GB" sz="700" u="none" cap="none" strike="noStrike">
+                        <a:rPr lang="en-GB" sz="800" u="none" cap="none" strike="noStrike">
                           <a:solidFill>
                             <a:srgbClr val="1A1D2B"/>
                           </a:solidFill>
@@ -30201,7 +30288,7 @@
                         </a:rPr>
                         <a:t>2 501</a:t>
                       </a:r>
-                      <a:endParaRPr sz="1100" u="none" cap="none" strike="noStrike"/>
+                      <a:endParaRPr sz="1200" u="none" cap="none" strike="noStrike"/>
                     </a:p>
                   </a:txBody>
                   <a:tcPr marT="27425" marB="27425" marR="54875" marL="54875" anchor="ctr">
@@ -30233,7 +30320,7 @@
                         <a:buNone/>
                       </a:pPr>
                       <a:r>
-                        <a:rPr lang="en-GB" sz="700" u="none" cap="none" strike="noStrike">
+                        <a:rPr lang="en-GB" sz="800" u="none" cap="none" strike="noStrike">
                           <a:solidFill>
                             <a:srgbClr val="1A1D2B"/>
                           </a:solidFill>
@@ -30244,7 +30331,7 @@
                         </a:rPr>
                         <a:t>&lt; 0.001</a:t>
                       </a:r>
-                      <a:endParaRPr sz="1100" u="none" cap="none" strike="noStrike"/>
+                      <a:endParaRPr sz="1200" u="none" cap="none" strike="noStrike"/>
                     </a:p>
                   </a:txBody>
                   <a:tcPr marT="27425" marB="27425" marR="54875" marL="54875" anchor="ctr">
@@ -30276,7 +30363,7 @@
                         <a:buNone/>
                       </a:pPr>
                       <a:r>
-                        <a:rPr lang="en-GB" sz="700" u="none" cap="none" strike="noStrike">
+                        <a:rPr lang="en-GB" sz="800" u="none" cap="none" strike="noStrike">
                           <a:solidFill>
                             <a:srgbClr val="1A1D2B"/>
                           </a:solidFill>
@@ -30287,7 +30374,7 @@
                         </a:rPr>
                         <a:t>−0.173</a:t>
                       </a:r>
-                      <a:endParaRPr sz="1100" u="none" cap="none" strike="noStrike"/>
+                      <a:endParaRPr sz="1200" u="none" cap="none" strike="noStrike"/>
                     </a:p>
                   </a:txBody>
                   <a:tcPr marT="27425" marB="27425" marR="54875" marL="54875" anchor="ctr">
@@ -30321,18 +30408,23 @@
                         <a:buNone/>
                       </a:pPr>
                       <a:r>
-                        <a:rPr b="1" lang="en-GB" sz="700" u="none" cap="none" strike="noStrike">
+                        <a:rPr b="1" lang="en-GB" sz="900" u="none" cap="none" strike="noStrike">
                           <a:solidFill>
                             <a:srgbClr val="1A1D2B"/>
                           </a:solidFill>
-                          <a:latin typeface="Calibri"/>
-                          <a:ea typeface="Calibri"/>
-                          <a:cs typeface="Calibri"/>
-                          <a:sym typeface="Calibri"/>
+                          <a:latin typeface="Ubuntu"/>
+                          <a:ea typeface="Ubuntu"/>
+                          <a:cs typeface="Ubuntu"/>
+                          <a:sym typeface="Ubuntu"/>
                         </a:rPr>
                         <a:t>Független</a:t>
                       </a:r>
-                      <a:endParaRPr sz="1100" u="none" cap="none" strike="noStrike"/>
+                      <a:endParaRPr b="1" sz="1300" u="none" cap="none" strike="noStrike">
+                        <a:latin typeface="Ubuntu"/>
+                        <a:ea typeface="Ubuntu"/>
+                        <a:cs typeface="Ubuntu"/>
+                        <a:sym typeface="Ubuntu"/>
+                      </a:endParaRPr>
                     </a:p>
                   </a:txBody>
                   <a:tcPr marT="27425" marB="27425" marR="54875" marL="54875" anchor="ctr">
@@ -30364,18 +30456,23 @@
                         <a:buNone/>
                       </a:pPr>
                       <a:r>
-                        <a:rPr lang="en-GB" sz="700" u="none" cap="none" strike="noStrike">
+                        <a:rPr lang="en-GB" sz="800" u="none" cap="none" strike="noStrike">
                           <a:solidFill>
                             <a:srgbClr val="1A1D2B"/>
                           </a:solidFill>
-                          <a:latin typeface="Calibri"/>
-                          <a:ea typeface="Calibri"/>
-                          <a:cs typeface="Calibri"/>
-                          <a:sym typeface="Calibri"/>
+                          <a:latin typeface="Ubuntu"/>
+                          <a:ea typeface="Ubuntu"/>
+                          <a:cs typeface="Ubuntu"/>
+                          <a:sym typeface="Ubuntu"/>
                         </a:rPr>
                         <a:t>Semleges vs. Pozitív</a:t>
                       </a:r>
-                      <a:endParaRPr sz="1100" u="none" cap="none" strike="noStrike"/>
+                      <a:endParaRPr sz="1200" u="none" cap="none" strike="noStrike">
+                        <a:latin typeface="Ubuntu"/>
+                        <a:ea typeface="Ubuntu"/>
+                        <a:cs typeface="Ubuntu"/>
+                        <a:sym typeface="Ubuntu"/>
+                      </a:endParaRPr>
                     </a:p>
                   </a:txBody>
                   <a:tcPr marT="27425" marB="27425" marR="54875" marL="54875" anchor="ctr">
@@ -30407,7 +30504,7 @@
                         <a:buNone/>
                       </a:pPr>
                       <a:r>
-                        <a:rPr lang="en-GB" sz="700" u="none" cap="none" strike="noStrike">
+                        <a:rPr lang="en-GB" sz="800" u="none" cap="none" strike="noStrike">
                           <a:solidFill>
                             <a:srgbClr val="1A1D2B"/>
                           </a:solidFill>
@@ -30418,7 +30515,7 @@
                         </a:rPr>
                         <a:t>4 731</a:t>
                       </a:r>
-                      <a:endParaRPr sz="1100" u="none" cap="none" strike="noStrike"/>
+                      <a:endParaRPr sz="1200" u="none" cap="none" strike="noStrike"/>
                     </a:p>
                   </a:txBody>
                   <a:tcPr marT="27425" marB="27425" marR="54875" marL="54875" anchor="ctr">
@@ -30450,7 +30547,7 @@
                         <a:buNone/>
                       </a:pPr>
                       <a:r>
-                        <a:rPr lang="en-GB" sz="700" u="none" cap="none" strike="noStrike">
+                        <a:rPr lang="en-GB" sz="800" u="none" cap="none" strike="noStrike">
                           <a:solidFill>
                             <a:srgbClr val="1A1D2B"/>
                           </a:solidFill>
@@ -30461,7 +30558,7 @@
                         </a:rPr>
                         <a:t>2 501</a:t>
                       </a:r>
-                      <a:endParaRPr sz="1100" u="none" cap="none" strike="noStrike"/>
+                      <a:endParaRPr sz="1200" u="none" cap="none" strike="noStrike"/>
                     </a:p>
                   </a:txBody>
                   <a:tcPr marT="27425" marB="27425" marR="54875" marL="54875" anchor="ctr">
@@ -30493,7 +30590,7 @@
                         <a:buNone/>
                       </a:pPr>
                       <a:r>
-                        <a:rPr lang="en-GB" sz="700" u="none" cap="none" strike="noStrike">
+                        <a:rPr lang="en-GB" sz="800" u="none" cap="none" strike="noStrike">
                           <a:solidFill>
                             <a:srgbClr val="1A1D2B"/>
                           </a:solidFill>
@@ -30504,7 +30601,7 @@
                         </a:rPr>
                         <a:t>&lt; 0.001</a:t>
                       </a:r>
-                      <a:endParaRPr sz="1100" u="none" cap="none" strike="noStrike"/>
+                      <a:endParaRPr sz="1200" u="none" cap="none" strike="noStrike"/>
                     </a:p>
                   </a:txBody>
                   <a:tcPr marT="27425" marB="27425" marR="54875" marL="54875" anchor="ctr">
@@ -30536,7 +30633,7 @@
                         <a:buNone/>
                       </a:pPr>
                       <a:r>
-                        <a:rPr lang="en-GB" sz="700" u="none" cap="none" strike="noStrike">
+                        <a:rPr lang="en-GB" sz="800" u="none" cap="none" strike="noStrike">
                           <a:solidFill>
                             <a:srgbClr val="1A1D2B"/>
                           </a:solidFill>
@@ -30547,7 +30644,7 @@
                         </a:rPr>
                         <a:t>−0.111</a:t>
                       </a:r>
-                      <a:endParaRPr sz="1100" u="none" cap="none" strike="noStrike"/>
+                      <a:endParaRPr sz="1200" u="none" cap="none" strike="noStrike"/>
                     </a:p>
                   </a:txBody>
                   <a:tcPr marT="27425" marB="27425" marR="54875" marL="54875" anchor="ctr">
@@ -30703,7 +30800,7 @@
         <p:spPr>
           <a:xfrm>
             <a:off x="514364" y="3737610"/>
-            <a:ext cx="4114910" cy="754380"/>
+            <a:ext cx="4114800" cy="581700"/>
           </a:xfrm>
           <a:prstGeom prst="rect">
             <a:avLst/>
@@ -30737,25 +30834,25 @@
               <a:buNone/>
             </a:pPr>
             <a:r>
-              <a:rPr b="0" i="0" lang="en-GB" sz="800" u="none" cap="none" strike="noStrike">
+              <a:rPr i="0" lang="en-GB" sz="1000" u="none" cap="none" strike="noStrike">
                 <a:solidFill>
                   <a:srgbClr val="1A1D2B"/>
                 </a:solidFill>
-                <a:latin typeface="Calibri"/>
-                <a:ea typeface="Calibri"/>
-                <a:cs typeface="Calibri"/>
-                <a:sym typeface="Calibri"/>
+                <a:latin typeface="Ubuntu"/>
+                <a:ea typeface="Ubuntu"/>
+                <a:cs typeface="Ubuntu"/>
+                <a:sym typeface="Ubuntu"/>
               </a:rPr>
               <a:t>Minden sávpár-teszt szignifikáns, de a hatásméretek kicsik.  A legnagyobb távolság a Negatív és Pozitív sávok között van — különösen a független portáloknál (r = −0.173).</a:t>
             </a:r>
-            <a:endParaRPr b="0" i="0" sz="1100" u="none" cap="none" strike="noStrike">
+            <a:endParaRPr i="0" sz="1300" u="none" cap="none" strike="noStrike">
               <a:solidFill>
                 <a:srgbClr val="000000"/>
               </a:solidFill>
-              <a:latin typeface="Arial"/>
-              <a:ea typeface="Arial"/>
-              <a:cs typeface="Arial"/>
-              <a:sym typeface="Arial"/>
+              <a:latin typeface="Ubuntu"/>
+              <a:ea typeface="Ubuntu"/>
+              <a:cs typeface="Ubuntu"/>
+              <a:sym typeface="Ubuntu"/>
             </a:endParaRPr>
           </a:p>
         </p:txBody>
@@ -31214,8 +31311,8 @@
         </p:blipFill>
         <p:spPr>
           <a:xfrm>
-            <a:off x="342909" y="1062990"/>
-            <a:ext cx="5212080" cy="2674620"/>
+            <a:off x="342909" y="1108940"/>
+            <a:ext cx="5212081" cy="2674620"/>
           </a:xfrm>
           <a:prstGeom prst="rect">
             <a:avLst/>
@@ -31241,7 +31338,7 @@
             <a:tbl>
               <a:tblPr>
                 <a:noFill/>
-                <a:tableStyleId>{02B4F9B2-E791-447A-981E-08FD4EC66F5B}</a:tableStyleId>
+                <a:tableStyleId>{29A1324E-E767-48CC-B2B4-CB8A3D8B7874}</a:tableStyleId>
               </a:tblPr>
               <a:tblGrid>
                 <a:gridCol w="1440225"/>
@@ -31915,8 +32012,8 @@
         </p:nvSpPr>
         <p:spPr>
           <a:xfrm>
-            <a:off x="5692292" y="2914650"/>
-            <a:ext cx="3189055" cy="822960"/>
+            <a:off x="5692300" y="2907266"/>
+            <a:ext cx="3189000" cy="891600"/>
           </a:xfrm>
           <a:prstGeom prst="roundRect">
             <a:avLst>
@@ -32049,7 +32146,7 @@
         <p:spPr>
           <a:xfrm>
             <a:off x="5829455" y="3209544"/>
-            <a:ext cx="2949019" cy="514350"/>
+            <a:ext cx="2949000" cy="526500"/>
           </a:xfrm>
           <a:prstGeom prst="rect">
             <a:avLst/>
@@ -32083,61 +32180,61 @@
               <a:buNone/>
             </a:pPr>
             <a:r>
-              <a:rPr b="1" i="0" lang="en-GB" sz="800" u="none" cap="none" strike="noStrike">
+              <a:rPr i="0" lang="en-GB" sz="900" u="none" cap="none" strike="noStrike">
                 <a:solidFill>
                   <a:srgbClr val="4A89C5"/>
                 </a:solidFill>
-                <a:latin typeface="Calibri"/>
-                <a:ea typeface="Calibri"/>
-                <a:cs typeface="Calibri"/>
-                <a:sym typeface="Calibri"/>
+                <a:latin typeface="Ubuntu"/>
+                <a:ea typeface="Ubuntu"/>
+                <a:cs typeface="Ubuntu"/>
+                <a:sym typeface="Ubuntu"/>
               </a:rPr>
               <a:t>β₁ = −0.105</a:t>
             </a:r>
             <a:r>
-              <a:rPr b="0" i="0" lang="en-GB" sz="800" u="none" cap="none" strike="noStrike">
+              <a:rPr i="0" lang="en-GB" sz="900" u="none" cap="none" strike="noStrike">
                 <a:solidFill>
                   <a:srgbClr val="1A1D2B"/>
                 </a:solidFill>
-                <a:latin typeface="Calibri"/>
-                <a:ea typeface="Calibri"/>
-                <a:cs typeface="Calibri"/>
-                <a:sym typeface="Calibri"/>
+                <a:latin typeface="Ubuntu"/>
+                <a:ea typeface="Ubuntu"/>
+                <a:cs typeface="Ubuntu"/>
+                <a:sym typeface="Ubuntu"/>
               </a:rPr>
               <a:t>:  a független portálokon a negatívabb címek nagyobb hangsúlyt kapnak.  </a:t>
             </a:r>
             <a:r>
-              <a:rPr b="1" i="0" lang="en-GB" sz="800" u="none" cap="none" strike="noStrike">
+              <a:rPr i="0" lang="en-GB" sz="900" u="none" cap="none" strike="noStrike">
                 <a:solidFill>
                   <a:srgbClr val="C75450"/>
                 </a:solidFill>
-                <a:latin typeface="Calibri"/>
-                <a:ea typeface="Calibri"/>
-                <a:cs typeface="Calibri"/>
-                <a:sym typeface="Calibri"/>
+                <a:latin typeface="Ubuntu"/>
+                <a:ea typeface="Ubuntu"/>
+                <a:cs typeface="Ubuntu"/>
+                <a:sym typeface="Ubuntu"/>
               </a:rPr>
               <a:t>β₃ = +0.049</a:t>
             </a:r>
             <a:r>
-              <a:rPr b="0" i="0" lang="en-GB" sz="800" u="none" cap="none" strike="noStrike">
+              <a:rPr i="0" lang="en-GB" sz="900" u="none" cap="none" strike="noStrike">
                 <a:solidFill>
                   <a:srgbClr val="1A1D2B"/>
                 </a:solidFill>
-                <a:latin typeface="Calibri"/>
-                <a:ea typeface="Calibri"/>
-                <a:cs typeface="Calibri"/>
-                <a:sym typeface="Calibri"/>
+                <a:latin typeface="Ubuntu"/>
+                <a:ea typeface="Ubuntu"/>
+                <a:cs typeface="Ubuntu"/>
+                <a:sym typeface="Ubuntu"/>
               </a:rPr>
               <a:t>:  a hatás mértéke médiablokkonként eltér.</a:t>
             </a:r>
-            <a:endParaRPr b="0" i="0" sz="1100" u="none" cap="none" strike="noStrike">
+            <a:endParaRPr i="0" sz="1200" u="none" cap="none" strike="noStrike">
               <a:solidFill>
                 <a:srgbClr val="000000"/>
               </a:solidFill>
-              <a:latin typeface="Arial"/>
-              <a:ea typeface="Arial"/>
-              <a:cs typeface="Arial"/>
-              <a:sym typeface="Arial"/>
+              <a:latin typeface="Ubuntu"/>
+              <a:ea typeface="Ubuntu"/>
+              <a:cs typeface="Ubuntu"/>
+              <a:sym typeface="Ubuntu"/>
             </a:endParaRPr>
           </a:p>
         </p:txBody>
@@ -32150,8 +32247,8 @@
         </p:nvSpPr>
         <p:spPr>
           <a:xfrm>
-            <a:off x="342909" y="3909060"/>
-            <a:ext cx="8469856" cy="891540"/>
+            <a:off x="2419276" y="3905375"/>
+            <a:ext cx="4097100" cy="891600"/>
           </a:xfrm>
           <a:prstGeom prst="roundRect">
             <a:avLst>
@@ -32217,8 +32314,8 @@
         </p:nvSpPr>
         <p:spPr>
           <a:xfrm>
-            <a:off x="514364" y="3991356"/>
-            <a:ext cx="8229819" cy="240030"/>
+            <a:off x="2488200" y="3987675"/>
+            <a:ext cx="3707400" cy="166200"/>
           </a:xfrm>
           <a:prstGeom prst="rect">
             <a:avLst/>
@@ -32252,25 +32349,25 @@
               <a:buNone/>
             </a:pPr>
             <a:r>
-              <a:rPr b="1" i="0" lang="en-GB" sz="800" u="none" cap="none" strike="noStrike">
+              <a:rPr b="1" i="0" lang="en-GB" sz="900" u="none" cap="none" strike="noStrike">
                 <a:solidFill>
                   <a:srgbClr val="1E2761"/>
                 </a:solidFill>
-                <a:latin typeface="Calibri"/>
-                <a:ea typeface="Calibri"/>
-                <a:cs typeface="Calibri"/>
-                <a:sym typeface="Calibri"/>
+                <a:latin typeface="Ubuntu"/>
+                <a:ea typeface="Ubuntu"/>
+                <a:cs typeface="Ubuntu"/>
+                <a:sym typeface="Ubuntu"/>
               </a:rPr>
               <a:t>EGYÜTTHATÓK · előjel és irány</a:t>
             </a:r>
-            <a:endParaRPr b="0" i="0" sz="1100" u="none" cap="none" strike="noStrike">
+            <a:endParaRPr b="1" i="0" sz="1200" u="none" cap="none" strike="noStrike">
               <a:solidFill>
                 <a:srgbClr val="000000"/>
               </a:solidFill>
-              <a:latin typeface="Arial"/>
-              <a:ea typeface="Arial"/>
-              <a:cs typeface="Arial"/>
-              <a:sym typeface="Arial"/>
+              <a:latin typeface="Ubuntu"/>
+              <a:ea typeface="Ubuntu"/>
+              <a:cs typeface="Ubuntu"/>
+              <a:sym typeface="Ubuntu"/>
             </a:endParaRPr>
           </a:p>
         </p:txBody>
@@ -32283,8 +32380,8 @@
         </p:nvSpPr>
         <p:spPr>
           <a:xfrm>
-            <a:off x="514364" y="4251960"/>
-            <a:ext cx="480073" cy="205740"/>
+            <a:off x="2488200" y="4248275"/>
+            <a:ext cx="330900" cy="150900"/>
           </a:xfrm>
           <a:prstGeom prst="rect">
             <a:avLst/>
@@ -32349,8 +32446,8 @@
         </p:nvSpPr>
         <p:spPr>
           <a:xfrm>
-            <a:off x="4663564" y="4286250"/>
-            <a:ext cx="1848966" cy="102870"/>
+            <a:off x="4080789" y="4282575"/>
+            <a:ext cx="1848900" cy="102900"/>
           </a:xfrm>
           <a:prstGeom prst="rect">
             <a:avLst/>
@@ -32415,8 +32512,8 @@
         </p:nvSpPr>
         <p:spPr>
           <a:xfrm>
-            <a:off x="6567396" y="4251960"/>
-            <a:ext cx="617236" cy="205740"/>
+            <a:off x="5984621" y="4248285"/>
+            <a:ext cx="617100" cy="150900"/>
           </a:xfrm>
           <a:prstGeom prst="rect">
             <a:avLst/>
@@ -32481,8 +32578,8 @@
         </p:nvSpPr>
         <p:spPr>
           <a:xfrm>
-            <a:off x="514364" y="4368546"/>
-            <a:ext cx="480073" cy="205740"/>
+            <a:off x="2488200" y="4364859"/>
+            <a:ext cx="330900" cy="150900"/>
           </a:xfrm>
           <a:prstGeom prst="rect">
             <a:avLst/>
@@ -32547,8 +32644,8 @@
         </p:nvSpPr>
         <p:spPr>
           <a:xfrm>
-            <a:off x="4375521" y="4402836"/>
-            <a:ext cx="288044" cy="102870"/>
+            <a:off x="3792746" y="4399161"/>
+            <a:ext cx="288000" cy="102900"/>
           </a:xfrm>
           <a:prstGeom prst="rect">
             <a:avLst/>
@@ -32613,8 +32710,8 @@
         </p:nvSpPr>
         <p:spPr>
           <a:xfrm>
-            <a:off x="3895448" y="4368546"/>
-            <a:ext cx="617236" cy="205740"/>
+            <a:off x="3312673" y="4364871"/>
+            <a:ext cx="617100" cy="150900"/>
           </a:xfrm>
           <a:prstGeom prst="rect">
             <a:avLst/>
@@ -32679,8 +32776,8 @@
         </p:nvSpPr>
         <p:spPr>
           <a:xfrm>
-            <a:off x="514364" y="4485132"/>
-            <a:ext cx="480073" cy="205740"/>
+            <a:off x="2488200" y="4481443"/>
+            <a:ext cx="330900" cy="150900"/>
           </a:xfrm>
           <a:prstGeom prst="rect">
             <a:avLst/>
@@ -32745,8 +32842,8 @@
         </p:nvSpPr>
         <p:spPr>
           <a:xfrm>
-            <a:off x="4663564" y="4519422"/>
-            <a:ext cx="216718" cy="102870"/>
+            <a:off x="4080789" y="4515747"/>
+            <a:ext cx="216600" cy="102900"/>
           </a:xfrm>
           <a:prstGeom prst="rect">
             <a:avLst/>
@@ -32811,8 +32908,8 @@
         </p:nvSpPr>
         <p:spPr>
           <a:xfrm>
-            <a:off x="4935148" y="4485132"/>
-            <a:ext cx="617236" cy="205740"/>
+            <a:off x="4352373" y="4481457"/>
+            <a:ext cx="617100" cy="150900"/>
           </a:xfrm>
           <a:prstGeom prst="rect">
             <a:avLst/>
@@ -32877,8 +32974,8 @@
         </p:nvSpPr>
         <p:spPr>
           <a:xfrm>
-            <a:off x="514364" y="4601718"/>
-            <a:ext cx="480073" cy="205740"/>
+            <a:off x="2488200" y="4598027"/>
+            <a:ext cx="330900" cy="150900"/>
           </a:xfrm>
           <a:prstGeom prst="rect">
             <a:avLst/>
@@ -32943,8 +33040,8 @@
         </p:nvSpPr>
         <p:spPr>
           <a:xfrm>
-            <a:off x="4663564" y="4636008"/>
-            <a:ext cx="134420" cy="102870"/>
+            <a:off x="4080789" y="4632333"/>
+            <a:ext cx="134400" cy="102900"/>
           </a:xfrm>
           <a:prstGeom prst="rect">
             <a:avLst/>
@@ -33009,8 +33106,8 @@
         </p:nvSpPr>
         <p:spPr>
           <a:xfrm>
-            <a:off x="4852850" y="4601718"/>
-            <a:ext cx="617236" cy="205740"/>
+            <a:off x="4270075" y="4598043"/>
+            <a:ext cx="617100" cy="150900"/>
           </a:xfrm>
           <a:prstGeom prst="rect">
             <a:avLst/>
@@ -33075,8 +33172,8 @@
         </p:nvSpPr>
         <p:spPr>
           <a:xfrm>
-            <a:off x="4663564" y="4238244"/>
-            <a:ext cx="7144" cy="514350"/>
+            <a:off x="4080789" y="4234569"/>
+            <a:ext cx="7200" cy="514500"/>
           </a:xfrm>
           <a:prstGeom prst="rect">
             <a:avLst/>
@@ -33580,8 +33677,8 @@
         </p:nvSpPr>
         <p:spPr>
           <a:xfrm>
-            <a:off x="342909" y="1062990"/>
-            <a:ext cx="2811854" cy="2606040"/>
+            <a:off x="342900" y="1063001"/>
+            <a:ext cx="2811900" cy="2747400"/>
           </a:xfrm>
           <a:prstGeom prst="roundRect">
             <a:avLst>
@@ -33648,7 +33745,7 @@
         <p:spPr>
           <a:xfrm>
             <a:off x="514364" y="1200150"/>
-            <a:ext cx="2537528" cy="240030"/>
+            <a:ext cx="2537400" cy="150900"/>
           </a:xfrm>
           <a:prstGeom prst="rect">
             <a:avLst/>
@@ -33691,7 +33788,7 @@
                 <a:cs typeface="Calibri"/>
                 <a:sym typeface="Calibri"/>
               </a:rPr>
-              <a:t>BIZONYÍTÉKPONTSZÁM</a:t>
+              <a:t>BIZONYÍTÉK-PONTSZÁM</a:t>
             </a:r>
             <a:endParaRPr b="0" i="0" sz="1100" u="none" cap="none" strike="noStrike">
               <a:solidFill>
@@ -34077,7 +34174,7 @@
             <a:tbl>
               <a:tblPr>
                 <a:noFill/>
-                <a:tableStyleId>{02B4F9B2-E791-447A-981E-08FD4EC66F5B}</a:tableStyleId>
+                <a:tableStyleId>{29A1324E-E767-48CC-B2B4-CB8A3D8B7874}</a:tableStyleId>
               </a:tblPr>
               <a:tblGrid>
                 <a:gridCol w="486125"/>
@@ -34326,18 +34423,23 @@
                         <a:buNone/>
                       </a:pPr>
                       <a:r>
-                        <a:rPr lang="en-GB" sz="900" u="none" cap="none" strike="noStrike">
+                        <a:rPr b="1" lang="en-GB" sz="900" u="none" cap="none" strike="noStrike">
                           <a:solidFill>
                             <a:srgbClr val="1A1D2B"/>
                           </a:solidFill>
-                          <a:latin typeface="Calibri"/>
-                          <a:ea typeface="Calibri"/>
-                          <a:cs typeface="Calibri"/>
-                          <a:sym typeface="Calibri"/>
+                          <a:latin typeface="Ubuntu"/>
+                          <a:ea typeface="Ubuntu"/>
+                          <a:cs typeface="Ubuntu"/>
+                          <a:sym typeface="Ubuntu"/>
                         </a:rPr>
                         <a:t>Spearman (össz)</a:t>
                       </a:r>
-                      <a:endParaRPr sz="1100" u="none" cap="none" strike="noStrike"/>
+                      <a:endParaRPr b="1" sz="1100" u="none" cap="none" strike="noStrike">
+                        <a:latin typeface="Ubuntu"/>
+                        <a:ea typeface="Ubuntu"/>
+                        <a:cs typeface="Ubuntu"/>
+                        <a:sym typeface="Ubuntu"/>
+                      </a:endParaRPr>
                     </a:p>
                   </a:txBody>
                   <a:tcPr marT="27425" marB="27425" marR="54875" marL="54875" anchor="ctr">
@@ -34373,14 +34475,19 @@
                           <a:solidFill>
                             <a:srgbClr val="1A1D2B"/>
                           </a:solidFill>
-                          <a:latin typeface="Calibri"/>
-                          <a:ea typeface="Calibri"/>
-                          <a:cs typeface="Calibri"/>
-                          <a:sym typeface="Calibri"/>
+                          <a:latin typeface="Ubuntu"/>
+                          <a:ea typeface="Ubuntu"/>
+                          <a:cs typeface="Ubuntu"/>
+                          <a:sym typeface="Ubuntu"/>
                         </a:rPr>
                         <a:t>ρ = −0.100, p &lt; 0.001</a:t>
                       </a:r>
-                      <a:endParaRPr sz="1100" u="none" cap="none" strike="noStrike"/>
+                      <a:endParaRPr sz="1100" u="none" cap="none" strike="noStrike">
+                        <a:latin typeface="Ubuntu"/>
+                        <a:ea typeface="Ubuntu"/>
+                        <a:cs typeface="Ubuntu"/>
+                        <a:sym typeface="Ubuntu"/>
+                      </a:endParaRPr>
                     </a:p>
                   </a:txBody>
                   <a:tcPr marT="27425" marB="27425" marR="54875" marL="54875" anchor="ctr">
@@ -34500,18 +34607,23 @@
                         <a:buNone/>
                       </a:pPr>
                       <a:r>
-                        <a:rPr lang="en-GB" sz="900" u="none" cap="none" strike="noStrike">
+                        <a:rPr b="1" lang="en-GB" sz="900" u="none" cap="none" strike="noStrike">
                           <a:solidFill>
                             <a:srgbClr val="1A1D2B"/>
                           </a:solidFill>
-                          <a:latin typeface="Calibri"/>
-                          <a:ea typeface="Calibri"/>
-                          <a:cs typeface="Calibri"/>
-                          <a:sym typeface="Calibri"/>
+                          <a:latin typeface="Ubuntu"/>
+                          <a:ea typeface="Ubuntu"/>
+                          <a:cs typeface="Ubuntu"/>
+                          <a:sym typeface="Ubuntu"/>
                         </a:rPr>
                         <a:t>Mann–Whitney U</a:t>
                       </a:r>
-                      <a:endParaRPr sz="1100" u="none" cap="none" strike="noStrike"/>
+                      <a:endParaRPr b="1" sz="1100" u="none" cap="none" strike="noStrike">
+                        <a:latin typeface="Ubuntu"/>
+                        <a:ea typeface="Ubuntu"/>
+                        <a:cs typeface="Ubuntu"/>
+                        <a:sym typeface="Ubuntu"/>
+                      </a:endParaRPr>
                     </a:p>
                   </a:txBody>
                   <a:tcPr marT="27425" marB="27425" marR="54875" marL="54875" anchor="ctr">
@@ -34547,14 +34659,19 @@
                           <a:solidFill>
                             <a:srgbClr val="1A1D2B"/>
                           </a:solidFill>
-                          <a:latin typeface="Calibri"/>
-                          <a:ea typeface="Calibri"/>
-                          <a:cs typeface="Calibri"/>
-                          <a:sym typeface="Calibri"/>
+                          <a:latin typeface="Ubuntu"/>
+                          <a:ea typeface="Ubuntu"/>
+                          <a:cs typeface="Ubuntu"/>
+                          <a:sym typeface="Ubuntu"/>
                         </a:rPr>
                         <a:t>0 / 6 H2-irányú teszt szignifikáns</a:t>
                       </a:r>
-                      <a:endParaRPr sz="1100" u="none" cap="none" strike="noStrike"/>
+                      <a:endParaRPr sz="1100" u="none" cap="none" strike="noStrike">
+                        <a:latin typeface="Ubuntu"/>
+                        <a:ea typeface="Ubuntu"/>
+                        <a:cs typeface="Ubuntu"/>
+                        <a:sym typeface="Ubuntu"/>
+                      </a:endParaRPr>
                     </a:p>
                   </a:txBody>
                   <a:tcPr marT="27425" marB="27425" marR="54875" marL="54875" anchor="ctr">
@@ -34674,18 +34791,23 @@
                         <a:buNone/>
                       </a:pPr>
                       <a:r>
-                        <a:rPr lang="en-GB" sz="900" u="none" cap="none" strike="noStrike">
+                        <a:rPr b="1" lang="en-GB" sz="900" u="none" cap="none" strike="noStrike">
                           <a:solidFill>
                             <a:srgbClr val="1A1D2B"/>
                           </a:solidFill>
-                          <a:latin typeface="Calibri"/>
-                          <a:ea typeface="Calibri"/>
-                          <a:cs typeface="Calibri"/>
-                          <a:sym typeface="Calibri"/>
+                          <a:latin typeface="Ubuntu"/>
+                          <a:ea typeface="Ubuntu"/>
+                          <a:cs typeface="Ubuntu"/>
+                          <a:sym typeface="Ubuntu"/>
                         </a:rPr>
                         <a:t>OLS β₁</a:t>
                       </a:r>
-                      <a:endParaRPr sz="1100" u="none" cap="none" strike="noStrike"/>
+                      <a:endParaRPr b="1" sz="1100" u="none" cap="none" strike="noStrike">
+                        <a:latin typeface="Ubuntu"/>
+                        <a:ea typeface="Ubuntu"/>
+                        <a:cs typeface="Ubuntu"/>
+                        <a:sym typeface="Ubuntu"/>
+                      </a:endParaRPr>
                     </a:p>
                   </a:txBody>
                   <a:tcPr marT="27425" marB="27425" marR="54875" marL="54875" anchor="ctr">
@@ -34721,14 +34843,19 @@
                           <a:solidFill>
                             <a:srgbClr val="1A1D2B"/>
                           </a:solidFill>
-                          <a:latin typeface="Calibri"/>
-                          <a:ea typeface="Calibri"/>
-                          <a:cs typeface="Calibri"/>
-                          <a:sym typeface="Calibri"/>
+                          <a:latin typeface="Ubuntu"/>
+                          <a:ea typeface="Ubuntu"/>
+                          <a:cs typeface="Ubuntu"/>
+                          <a:sym typeface="Ubuntu"/>
                         </a:rPr>
                         <a:t>β₁ = −0.105, p &lt; 0.001</a:t>
                       </a:r>
-                      <a:endParaRPr sz="1100" u="none" cap="none" strike="noStrike"/>
+                      <a:endParaRPr sz="1100" u="none" cap="none" strike="noStrike">
+                        <a:latin typeface="Ubuntu"/>
+                        <a:ea typeface="Ubuntu"/>
+                        <a:cs typeface="Ubuntu"/>
+                        <a:sym typeface="Ubuntu"/>
+                      </a:endParaRPr>
                     </a:p>
                   </a:txBody>
                   <a:tcPr marT="27425" marB="27425" marR="54875" marL="54875" anchor="ctr">
@@ -34793,8 +34920,8 @@
         </p:nvSpPr>
         <p:spPr>
           <a:xfrm>
-            <a:off x="3326219" y="2880360"/>
-            <a:ext cx="5486546" cy="788670"/>
+            <a:off x="3326225" y="2880348"/>
+            <a:ext cx="5486700" cy="930000"/>
           </a:xfrm>
           <a:prstGeom prst="roundRect">
             <a:avLst>
@@ -34927,7 +35054,7 @@
         <p:spPr>
           <a:xfrm>
             <a:off x="3497673" y="3154680"/>
-            <a:ext cx="5143637" cy="445770"/>
+            <a:ext cx="5143500" cy="526500"/>
           </a:xfrm>
           <a:prstGeom prst="rect">
             <a:avLst/>
@@ -34961,25 +35088,25 @@
               <a:buNone/>
             </a:pPr>
             <a:r>
-              <a:rPr b="0" i="0" lang="en-GB" sz="800" u="none" cap="none" strike="noStrike">
+              <a:rPr i="0" lang="en-GB" sz="900" u="none" cap="none" strike="noStrike">
                 <a:solidFill>
                   <a:srgbClr val="1A1D2B"/>
                 </a:solidFill>
-                <a:latin typeface="Calibri"/>
-                <a:ea typeface="Calibri"/>
-                <a:cs typeface="Calibri"/>
-                <a:sym typeface="Calibri"/>
+                <a:latin typeface="Ubuntu"/>
+                <a:ea typeface="Ubuntu"/>
+                <a:cs typeface="Ubuntu"/>
+                <a:sym typeface="Ubuntu"/>
               </a:rPr>
               <a:t>Két módszer egyértelműen támogatja a hipotézist. A negatív címek nagyobb hangsúlyt kapnak; a sávpáros tesztek vegyesebb képet mutatnak. Az interakció szignifikáns: a hatás erőssége médiablokkonként eltér.</a:t>
             </a:r>
-            <a:endParaRPr b="0" i="0" sz="1100" u="none" cap="none" strike="noStrike">
+            <a:endParaRPr i="0" sz="1200" u="none" cap="none" strike="noStrike">
               <a:solidFill>
                 <a:srgbClr val="000000"/>
               </a:solidFill>
-              <a:latin typeface="Arial"/>
-              <a:ea typeface="Arial"/>
-              <a:cs typeface="Arial"/>
-              <a:sym typeface="Arial"/>
+              <a:latin typeface="Ubuntu"/>
+              <a:ea typeface="Ubuntu"/>
+              <a:cs typeface="Ubuntu"/>
+              <a:sym typeface="Ubuntu"/>
             </a:endParaRPr>
           </a:p>
         </p:txBody>
@@ -34992,8 +35119,8 @@
         </p:nvSpPr>
         <p:spPr>
           <a:xfrm>
-            <a:off x="342909" y="3806190"/>
-            <a:ext cx="8469856" cy="891540"/>
+            <a:off x="342909" y="3882773"/>
+            <a:ext cx="8469900" cy="891600"/>
           </a:xfrm>
           <a:prstGeom prst="roundRect">
             <a:avLst>
@@ -35059,8 +35186,8 @@
         </p:nvSpPr>
         <p:spPr>
           <a:xfrm>
-            <a:off x="514364" y="3888486"/>
-            <a:ext cx="8229819" cy="240030"/>
+            <a:off x="514364" y="3965069"/>
+            <a:ext cx="8229900" cy="150900"/>
           </a:xfrm>
           <a:prstGeom prst="rect">
             <a:avLst/>
@@ -35125,8 +35252,8 @@
         </p:nvSpPr>
         <p:spPr>
           <a:xfrm>
-            <a:off x="514364" y="4101084"/>
-            <a:ext cx="8229819" cy="617220"/>
+            <a:off x="514375" y="4177661"/>
+            <a:ext cx="8229900" cy="181500"/>
           </a:xfrm>
           <a:prstGeom prst="rect">
             <a:avLst/>
@@ -35160,25 +35287,25 @@
               <a:buNone/>
             </a:pPr>
             <a:r>
-              <a:rPr b="0" i="1" lang="en-GB" sz="1000" u="none" cap="none" strike="noStrike">
+              <a:rPr i="1" lang="en-GB" sz="1000" u="none" cap="none" strike="noStrike">
                 <a:solidFill>
                   <a:srgbClr val="1A1D2B"/>
                 </a:solidFill>
-                <a:latin typeface="Calibri"/>
-                <a:ea typeface="Calibri"/>
-                <a:cs typeface="Calibri"/>
-                <a:sym typeface="Calibri"/>
+                <a:latin typeface="Ubuntu"/>
+                <a:ea typeface="Ubuntu"/>
+                <a:cs typeface="Ubuntu"/>
+                <a:sym typeface="Ubuntu"/>
               </a:rPr>
               <a:t>LLM-alapú szentiment · portálonként normalizált score · korrelációs (nem oksági) értelmezés.</a:t>
             </a:r>
-            <a:endParaRPr b="0" i="0" sz="1100" u="none" cap="none" strike="noStrike">
+            <a:endParaRPr i="0" sz="1100" u="none" cap="none" strike="noStrike">
               <a:solidFill>
                 <a:srgbClr val="000000"/>
               </a:solidFill>
-              <a:latin typeface="Arial"/>
-              <a:ea typeface="Arial"/>
-              <a:cs typeface="Arial"/>
-              <a:sym typeface="Arial"/>
+              <a:latin typeface="Ubuntu"/>
+              <a:ea typeface="Ubuntu"/>
+              <a:cs typeface="Ubuntu"/>
+              <a:sym typeface="Ubuntu"/>
             </a:endParaRPr>
           </a:p>
         </p:txBody>
@@ -35764,7 +35891,7 @@
         <p:spPr>
           <a:xfrm>
             <a:off x="514364" y="1405889"/>
-            <a:ext cx="4012037" cy="1200150"/>
+            <a:ext cx="4011900" cy="674100"/>
           </a:xfrm>
           <a:prstGeom prst="rect">
             <a:avLst/>
@@ -35798,25 +35925,25 @@
               <a:buNone/>
             </a:pPr>
             <a:r>
-              <a:rPr b="0" i="0" lang="en-GB" sz="1100" u="none" cap="none" strike="noStrike">
+              <a:rPr i="0" lang="en-GB" sz="1200" u="none" cap="none" strike="noStrike">
                 <a:solidFill>
                   <a:srgbClr val="1A1D2B"/>
                 </a:solidFill>
-                <a:latin typeface="Calibri"/>
-                <a:ea typeface="Calibri"/>
-                <a:cs typeface="Calibri"/>
-                <a:sym typeface="Calibri"/>
+                <a:latin typeface="Ubuntu"/>
+                <a:ea typeface="Ubuntu"/>
+                <a:cs typeface="Ubuntu"/>
+                <a:sym typeface="Ubuntu"/>
               </a:rPr>
               <a:t>A kormányközeli portálok napi entitás-említései erősebben korrelálnak egymással, mint a függetleneké; ugyanazon entitások framingje is eltér a két blokknál.</a:t>
             </a:r>
-            <a:endParaRPr b="0" i="0" sz="1100" u="none" cap="none" strike="noStrike">
+            <a:endParaRPr i="0" sz="1200" u="none" cap="none" strike="noStrike">
               <a:solidFill>
                 <a:srgbClr val="000000"/>
               </a:solidFill>
-              <a:latin typeface="Arial"/>
-              <a:ea typeface="Arial"/>
-              <a:cs typeface="Arial"/>
-              <a:sym typeface="Arial"/>
+              <a:latin typeface="Ubuntu"/>
+              <a:ea typeface="Ubuntu"/>
+              <a:cs typeface="Ubuntu"/>
+              <a:sym typeface="Ubuntu"/>
             </a:endParaRPr>
           </a:p>
         </p:txBody>
@@ -35897,7 +36024,7 @@
         <p:spPr>
           <a:xfrm>
             <a:off x="4972183" y="1131570"/>
-            <a:ext cx="3703419" cy="240030"/>
+            <a:ext cx="3703500" cy="197100"/>
           </a:xfrm>
           <a:prstGeom prst="rect">
             <a:avLst/>
@@ -35931,7 +36058,7 @@
               <a:buNone/>
             </a:pPr>
             <a:r>
-              <a:rPr b="1" i="0" lang="en-GB" sz="1000" u="none" cap="none" strike="noStrike">
+              <a:rPr b="1" i="0" lang="en-GB" sz="1100" u="none" cap="none" strike="noStrike">
                 <a:solidFill>
                   <a:srgbClr val="1E2761"/>
                 </a:solidFill>
@@ -35943,7 +36070,7 @@
               <a:t>(A)  </a:t>
             </a:r>
             <a:r>
-              <a:rPr b="1" i="0" lang="en-GB" sz="800" u="none" cap="none" strike="noStrike">
+              <a:rPr b="1" i="0" lang="en-GB" sz="900" u="none" cap="none" strike="noStrike">
                 <a:solidFill>
                   <a:srgbClr val="C75450"/>
                 </a:solidFill>
@@ -35954,7 +36081,7 @@
               </a:rPr>
               <a:t>BELSŐ NAPIREND-SZINKRONITÁS</a:t>
             </a:r>
-            <a:endParaRPr b="0" i="0" sz="1100" u="none" cap="none" strike="noStrike">
+            <a:endParaRPr b="0" i="0" sz="1200" u="none" cap="none" strike="noStrike">
               <a:solidFill>
                 <a:srgbClr val="000000"/>
               </a:solidFill>
@@ -35975,7 +36102,7 @@
         <p:spPr>
           <a:xfrm>
             <a:off x="4972183" y="1357884"/>
-            <a:ext cx="3703419" cy="445770"/>
+            <a:ext cx="3703500" cy="166200"/>
           </a:xfrm>
           <a:prstGeom prst="rect">
             <a:avLst/>
@@ -36009,25 +36136,25 @@
               <a:buNone/>
             </a:pPr>
             <a:r>
-              <a:rPr b="0" i="0" lang="en-GB" sz="800" u="none" cap="none" strike="noStrike">
+              <a:rPr i="0" lang="en-GB" sz="900" u="none" cap="none" strike="noStrike">
                 <a:solidFill>
                   <a:srgbClr val="1A1D2B"/>
                 </a:solidFill>
-                <a:latin typeface="Calibri"/>
-                <a:ea typeface="Calibri"/>
-                <a:cs typeface="Calibri"/>
-                <a:sym typeface="Calibri"/>
+                <a:latin typeface="Ubuntu"/>
+                <a:ea typeface="Ubuntu"/>
+                <a:cs typeface="Ubuntu"/>
+                <a:sym typeface="Ubuntu"/>
               </a:rPr>
               <a:t>Napi entitás-említések alapján páronkénti Pearson-korreláció.</a:t>
             </a:r>
-            <a:endParaRPr b="0" i="0" sz="1100" u="none" cap="none" strike="noStrike">
+            <a:endParaRPr i="0" sz="1200" u="none" cap="none" strike="noStrike">
               <a:solidFill>
                 <a:srgbClr val="000000"/>
               </a:solidFill>
-              <a:latin typeface="Arial"/>
-              <a:ea typeface="Arial"/>
-              <a:cs typeface="Arial"/>
-              <a:sym typeface="Arial"/>
+              <a:latin typeface="Ubuntu"/>
+              <a:ea typeface="Ubuntu"/>
+              <a:cs typeface="Ubuntu"/>
+              <a:sym typeface="Ubuntu"/>
             </a:endParaRPr>
           </a:p>
         </p:txBody>
@@ -36108,7 +36235,7 @@
         <p:spPr>
           <a:xfrm>
             <a:off x="4972183" y="1954530"/>
-            <a:ext cx="3703419" cy="240030"/>
+            <a:ext cx="3703500" cy="197100"/>
           </a:xfrm>
           <a:prstGeom prst="rect">
             <a:avLst/>
@@ -36142,7 +36269,7 @@
               <a:buNone/>
             </a:pPr>
             <a:r>
-              <a:rPr b="1" i="0" lang="en-GB" sz="1000" u="none" cap="none" strike="noStrike">
+              <a:rPr b="1" i="0" lang="en-GB" sz="1100" u="none" cap="none" strike="noStrike">
                 <a:solidFill>
                   <a:srgbClr val="1E2761"/>
                 </a:solidFill>
@@ -36154,7 +36281,7 @@
               <a:t>(B)  </a:t>
             </a:r>
             <a:r>
-              <a:rPr b="1" i="0" lang="en-GB" sz="800" u="none" cap="none" strike="noStrike">
+              <a:rPr b="1" i="0" lang="en-GB" sz="900" u="none" cap="none" strike="noStrike">
                 <a:solidFill>
                   <a:srgbClr val="C75450"/>
                 </a:solidFill>
@@ -36165,7 +36292,7 @@
               </a:rPr>
               <a:t>PORTÁLSPECIFIKUS DINAMIKA</a:t>
             </a:r>
-            <a:endParaRPr b="0" i="0" sz="1100" u="none" cap="none" strike="noStrike">
+            <a:endParaRPr b="0" i="0" sz="1200" u="none" cap="none" strike="noStrike">
               <a:solidFill>
                 <a:srgbClr val="000000"/>
               </a:solidFill>
@@ -36186,7 +36313,7 @@
         <p:spPr>
           <a:xfrm>
             <a:off x="4972183" y="2180844"/>
-            <a:ext cx="3703419" cy="445770"/>
+            <a:ext cx="3703500" cy="339300"/>
           </a:xfrm>
           <a:prstGeom prst="rect">
             <a:avLst/>
@@ -36220,25 +36347,25 @@
               <a:buNone/>
             </a:pPr>
             <a:r>
-              <a:rPr b="0" i="0" lang="en-GB" sz="800" u="none" cap="none" strike="noStrike">
+              <a:rPr i="0" lang="en-GB" sz="900" u="none" cap="none" strike="noStrike">
                 <a:solidFill>
                   <a:srgbClr val="1A1D2B"/>
                 </a:solidFill>
-                <a:latin typeface="Calibri"/>
-                <a:ea typeface="Calibri"/>
-                <a:cs typeface="Calibri"/>
-                <a:sym typeface="Calibri"/>
+                <a:latin typeface="Ubuntu"/>
+                <a:ea typeface="Ubuntu"/>
+                <a:cs typeface="Ubuntu"/>
+                <a:sym typeface="Ubuntu"/>
               </a:rPr>
               <a:t>Ugyanazon entitások szentiment- és vizuális különbségeinek tesztelése.</a:t>
             </a:r>
-            <a:endParaRPr b="0" i="0" sz="1100" u="none" cap="none" strike="noStrike">
+            <a:endParaRPr i="0" sz="1200" u="none" cap="none" strike="noStrike">
               <a:solidFill>
                 <a:srgbClr val="000000"/>
               </a:solidFill>
-              <a:latin typeface="Arial"/>
-              <a:ea typeface="Arial"/>
-              <a:cs typeface="Arial"/>
-              <a:sym typeface="Arial"/>
+              <a:latin typeface="Ubuntu"/>
+              <a:ea typeface="Ubuntu"/>
+              <a:cs typeface="Ubuntu"/>
+              <a:sym typeface="Ubuntu"/>
             </a:endParaRPr>
           </a:p>
         </p:txBody>
@@ -36385,7 +36512,7 @@
         <p:spPr>
           <a:xfrm>
             <a:off x="548655" y="3120390"/>
-            <a:ext cx="8092656" cy="411480"/>
+            <a:ext cx="8092800" cy="227700"/>
           </a:xfrm>
           <a:prstGeom prst="rect">
             <a:avLst/>
@@ -36419,7 +36546,7 @@
               <a:buNone/>
             </a:pPr>
             <a:r>
-              <a:rPr b="1" i="0" lang="en-GB" sz="1200" u="none" cap="none" strike="noStrike">
+              <a:rPr b="1" i="0" lang="en-GB" sz="1300" u="none" cap="none" strike="noStrike">
                 <a:solidFill>
                   <a:srgbClr val="FFFFFF"/>
                 </a:solidFill>
@@ -36428,9 +36555,33 @@
                 <a:cs typeface="Calibri"/>
                 <a:sym typeface="Calibri"/>
               </a:rPr>
-              <a:t>Top 15 olyan entitás, amely mindkét portáltípusban megjelenik.</a:t>
+              <a:t>Top 15 olyan entitás, amely mindkét </a:t>
             </a:r>
-            <a:endParaRPr b="0" i="0" sz="1100" u="none" cap="none" strike="noStrike">
+            <a:r>
+              <a:rPr b="1" lang="en-GB" sz="1300">
+                <a:solidFill>
+                  <a:srgbClr val="FFFFFF"/>
+                </a:solidFill>
+                <a:latin typeface="Calibri"/>
+                <a:ea typeface="Calibri"/>
+                <a:cs typeface="Calibri"/>
+                <a:sym typeface="Calibri"/>
+              </a:rPr>
+              <a:t>portál típusban</a:t>
+            </a:r>
+            <a:r>
+              <a:rPr b="1" i="0" lang="en-GB" sz="1300" u="none" cap="none" strike="noStrike">
+                <a:solidFill>
+                  <a:srgbClr val="FFFFFF"/>
+                </a:solidFill>
+                <a:latin typeface="Calibri"/>
+                <a:ea typeface="Calibri"/>
+                <a:cs typeface="Calibri"/>
+                <a:sym typeface="Calibri"/>
+              </a:rPr>
+              <a:t> megjelenik.</a:t>
+            </a:r>
+            <a:endParaRPr b="0" i="0" sz="1200" u="none" cap="none" strike="noStrike">
               <a:solidFill>
                 <a:srgbClr val="000000"/>
               </a:solidFill>
@@ -36584,7 +36735,7 @@
         <p:spPr>
           <a:xfrm>
             <a:off x="514364" y="4066794"/>
-            <a:ext cx="8229819" cy="685800"/>
+            <a:ext cx="8229900" cy="425700"/>
           </a:xfrm>
           <a:prstGeom prst="rect">
             <a:avLst/>
@@ -36618,25 +36769,25 @@
               <a:buNone/>
             </a:pPr>
             <a:r>
-              <a:rPr b="0" i="0" lang="en-GB" sz="1000" u="none" cap="none" strike="noStrike">
+              <a:rPr i="0" lang="en-GB" sz="1100" u="none" cap="none" strike="noStrike">
                 <a:solidFill>
                   <a:srgbClr val="1A1D2B"/>
                 </a:solidFill>
-                <a:latin typeface="Calibri"/>
-                <a:ea typeface="Calibri"/>
-                <a:cs typeface="Calibri"/>
-                <a:sym typeface="Calibri"/>
+                <a:latin typeface="Ubuntu"/>
+                <a:ea typeface="Ubuntu"/>
+                <a:cs typeface="Ubuntu"/>
+                <a:sym typeface="Ubuntu"/>
               </a:rPr>
               <a:t>Mennyire koordinált a napi napirend, és mennyire portálspecifikus ugyanazon szereplők kezelése — azaz hol húzódik a határ a közös témaválasztás és a blokkok eltérő narratívái között.</a:t>
             </a:r>
-            <a:endParaRPr b="0" i="0" sz="1100" u="none" cap="none" strike="noStrike">
+            <a:endParaRPr i="0" sz="1200" u="none" cap="none" strike="noStrike">
               <a:solidFill>
                 <a:srgbClr val="000000"/>
               </a:solidFill>
-              <a:latin typeface="Arial"/>
-              <a:ea typeface="Arial"/>
-              <a:cs typeface="Arial"/>
-              <a:sym typeface="Arial"/>
+              <a:latin typeface="Ubuntu"/>
+              <a:ea typeface="Ubuntu"/>
+              <a:cs typeface="Ubuntu"/>
+              <a:sym typeface="Ubuntu"/>
             </a:endParaRPr>
           </a:p>
         </p:txBody>
@@ -38110,7 +38261,7 @@
         <p:spPr>
           <a:xfrm>
             <a:off x="514364" y="4066794"/>
-            <a:ext cx="8229819" cy="582930"/>
+            <a:ext cx="8229900" cy="197100"/>
           </a:xfrm>
           <a:prstGeom prst="rect">
             <a:avLst/>
@@ -38144,25 +38295,25 @@
               <a:buNone/>
             </a:pPr>
             <a:r>
-              <a:rPr b="0" i="0" lang="en-GB" sz="1000" u="none" cap="none" strike="noStrike">
+              <a:rPr i="0" lang="en-GB" sz="1100" u="none" cap="none" strike="noStrike">
                 <a:solidFill>
                   <a:srgbClr val="1A1D2B"/>
                 </a:solidFill>
-                <a:latin typeface="Calibri"/>
-                <a:ea typeface="Calibri"/>
-                <a:cs typeface="Calibri"/>
-                <a:sym typeface="Calibri"/>
+                <a:latin typeface="Ubuntu"/>
+                <a:ea typeface="Ubuntu"/>
+                <a:cs typeface="Ubuntu"/>
+                <a:sym typeface="Ubuntu"/>
               </a:rPr>
               <a:t>A kormányközeli blokk átlagos páronkénti korrelációja magasabb és egységesebb — ez koordináltabb napirend-követésre utal.</a:t>
             </a:r>
-            <a:endParaRPr b="0" i="0" sz="1100" u="none" cap="none" strike="noStrike">
+            <a:endParaRPr i="0" sz="1200" u="none" cap="none" strike="noStrike">
               <a:solidFill>
                 <a:srgbClr val="000000"/>
               </a:solidFill>
-              <a:latin typeface="Arial"/>
-              <a:ea typeface="Arial"/>
-              <a:cs typeface="Arial"/>
-              <a:sym typeface="Arial"/>
+              <a:latin typeface="Ubuntu"/>
+              <a:ea typeface="Ubuntu"/>
+              <a:cs typeface="Ubuntu"/>
+              <a:sym typeface="Ubuntu"/>
             </a:endParaRPr>
           </a:p>
         </p:txBody>
@@ -39437,7 +39588,7 @@
         <p:spPr>
           <a:xfrm>
             <a:off x="514364" y="4101084"/>
-            <a:ext cx="8229819" cy="582930"/>
+            <a:ext cx="8229900" cy="197100"/>
           </a:xfrm>
           <a:prstGeom prst="rect">
             <a:avLst/>
@@ -39471,25 +39622,25 @@
               <a:buNone/>
             </a:pPr>
             <a:r>
-              <a:rPr b="0" i="0" lang="en-GB" sz="1000" u="none" cap="none" strike="noStrike">
+              <a:rPr i="0" lang="en-GB" sz="1100" u="none" cap="none" strike="noStrike">
                 <a:solidFill>
                   <a:srgbClr val="1A1D2B"/>
                 </a:solidFill>
-                <a:latin typeface="Calibri"/>
-                <a:ea typeface="Calibri"/>
-                <a:cs typeface="Calibri"/>
-                <a:sym typeface="Calibri"/>
+                <a:latin typeface="Ubuntu"/>
+                <a:ea typeface="Ubuntu"/>
+                <a:cs typeface="Ubuntu"/>
+                <a:sym typeface="Ubuntu"/>
               </a:rPr>
               <a:t>★ jelöli a szignifikáns eltérést. A legtöbb top entitásnál a framing nem csak témában, hanem hangsúlyban is különbözik.</a:t>
             </a:r>
-            <a:endParaRPr b="0" i="0" sz="1100" u="none" cap="none" strike="noStrike">
+            <a:endParaRPr i="0" sz="1200" u="none" cap="none" strike="noStrike">
               <a:solidFill>
                 <a:srgbClr val="000000"/>
               </a:solidFill>
-              <a:latin typeface="Arial"/>
-              <a:ea typeface="Arial"/>
-              <a:cs typeface="Arial"/>
-              <a:sym typeface="Arial"/>
+              <a:latin typeface="Ubuntu"/>
+              <a:ea typeface="Ubuntu"/>
+              <a:cs typeface="Ubuntu"/>
+              <a:sym typeface="Ubuntu"/>
             </a:endParaRPr>
           </a:p>
         </p:txBody>
@@ -40285,7 +40436,7 @@
         <p:spPr>
           <a:xfrm>
             <a:off x="514364" y="2366010"/>
-            <a:ext cx="2411794" cy="685800"/>
+            <a:ext cx="2411700" cy="581700"/>
           </a:xfrm>
           <a:prstGeom prst="rect">
             <a:avLst/>
@@ -40319,25 +40470,25 @@
               <a:buNone/>
             </a:pPr>
             <a:r>
-              <a:rPr b="0" i="0" lang="en-GB" sz="900" u="none" cap="none" strike="noStrike">
+              <a:rPr i="0" lang="en-GB" sz="1000" u="none" cap="none" strike="noStrike">
                 <a:solidFill>
                   <a:srgbClr val="1A1D2B"/>
                 </a:solidFill>
-                <a:latin typeface="Calibri"/>
-                <a:ea typeface="Calibri"/>
-                <a:cs typeface="Calibri"/>
-                <a:sym typeface="Calibri"/>
+                <a:latin typeface="Ubuntu"/>
+                <a:ea typeface="Ubuntu"/>
+                <a:cs typeface="Ubuntu"/>
+                <a:sym typeface="Ubuntu"/>
               </a:rPr>
               <a:t>A kormányközeli blokk átlagos páronkénti korrelációja magasabb és egységesebb (0.686 vs. 0.548).</a:t>
             </a:r>
-            <a:endParaRPr b="0" i="0" sz="1100" u="none" cap="none" strike="noStrike">
+            <a:endParaRPr i="0" sz="1200" u="none" cap="none" strike="noStrike">
               <a:solidFill>
                 <a:srgbClr val="000000"/>
               </a:solidFill>
-              <a:latin typeface="Arial"/>
-              <a:ea typeface="Arial"/>
-              <a:cs typeface="Arial"/>
-              <a:sym typeface="Arial"/>
+              <a:latin typeface="Ubuntu"/>
+              <a:ea typeface="Ubuntu"/>
+              <a:cs typeface="Ubuntu"/>
+              <a:sym typeface="Ubuntu"/>
             </a:endParaRPr>
           </a:p>
         </p:txBody>
@@ -40694,7 +40845,7 @@
         <p:spPr>
           <a:xfrm>
             <a:off x="3337649" y="2366010"/>
-            <a:ext cx="2411794" cy="685800"/>
+            <a:ext cx="2411700" cy="581700"/>
           </a:xfrm>
           <a:prstGeom prst="rect">
             <a:avLst/>
@@ -40728,25 +40879,25 @@
               <a:buNone/>
             </a:pPr>
             <a:r>
-              <a:rPr b="0" i="0" lang="en-GB" sz="900" u="none" cap="none" strike="noStrike">
+              <a:rPr i="0" lang="en-GB" sz="1000" u="none" cap="none" strike="noStrike">
                 <a:solidFill>
                   <a:srgbClr val="1A1D2B"/>
                 </a:solidFill>
-                <a:latin typeface="Calibri"/>
-                <a:ea typeface="Calibri"/>
-                <a:cs typeface="Calibri"/>
-                <a:sym typeface="Calibri"/>
+                <a:latin typeface="Ubuntu"/>
+                <a:ea typeface="Ubuntu"/>
+                <a:cs typeface="Ubuntu"/>
+                <a:sym typeface="Ubuntu"/>
               </a:rPr>
               <a:t>A top entitások többségénél szignifikánsan eltér a hangnem a két blokk között.</a:t>
             </a:r>
-            <a:endParaRPr b="0" i="0" sz="1100" u="none" cap="none" strike="noStrike">
+            <a:endParaRPr i="0" sz="1200" u="none" cap="none" strike="noStrike">
               <a:solidFill>
                 <a:srgbClr val="000000"/>
               </a:solidFill>
-              <a:latin typeface="Arial"/>
-              <a:ea typeface="Arial"/>
-              <a:cs typeface="Arial"/>
-              <a:sym typeface="Arial"/>
+              <a:latin typeface="Ubuntu"/>
+              <a:ea typeface="Ubuntu"/>
+              <a:cs typeface="Ubuntu"/>
+              <a:sym typeface="Ubuntu"/>
             </a:endParaRPr>
           </a:p>
         </p:txBody>
@@ -41103,7 +41254,7 @@
         <p:spPr>
           <a:xfrm>
             <a:off x="6160933" y="2366010"/>
-            <a:ext cx="2411794" cy="685800"/>
+            <a:ext cx="2411700" cy="381600"/>
           </a:xfrm>
           <a:prstGeom prst="rect">
             <a:avLst/>
@@ -41137,25 +41288,25 @@
               <a:buNone/>
             </a:pPr>
             <a:r>
-              <a:rPr b="0" i="0" lang="en-GB" sz="900" u="none" cap="none" strike="noStrike">
+              <a:rPr i="0" lang="en-GB" sz="1000" u="none" cap="none" strike="noStrike">
                 <a:solidFill>
                   <a:srgbClr val="1A1D2B"/>
                 </a:solidFill>
-                <a:latin typeface="Calibri"/>
-                <a:ea typeface="Calibri"/>
-                <a:cs typeface="Calibri"/>
-                <a:sym typeface="Calibri"/>
+                <a:latin typeface="Ubuntu"/>
+                <a:ea typeface="Ubuntu"/>
+                <a:cs typeface="Ubuntu"/>
+                <a:sym typeface="Ubuntu"/>
               </a:rPr>
               <a:t>A top entitások szinte mindegyikénél eltér a főoldali hangsúly is.</a:t>
             </a:r>
-            <a:endParaRPr b="0" i="0" sz="1100" u="none" cap="none" strike="noStrike">
+            <a:endParaRPr i="0" sz="1200" u="none" cap="none" strike="noStrike">
               <a:solidFill>
                 <a:srgbClr val="000000"/>
               </a:solidFill>
-              <a:latin typeface="Arial"/>
-              <a:ea typeface="Arial"/>
-              <a:cs typeface="Arial"/>
-              <a:sym typeface="Arial"/>
+              <a:latin typeface="Ubuntu"/>
+              <a:ea typeface="Ubuntu"/>
+              <a:cs typeface="Ubuntu"/>
+              <a:sym typeface="Ubuntu"/>
             </a:endParaRPr>
           </a:p>
         </p:txBody>
@@ -41302,7 +41453,7 @@
         <p:spPr>
           <a:xfrm>
             <a:off x="548655" y="3566160"/>
-            <a:ext cx="8092656" cy="582930"/>
+            <a:ext cx="8092800" cy="468000"/>
           </a:xfrm>
           <a:prstGeom prst="rect">
             <a:avLst/>
@@ -41336,7 +41487,7 @@
               <a:buNone/>
             </a:pPr>
             <a:r>
-              <a:rPr b="1" i="0" lang="en-GB" sz="1100" u="none" cap="none" strike="noStrike">
+              <a:rPr b="1" i="0" lang="en-GB" sz="1300" u="none" cap="none" strike="noStrike">
                 <a:solidFill>
                   <a:srgbClr val="FFFFFF"/>
                 </a:solidFill>
@@ -41345,9 +41496,33 @@
                 <a:cs typeface="Calibri"/>
                 <a:sym typeface="Calibri"/>
               </a:rPr>
-              <a:t>A napirend és a framing is blokklogikát követ — a kormányközeli portálok koordináltabbak, a közös entitások kezelése portálspecifikus.</a:t>
+              <a:t>A napirend és a framing is </a:t>
             </a:r>
-            <a:endParaRPr b="0" i="0" sz="1100" u="none" cap="none" strike="noStrike">
+            <a:r>
+              <a:rPr b="1" lang="en-GB" sz="1300">
+                <a:solidFill>
+                  <a:srgbClr val="FFFFFF"/>
+                </a:solidFill>
+                <a:latin typeface="Calibri"/>
+                <a:ea typeface="Calibri"/>
+                <a:cs typeface="Calibri"/>
+                <a:sym typeface="Calibri"/>
+              </a:rPr>
+              <a:t>blokk logikát</a:t>
+            </a:r>
+            <a:r>
+              <a:rPr b="1" i="0" lang="en-GB" sz="1300" u="none" cap="none" strike="noStrike">
+                <a:solidFill>
+                  <a:srgbClr val="FFFFFF"/>
+                </a:solidFill>
+                <a:latin typeface="Calibri"/>
+                <a:ea typeface="Calibri"/>
+                <a:cs typeface="Calibri"/>
+                <a:sym typeface="Calibri"/>
+              </a:rPr>
+              <a:t> követ — a kormányközeli portálok koordináltabbak, a közös entitások kezelése portálspecifikus.</a:t>
+            </a:r>
+            <a:endParaRPr b="0" i="0" sz="1300" u="none" cap="none" strike="noStrike">
               <a:solidFill>
                 <a:srgbClr val="000000"/>
               </a:solidFill>
@@ -41500,8 +41675,8 @@
         </p:nvSpPr>
         <p:spPr>
           <a:xfrm>
-            <a:off x="1508800" y="4354830"/>
-            <a:ext cx="7201092" cy="445770"/>
+            <a:off x="1508800" y="4469704"/>
+            <a:ext cx="7201200" cy="181500"/>
           </a:xfrm>
           <a:prstGeom prst="rect">
             <a:avLst/>
@@ -41535,25 +41710,25 @@
               <a:buNone/>
             </a:pPr>
             <a:r>
-              <a:rPr b="0" i="1" lang="en-GB" sz="900" u="none" cap="none" strike="noStrike">
+              <a:rPr i="1" lang="en-GB" sz="1000" u="none" cap="none" strike="noStrike">
                 <a:solidFill>
                   <a:srgbClr val="1A1D2B"/>
                 </a:solidFill>
-                <a:latin typeface="Calibri"/>
-                <a:ea typeface="Calibri"/>
-                <a:cs typeface="Calibri"/>
-                <a:sym typeface="Calibri"/>
+                <a:latin typeface="Ubuntu"/>
+                <a:ea typeface="Ubuntu"/>
+                <a:cs typeface="Ubuntu"/>
+                <a:sym typeface="Ubuntu"/>
               </a:rPr>
               <a:t>A Δr-különbség heurisztikus; a sok teszt miatt többszörös összehasonlítási korrekció is indokolt lehet.</a:t>
             </a:r>
-            <a:endParaRPr b="0" i="0" sz="1100" u="none" cap="none" strike="noStrike">
+            <a:endParaRPr i="0" sz="1200" u="none" cap="none" strike="noStrike">
               <a:solidFill>
                 <a:srgbClr val="000000"/>
               </a:solidFill>
-              <a:latin typeface="Arial"/>
-              <a:ea typeface="Arial"/>
-              <a:cs typeface="Arial"/>
-              <a:sym typeface="Arial"/>
+              <a:latin typeface="Ubuntu"/>
+              <a:ea typeface="Ubuntu"/>
+              <a:cs typeface="Ubuntu"/>
+              <a:sym typeface="Ubuntu"/>
             </a:endParaRPr>
           </a:p>
         </p:txBody>
@@ -42038,7 +42213,7 @@
         <p:spPr>
           <a:xfrm>
             <a:off x="514364" y="1380000"/>
-            <a:ext cx="3789146" cy="1387500"/>
+            <a:ext cx="3789000" cy="1385400"/>
           </a:xfrm>
           <a:prstGeom prst="rect">
             <a:avLst/>
@@ -42076,9 +42251,26 @@
                 <a:cs typeface="Calibri"/>
                 <a:sym typeface="Calibri"/>
               </a:rPr>
-              <a:t>A figyelem a digitális médiatér legszűkösebb erőforrása (Simon, Goldhaber). A hírportálok nem pusztán információt közölnek: vizuális hierarchiával, kiemeléssel és érzelmi tónussal versenyeznek az olvasó figyelméért.</a:t>
+              <a:t>A</a:t>
             </a:r>
-            <a:endParaRPr sz="1100"/>
+            <a:r>
+              <a:rPr i="0" lang="en-GB" sz="1000" u="none" cap="none" strike="noStrike">
+                <a:solidFill>
+                  <a:srgbClr val="1A1D2B"/>
+                </a:solidFill>
+                <a:latin typeface="Ubuntu"/>
+                <a:ea typeface="Ubuntu"/>
+                <a:cs typeface="Ubuntu"/>
+                <a:sym typeface="Ubuntu"/>
+              </a:rPr>
+              <a:t> figyelem a digitális médiatér legszűkösebb erőforrása (Simon, Goldhaber). A hírportálok nem pusztán információt közölnek: vizuális hierarchiával, kiemeléssel és érzelmi tónussal versenyeznek az olvasó figyelméért.</a:t>
+            </a:r>
+            <a:endParaRPr sz="1300">
+              <a:latin typeface="Ubuntu"/>
+              <a:ea typeface="Ubuntu"/>
+              <a:cs typeface="Ubuntu"/>
+              <a:sym typeface="Ubuntu"/>
+            </a:endParaRPr>
           </a:p>
           <a:p>
             <a:pPr indent="0" lvl="0" marL="0" marR="0" rtl="0" algn="l">
@@ -42094,18 +42286,23 @@
               <a:buNone/>
             </a:pPr>
             <a:r>
-              <a:rPr b="0" i="0" lang="en-GB" sz="800" u="none" cap="none" strike="noStrike">
+              <a:rPr i="0" lang="en-GB" sz="1000" u="none" cap="none" strike="noStrike">
                 <a:solidFill>
                   <a:srgbClr val="1A1D2B"/>
                 </a:solidFill>
-                <a:latin typeface="Calibri"/>
-                <a:ea typeface="Calibri"/>
-                <a:cs typeface="Calibri"/>
-                <a:sym typeface="Calibri"/>
+                <a:latin typeface="Ubuntu"/>
+                <a:ea typeface="Ubuntu"/>
+                <a:cs typeface="Ubuntu"/>
+                <a:sym typeface="Ubuntu"/>
               </a:rPr>
               <a:t>Ez a projekt a figyelemgazdaság kínálati oldalát méri – azt, hogy a szerkesztőség mely híreket próbálja figyelemre méltóvá tenni, nem azt, hogy az olvasó ténylegesen mire kattint.</a:t>
             </a:r>
-            <a:endParaRPr sz="1100"/>
+            <a:endParaRPr sz="1300">
+              <a:latin typeface="Ubuntu"/>
+              <a:ea typeface="Ubuntu"/>
+              <a:cs typeface="Ubuntu"/>
+              <a:sym typeface="Ubuntu"/>
+            </a:endParaRPr>
           </a:p>
         </p:txBody>
       </p:sp>
@@ -42279,8 +42476,8 @@
         </p:nvSpPr>
         <p:spPr>
           <a:xfrm>
-            <a:off x="342909" y="3037500"/>
-            <a:ext cx="2697552" cy="1087500"/>
+            <a:off x="342900" y="3037500"/>
+            <a:ext cx="2697600" cy="1320000"/>
           </a:xfrm>
           <a:prstGeom prst="roundRect">
             <a:avLst>
@@ -42442,8 +42639,8 @@
         </p:nvSpPr>
         <p:spPr>
           <a:xfrm>
-            <a:off x="882924" y="3202500"/>
-            <a:ext cx="1985033" cy="225000"/>
+            <a:off x="990141" y="3281050"/>
+            <a:ext cx="1985100" cy="138600"/>
           </a:xfrm>
           <a:prstGeom prst="rect">
             <a:avLst/>
@@ -42472,7 +42669,7 @@
               <a:buNone/>
             </a:pPr>
             <a:r>
-              <a:rPr b="1" i="0" lang="en-GB" sz="800" u="none" cap="none" strike="noStrike">
+              <a:rPr b="1" i="0" lang="en-GB" sz="900" u="none" cap="none" strike="noStrike">
                 <a:solidFill>
                   <a:srgbClr val="C75450"/>
                 </a:solidFill>
@@ -42483,7 +42680,7 @@
               </a:rPr>
               <a:t>POLARIZÁCIÓ</a:t>
             </a:r>
-            <a:endParaRPr sz="1100"/>
+            <a:endParaRPr sz="1200"/>
           </a:p>
         </p:txBody>
       </p:sp>
@@ -42495,8 +42692,8 @@
         </p:nvSpPr>
         <p:spPr>
           <a:xfrm>
-            <a:off x="514364" y="3577500"/>
-            <a:ext cx="2354643" cy="487500"/>
+            <a:off x="514364" y="3653700"/>
+            <a:ext cx="2354700" cy="484800"/>
           </a:xfrm>
           <a:prstGeom prst="rect">
             <a:avLst/>
@@ -42525,18 +42722,23 @@
               <a:buNone/>
             </a:pPr>
             <a:r>
-              <a:rPr b="0" i="0" lang="en-GB" sz="800" u="none" cap="none" strike="noStrike">
+              <a:rPr i="0" lang="en-GB" sz="900" u="none" cap="none" strike="noStrike">
                 <a:solidFill>
                   <a:srgbClr val="1A1D2B"/>
                 </a:solidFill>
-                <a:latin typeface="Calibri"/>
-                <a:ea typeface="Calibri"/>
-                <a:cs typeface="Calibri"/>
-                <a:sym typeface="Calibri"/>
+                <a:latin typeface="Ubuntu"/>
+                <a:ea typeface="Ubuntu"/>
+                <a:cs typeface="Ubuntu"/>
+                <a:sym typeface="Ubuntu"/>
               </a:rPr>
               <a:t>A kormányközeli és független portálok eltérő szentimenttel és vizuális súllyal jelenítik meg ugyanazokat a politikai szereplőket.</a:t>
             </a:r>
-            <a:endParaRPr sz="1100"/>
+            <a:endParaRPr sz="1200">
+              <a:latin typeface="Ubuntu"/>
+              <a:ea typeface="Ubuntu"/>
+              <a:cs typeface="Ubuntu"/>
+              <a:sym typeface="Ubuntu"/>
+            </a:endParaRPr>
           </a:p>
         </p:txBody>
       </p:sp>
@@ -42548,8 +42750,8 @@
         </p:nvSpPr>
         <p:spPr>
           <a:xfrm>
-            <a:off x="3211916" y="3037500"/>
-            <a:ext cx="2697552" cy="1087500"/>
+            <a:off x="3211925" y="3037500"/>
+            <a:ext cx="2697600" cy="1320000"/>
           </a:xfrm>
           <a:prstGeom prst="roundRect">
             <a:avLst>
@@ -42711,8 +42913,8 @@
         </p:nvSpPr>
         <p:spPr>
           <a:xfrm>
-            <a:off x="3751930" y="3202500"/>
-            <a:ext cx="1985033" cy="225000"/>
+            <a:off x="3859148" y="3281050"/>
+            <a:ext cx="1985100" cy="138600"/>
           </a:xfrm>
           <a:prstGeom prst="rect">
             <a:avLst/>
@@ -42741,7 +42943,7 @@
               <a:buNone/>
             </a:pPr>
             <a:r>
-              <a:rPr b="1" i="0" lang="en-GB" sz="800" u="none" cap="none" strike="noStrike">
+              <a:rPr b="1" i="0" lang="en-GB" sz="900" u="none" cap="none" strike="noStrike">
                 <a:solidFill>
                   <a:srgbClr val="C75450"/>
                 </a:solidFill>
@@ -42752,7 +42954,7 @@
               </a:rPr>
               <a:t>VIZUÁLIS HANGSÚLY</a:t>
             </a:r>
-            <a:endParaRPr sz="1100"/>
+            <a:endParaRPr sz="1200"/>
           </a:p>
         </p:txBody>
       </p:sp>
@@ -42764,8 +42966,8 @@
         </p:nvSpPr>
         <p:spPr>
           <a:xfrm>
-            <a:off x="3383370" y="3577500"/>
-            <a:ext cx="2354643" cy="487500"/>
+            <a:off x="3383370" y="3653700"/>
+            <a:ext cx="2354700" cy="484800"/>
           </a:xfrm>
           <a:prstGeom prst="rect">
             <a:avLst/>
@@ -42794,18 +42996,23 @@
               <a:buNone/>
             </a:pPr>
             <a:r>
-              <a:rPr b="0" i="0" lang="en-GB" sz="800" u="none" cap="none" strike="noStrike">
+              <a:rPr i="0" lang="en-GB" sz="900" u="none" cap="none" strike="noStrike">
                 <a:solidFill>
                   <a:srgbClr val="1A1D2B"/>
                 </a:solidFill>
-                <a:latin typeface="Calibri"/>
-                <a:ea typeface="Calibri"/>
-                <a:cs typeface="Calibri"/>
-                <a:sym typeface="Calibri"/>
+                <a:latin typeface="Ubuntu"/>
+                <a:ea typeface="Ubuntu"/>
+                <a:cs typeface="Ubuntu"/>
+                <a:sym typeface="Ubuntu"/>
               </a:rPr>
               <a:t>A negatív címsorok átlagosan magasabb fontossági pontszámot kapnak, mint a semlegesek.</a:t>
             </a:r>
-            <a:endParaRPr sz="1100"/>
+            <a:endParaRPr sz="1200">
+              <a:latin typeface="Ubuntu"/>
+              <a:ea typeface="Ubuntu"/>
+              <a:cs typeface="Ubuntu"/>
+              <a:sym typeface="Ubuntu"/>
+            </a:endParaRPr>
           </a:p>
         </p:txBody>
       </p:sp>
@@ -42817,8 +43024,8 @@
         </p:nvSpPr>
         <p:spPr>
           <a:xfrm>
-            <a:off x="6080922" y="3037500"/>
-            <a:ext cx="2697552" cy="1087500"/>
+            <a:off x="6080925" y="3037500"/>
+            <a:ext cx="2697600" cy="1320000"/>
           </a:xfrm>
           <a:prstGeom prst="roundRect">
             <a:avLst>
@@ -42980,8 +43187,8 @@
         </p:nvSpPr>
         <p:spPr>
           <a:xfrm>
-            <a:off x="6620936" y="3202500"/>
-            <a:ext cx="1985033" cy="225000"/>
+            <a:off x="6728154" y="3281050"/>
+            <a:ext cx="1985100" cy="138600"/>
           </a:xfrm>
           <a:prstGeom prst="rect">
             <a:avLst/>
@@ -43010,7 +43217,7 @@
               <a:buNone/>
             </a:pPr>
             <a:r>
-              <a:rPr b="1" i="0" lang="en-GB" sz="800" u="none" cap="none" strike="noStrike">
+              <a:rPr b="1" i="0" lang="en-GB" sz="900" u="none" cap="none" strike="noStrike">
                 <a:solidFill>
                   <a:srgbClr val="C75450"/>
                 </a:solidFill>
@@ -43021,7 +43228,7 @@
               </a:rPr>
               <a:t>NAPIREND-KIJELÖLÉS</a:t>
             </a:r>
-            <a:endParaRPr sz="1100"/>
+            <a:endParaRPr sz="1200"/>
           </a:p>
         </p:txBody>
       </p:sp>
@@ -43033,8 +43240,8 @@
         </p:nvSpPr>
         <p:spPr>
           <a:xfrm>
-            <a:off x="6252377" y="3577500"/>
-            <a:ext cx="2354643" cy="487500"/>
+            <a:off x="6252377" y="3653700"/>
+            <a:ext cx="2354700" cy="484800"/>
           </a:xfrm>
           <a:prstGeom prst="rect">
             <a:avLst/>
@@ -43063,18 +43270,23 @@
               <a:buNone/>
             </a:pPr>
             <a:r>
-              <a:rPr b="0" i="0" lang="en-GB" sz="800" u="none" cap="none" strike="noStrike">
+              <a:rPr i="0" lang="en-GB" sz="900" u="none" cap="none" strike="noStrike">
                 <a:solidFill>
                   <a:srgbClr val="1A1D2B"/>
                 </a:solidFill>
-                <a:latin typeface="Calibri"/>
-                <a:ea typeface="Calibri"/>
-                <a:cs typeface="Calibri"/>
-                <a:sym typeface="Calibri"/>
+                <a:latin typeface="Ubuntu"/>
+                <a:ea typeface="Ubuntu"/>
+                <a:cs typeface="Ubuntu"/>
+                <a:sym typeface="Ubuntu"/>
               </a:rPr>
               <a:t>A kulcsszereplők megjelenése időben korrelál a portálok között, de a dinamika portálspecifikus.</a:t>
             </a:r>
-            <a:endParaRPr sz="1100"/>
+            <a:endParaRPr sz="1200">
+              <a:latin typeface="Ubuntu"/>
+              <a:ea typeface="Ubuntu"/>
+              <a:cs typeface="Ubuntu"/>
+              <a:sym typeface="Ubuntu"/>
+            </a:endParaRPr>
           </a:p>
         </p:txBody>
       </p:sp>
@@ -43435,8 +43647,8 @@
         </p:nvSpPr>
         <p:spPr>
           <a:xfrm>
-            <a:off x="342909" y="1042500"/>
-            <a:ext cx="2697552" cy="1687500"/>
+            <a:off x="342900" y="1042500"/>
+            <a:ext cx="2697600" cy="1802100"/>
           </a:xfrm>
           <a:prstGeom prst="roundRect">
             <a:avLst>
@@ -43545,7 +43757,7 @@
         <p:spPr>
           <a:xfrm>
             <a:off x="514364" y="1380000"/>
-            <a:ext cx="2354643" cy="1275000"/>
+            <a:ext cx="2354700" cy="954300"/>
           </a:xfrm>
           <a:prstGeom prst="rect">
             <a:avLst/>
@@ -43574,18 +43786,23 @@
               <a:buNone/>
             </a:pPr>
             <a:r>
-              <a:rPr b="0" i="0" lang="en-GB" sz="800" u="none" cap="none" strike="noStrike">
+              <a:rPr i="0" lang="en-GB" sz="1000" u="none" cap="none" strike="noStrike">
                 <a:solidFill>
                   <a:srgbClr val="1A1D2B"/>
                 </a:solidFill>
-                <a:latin typeface="Calibri"/>
-                <a:ea typeface="Calibri"/>
-                <a:cs typeface="Calibri"/>
-                <a:sym typeface="Calibri"/>
+                <a:latin typeface="Ubuntu"/>
+                <a:ea typeface="Ubuntu"/>
+                <a:cs typeface="Ubuntu"/>
+                <a:sym typeface="Ubuntu"/>
               </a:rPr>
               <a:t>A 21 legolvasottabb magyar hírportál főoldali szalagcímeinek és vizuális paramétereinek óránkénti rögzítése — ez adja a figyelem kínálati oldalának nyers mérőszámait.</a:t>
             </a:r>
-            <a:endParaRPr sz="1100"/>
+            <a:endParaRPr sz="1300">
+              <a:latin typeface="Ubuntu"/>
+              <a:ea typeface="Ubuntu"/>
+              <a:cs typeface="Ubuntu"/>
+              <a:sym typeface="Ubuntu"/>
+            </a:endParaRPr>
           </a:p>
         </p:txBody>
       </p:sp>
@@ -43597,8 +43814,8 @@
         </p:nvSpPr>
         <p:spPr>
           <a:xfrm>
-            <a:off x="3211916" y="1042500"/>
-            <a:ext cx="2697552" cy="1687500"/>
+            <a:off x="3211925" y="1042500"/>
+            <a:ext cx="2697600" cy="1802100"/>
           </a:xfrm>
           <a:prstGeom prst="roundRect">
             <a:avLst>
@@ -43707,7 +43924,7 @@
         <p:spPr>
           <a:xfrm>
             <a:off x="3383370" y="1380000"/>
-            <a:ext cx="2354643" cy="1275000"/>
+            <a:ext cx="2354700" cy="1365900"/>
           </a:xfrm>
           <a:prstGeom prst="rect">
             <a:avLst/>
@@ -43736,18 +43953,23 @@
               <a:buNone/>
             </a:pPr>
             <a:r>
-              <a:rPr b="1" i="0" lang="en-GB" sz="800" u="none" cap="none" strike="noStrike">
+              <a:rPr b="1" i="0" lang="en-GB" sz="900" u="none" cap="none" strike="noStrike">
                 <a:solidFill>
                   <a:srgbClr val="1E2761"/>
                 </a:solidFill>
-                <a:latin typeface="Calibri"/>
-                <a:ea typeface="Calibri"/>
-                <a:cs typeface="Calibri"/>
-                <a:sym typeface="Calibri"/>
+                <a:latin typeface="Ubuntu"/>
+                <a:ea typeface="Ubuntu"/>
+                <a:cs typeface="Ubuntu"/>
+                <a:sym typeface="Ubuntu"/>
               </a:rPr>
               <a:t>Playwright + Crawlee (TS)</a:t>
             </a:r>
-            <a:endParaRPr sz="1100"/>
+            <a:endParaRPr b="1" sz="1200">
+              <a:latin typeface="Ubuntu"/>
+              <a:ea typeface="Ubuntu"/>
+              <a:cs typeface="Ubuntu"/>
+              <a:sym typeface="Ubuntu"/>
+            </a:endParaRPr>
           </a:p>
           <a:p>
             <a:pPr indent="0" lvl="0" marL="0" marR="0" rtl="0" algn="l">
@@ -43763,18 +43985,23 @@
               <a:buNone/>
             </a:pPr>
             <a:r>
-              <a:rPr b="0" i="0" lang="en-GB" sz="800" u="none" cap="none" strike="noStrike">
+              <a:rPr i="0" lang="en-GB" sz="800" u="none" cap="none" strike="noStrike">
                 <a:solidFill>
                   <a:srgbClr val="1A1D2B"/>
                 </a:solidFill>
-                <a:latin typeface="Calibri"/>
-                <a:ea typeface="Calibri"/>
-                <a:cs typeface="Calibri"/>
-                <a:sym typeface="Calibri"/>
+                <a:latin typeface="Ubuntu"/>
+                <a:ea typeface="Ubuntu"/>
+                <a:cs typeface="Ubuntu"/>
+                <a:sym typeface="Ubuntu"/>
               </a:rPr>
               <a:t>valódi böngésző — JS-sel betöltődő címek, pontos DOM-geometria.</a:t>
             </a:r>
-            <a:endParaRPr sz="1100"/>
+            <a:endParaRPr sz="1100">
+              <a:latin typeface="Ubuntu"/>
+              <a:ea typeface="Ubuntu"/>
+              <a:cs typeface="Ubuntu"/>
+              <a:sym typeface="Ubuntu"/>
+            </a:endParaRPr>
           </a:p>
           <a:p>
             <a:pPr indent="0" lvl="0" marL="0" marR="0" rtl="0" algn="l">
@@ -43790,18 +44017,23 @@
               <a:buNone/>
             </a:pPr>
             <a:r>
-              <a:rPr b="1" i="0" lang="en-GB" sz="800" u="none" cap="none" strike="noStrike">
+              <a:rPr b="1" i="0" lang="en-GB" sz="900" u="none" cap="none" strike="noStrike">
                 <a:solidFill>
                   <a:srgbClr val="1E2761"/>
                 </a:solidFill>
-                <a:latin typeface="Calibri"/>
-                <a:ea typeface="Calibri"/>
-                <a:cs typeface="Calibri"/>
-                <a:sym typeface="Calibri"/>
+                <a:latin typeface="Ubuntu"/>
+                <a:ea typeface="Ubuntu"/>
+                <a:cs typeface="Ubuntu"/>
+                <a:sym typeface="Ubuntu"/>
               </a:rPr>
               <a:t>Convex backend</a:t>
             </a:r>
-            <a:endParaRPr sz="1100"/>
+            <a:endParaRPr b="1" sz="1200">
+              <a:latin typeface="Ubuntu"/>
+              <a:ea typeface="Ubuntu"/>
+              <a:cs typeface="Ubuntu"/>
+              <a:sym typeface="Ubuntu"/>
+            </a:endParaRPr>
           </a:p>
           <a:p>
             <a:pPr indent="0" lvl="0" marL="0" marR="0" rtl="0" algn="l">
@@ -43817,18 +44049,23 @@
               <a:buNone/>
             </a:pPr>
             <a:r>
-              <a:rPr b="0" i="0" lang="en-GB" sz="800" u="none" cap="none" strike="noStrike">
+              <a:rPr i="0" lang="en-GB" sz="800" u="none" cap="none" strike="noStrike">
                 <a:solidFill>
                   <a:srgbClr val="1A1D2B"/>
                 </a:solidFill>
-                <a:latin typeface="Calibri"/>
-                <a:ea typeface="Calibri"/>
-                <a:cs typeface="Calibri"/>
-                <a:sym typeface="Calibri"/>
+                <a:latin typeface="Ubuntu"/>
+                <a:ea typeface="Ubuntu"/>
+                <a:cs typeface="Ubuntu"/>
+                <a:sym typeface="Ubuntu"/>
               </a:rPr>
               <a:t>típusos séma, real-time szinkronizáció.</a:t>
             </a:r>
-            <a:endParaRPr sz="1100"/>
+            <a:endParaRPr sz="1100">
+              <a:latin typeface="Ubuntu"/>
+              <a:ea typeface="Ubuntu"/>
+              <a:cs typeface="Ubuntu"/>
+              <a:sym typeface="Ubuntu"/>
+            </a:endParaRPr>
           </a:p>
           <a:p>
             <a:pPr indent="0" lvl="0" marL="0" marR="0" rtl="0" algn="l">
@@ -43844,18 +44081,23 @@
               <a:buNone/>
             </a:pPr>
             <a:r>
-              <a:rPr b="1" i="0" lang="en-GB" sz="800" u="none" cap="none" strike="noStrike">
+              <a:rPr b="1" i="0" lang="en-GB" sz="900" u="none" cap="none" strike="noStrike">
                 <a:solidFill>
                   <a:srgbClr val="1E2761"/>
                 </a:solidFill>
-                <a:latin typeface="Calibri"/>
-                <a:ea typeface="Calibri"/>
-                <a:cs typeface="Calibri"/>
-                <a:sym typeface="Calibri"/>
+                <a:latin typeface="Ubuntu"/>
+                <a:ea typeface="Ubuntu"/>
+                <a:cs typeface="Ubuntu"/>
+                <a:sym typeface="Ubuntu"/>
               </a:rPr>
               <a:t>Docker Compose + cron</a:t>
             </a:r>
-            <a:endParaRPr sz="1100"/>
+            <a:endParaRPr b="1" sz="1200">
+              <a:latin typeface="Ubuntu"/>
+              <a:ea typeface="Ubuntu"/>
+              <a:cs typeface="Ubuntu"/>
+              <a:sym typeface="Ubuntu"/>
+            </a:endParaRPr>
           </a:p>
           <a:p>
             <a:pPr indent="0" lvl="0" marL="0" marR="0" rtl="0" algn="l">
@@ -43871,18 +44113,23 @@
               <a:buNone/>
             </a:pPr>
             <a:r>
-              <a:rPr b="0" i="0" lang="en-GB" sz="800" u="none" cap="none" strike="noStrike">
+              <a:rPr i="0" lang="en-GB" sz="800" u="none" cap="none" strike="noStrike">
                 <a:solidFill>
                   <a:srgbClr val="1A1D2B"/>
                 </a:solidFill>
-                <a:latin typeface="Calibri"/>
-                <a:ea typeface="Calibri"/>
-                <a:cs typeface="Calibri"/>
-                <a:sym typeface="Calibri"/>
+                <a:latin typeface="Ubuntu"/>
+                <a:ea typeface="Ubuntu"/>
+                <a:cs typeface="Ubuntu"/>
+                <a:sym typeface="Ubuntu"/>
               </a:rPr>
               <a:t>óránkénti futás, webhook indítja az LLM-szolgáltatást.</a:t>
             </a:r>
-            <a:endParaRPr sz="1100"/>
+            <a:endParaRPr sz="1100">
+              <a:latin typeface="Ubuntu"/>
+              <a:ea typeface="Ubuntu"/>
+              <a:cs typeface="Ubuntu"/>
+              <a:sym typeface="Ubuntu"/>
+            </a:endParaRPr>
           </a:p>
         </p:txBody>
       </p:sp>
@@ -43894,8 +44141,8 @@
         </p:nvSpPr>
         <p:spPr>
           <a:xfrm>
-            <a:off x="6080922" y="1042500"/>
-            <a:ext cx="2697552" cy="1687500"/>
+            <a:off x="6080925" y="1042500"/>
+            <a:ext cx="2697600" cy="1802100"/>
           </a:xfrm>
           <a:prstGeom prst="roundRect">
             <a:avLst>
@@ -44004,7 +44251,7 @@
         <p:spPr>
           <a:xfrm>
             <a:off x="6252377" y="1380000"/>
-            <a:ext cx="2354643" cy="1275000"/>
+            <a:ext cx="2354700" cy="1073700"/>
           </a:xfrm>
           <a:prstGeom prst="rect">
             <a:avLst/>
@@ -44033,18 +44280,167 @@
               <a:buNone/>
             </a:pPr>
             <a:r>
-              <a:rPr b="0" i="0" lang="en-GB" sz="800" u="none" cap="none" strike="noStrike">
+              <a:rPr b="1" i="0" lang="en-GB" sz="900" u="none" cap="none" strike="noStrike">
                 <a:solidFill>
                   <a:srgbClr val="1A1D2B"/>
                 </a:solidFill>
-                <a:latin typeface="Calibri"/>
-                <a:ea typeface="Calibri"/>
-                <a:cs typeface="Calibri"/>
-                <a:sym typeface="Calibri"/>
+                <a:latin typeface="Ubuntu"/>
+                <a:ea typeface="Ubuntu"/>
+                <a:cs typeface="Ubuntu"/>
+                <a:sym typeface="Ubuntu"/>
               </a:rPr>
-              <a:t>Telex · Origo · Blikk · 24.hu · Index · BorsOnline · 444.hu · Magyar Nemzet · Ripost · HVG · ATV · Hirado.hu · Metropol · Nepszava · Mandiner · PestiSracok · Napi · Valasz Online · Vilaggazdasag · Portfolio · Magyar Hang</a:t>
+              <a:t>Telex · Origo · </a:t>
             </a:r>
-            <a:endParaRPr sz="1100"/>
+            <a:r>
+              <a:rPr i="0" lang="en-GB" sz="900" u="none" cap="none" strike="noStrike">
+                <a:solidFill>
+                  <a:srgbClr val="1A1D2B"/>
+                </a:solidFill>
+                <a:latin typeface="Ubuntu"/>
+                <a:ea typeface="Ubuntu"/>
+                <a:cs typeface="Ubuntu"/>
+                <a:sym typeface="Ubuntu"/>
+              </a:rPr>
+              <a:t>Blikk</a:t>
+            </a:r>
+            <a:r>
+              <a:rPr b="1" i="0" lang="en-GB" sz="900" u="none" cap="none" strike="noStrike">
+                <a:solidFill>
+                  <a:srgbClr val="1A1D2B"/>
+                </a:solidFill>
+                <a:latin typeface="Ubuntu"/>
+                <a:ea typeface="Ubuntu"/>
+                <a:cs typeface="Ubuntu"/>
+                <a:sym typeface="Ubuntu"/>
+              </a:rPr>
+              <a:t> · 24.hu · </a:t>
+            </a:r>
+            <a:r>
+              <a:rPr i="0" lang="en-GB" sz="900" u="none" cap="none" strike="noStrike">
+                <a:solidFill>
+                  <a:srgbClr val="1A1D2B"/>
+                </a:solidFill>
+                <a:latin typeface="Ubuntu"/>
+                <a:ea typeface="Ubuntu"/>
+                <a:cs typeface="Ubuntu"/>
+                <a:sym typeface="Ubuntu"/>
+              </a:rPr>
+              <a:t>Index</a:t>
+            </a:r>
+            <a:r>
+              <a:rPr b="1" i="0" lang="en-GB" sz="900" u="none" cap="none" strike="noStrike">
+                <a:solidFill>
+                  <a:srgbClr val="1A1D2B"/>
+                </a:solidFill>
+                <a:latin typeface="Ubuntu"/>
+                <a:ea typeface="Ubuntu"/>
+                <a:cs typeface="Ubuntu"/>
+                <a:sym typeface="Ubuntu"/>
+              </a:rPr>
+              <a:t> · </a:t>
+            </a:r>
+            <a:r>
+              <a:rPr i="0" lang="en-GB" sz="900" u="none" cap="none" strike="noStrike">
+                <a:solidFill>
+                  <a:srgbClr val="1A1D2B"/>
+                </a:solidFill>
+                <a:latin typeface="Ubuntu"/>
+                <a:ea typeface="Ubuntu"/>
+                <a:cs typeface="Ubuntu"/>
+                <a:sym typeface="Ubuntu"/>
+              </a:rPr>
+              <a:t>BorsOnline</a:t>
+            </a:r>
+            <a:r>
+              <a:rPr b="1" i="0" lang="en-GB" sz="900" u="none" cap="none" strike="noStrike">
+                <a:solidFill>
+                  <a:srgbClr val="1A1D2B"/>
+                </a:solidFill>
+                <a:latin typeface="Ubuntu"/>
+                <a:ea typeface="Ubuntu"/>
+                <a:cs typeface="Ubuntu"/>
+                <a:sym typeface="Ubuntu"/>
+              </a:rPr>
+              <a:t> · 444.hu · Magyar Nemzet · Ripost · HVG · ATV · Hirado.hu · Metropol · Nepszava · Mandiner · PestiSracok · </a:t>
+            </a:r>
+            <a:r>
+              <a:rPr i="0" lang="en-GB" sz="900" u="none" cap="none" strike="noStrike">
+                <a:solidFill>
+                  <a:srgbClr val="1A1D2B"/>
+                </a:solidFill>
+                <a:latin typeface="Ubuntu"/>
+                <a:ea typeface="Ubuntu"/>
+                <a:cs typeface="Ubuntu"/>
+                <a:sym typeface="Ubuntu"/>
+              </a:rPr>
+              <a:t>Napi</a:t>
+            </a:r>
+            <a:r>
+              <a:rPr b="1" i="0" lang="en-GB" sz="900" u="none" cap="none" strike="noStrike">
+                <a:solidFill>
+                  <a:srgbClr val="1A1D2B"/>
+                </a:solidFill>
+                <a:latin typeface="Ubuntu"/>
+                <a:ea typeface="Ubuntu"/>
+                <a:cs typeface="Ubuntu"/>
+                <a:sym typeface="Ubuntu"/>
+              </a:rPr>
+              <a:t> · Valasz Online · </a:t>
+            </a:r>
+            <a:r>
+              <a:rPr i="0" lang="en-GB" sz="900" u="none" cap="none" strike="noStrike">
+                <a:solidFill>
+                  <a:srgbClr val="1A1D2B"/>
+                </a:solidFill>
+                <a:latin typeface="Ubuntu"/>
+                <a:ea typeface="Ubuntu"/>
+                <a:cs typeface="Ubuntu"/>
+                <a:sym typeface="Ubuntu"/>
+              </a:rPr>
+              <a:t>Vilaggazdasag</a:t>
+            </a:r>
+            <a:r>
+              <a:rPr b="1" i="0" lang="en-GB" sz="900" u="none" cap="none" strike="noStrike">
+                <a:solidFill>
+                  <a:srgbClr val="1A1D2B"/>
+                </a:solidFill>
+                <a:latin typeface="Ubuntu"/>
+                <a:ea typeface="Ubuntu"/>
+                <a:cs typeface="Ubuntu"/>
+                <a:sym typeface="Ubuntu"/>
+              </a:rPr>
+              <a:t> · </a:t>
+            </a:r>
+            <a:r>
+              <a:rPr i="0" lang="en-GB" sz="900" u="none" cap="none" strike="noStrike">
+                <a:solidFill>
+                  <a:srgbClr val="1A1D2B"/>
+                </a:solidFill>
+                <a:latin typeface="Ubuntu"/>
+                <a:ea typeface="Ubuntu"/>
+                <a:cs typeface="Ubuntu"/>
+                <a:sym typeface="Ubuntu"/>
+              </a:rPr>
+              <a:t>Portfolio</a:t>
+            </a:r>
+            <a:r>
+              <a:rPr b="1" i="0" lang="en-GB" sz="900" u="none" cap="none" strike="noStrike">
+                <a:solidFill>
+                  <a:srgbClr val="1A1D2B"/>
+                </a:solidFill>
+                <a:latin typeface="Ubuntu"/>
+                <a:ea typeface="Ubuntu"/>
+                <a:cs typeface="Ubuntu"/>
+                <a:sym typeface="Ubuntu"/>
+              </a:rPr>
+              <a:t> · Magyar Hang</a:t>
+            </a:r>
+            <a:endParaRPr b="1" sz="1200">
+              <a:latin typeface="Ubuntu"/>
+              <a:ea typeface="Ubuntu"/>
+              <a:cs typeface="Ubuntu"/>
+              <a:sym typeface="Ubuntu"/>
+            </a:endParaRPr>
           </a:p>
         </p:txBody>
       </p:sp>
@@ -44056,8 +44452,8 @@
         </p:nvSpPr>
         <p:spPr>
           <a:xfrm>
-            <a:off x="342909" y="2925000"/>
-            <a:ext cx="4132055" cy="1650000"/>
+            <a:off x="342909" y="3001200"/>
+            <a:ext cx="4132200" cy="1650000"/>
           </a:xfrm>
           <a:prstGeom prst="roundRect">
             <a:avLst>
@@ -44112,8 +44508,8 @@
         </p:nvSpPr>
         <p:spPr>
           <a:xfrm>
-            <a:off x="514364" y="3037500"/>
-            <a:ext cx="3789146" cy="225000"/>
+            <a:off x="514364" y="3113700"/>
+            <a:ext cx="3789000" cy="123000"/>
           </a:xfrm>
           <a:prstGeom prst="rect">
             <a:avLst/>
@@ -44165,8 +44561,8 @@
         </p:nvSpPr>
         <p:spPr>
           <a:xfrm>
-            <a:off x="514364" y="3262500"/>
-            <a:ext cx="3789146" cy="1237500"/>
+            <a:off x="514364" y="3338700"/>
+            <a:ext cx="3789000" cy="1026300"/>
           </a:xfrm>
           <a:prstGeom prst="rect">
             <a:avLst/>
@@ -44378,8 +44774,8 @@
         </p:nvSpPr>
         <p:spPr>
           <a:xfrm>
-            <a:off x="4646419" y="2925000"/>
-            <a:ext cx="4132055" cy="1650000"/>
+            <a:off x="4646419" y="3001200"/>
+            <a:ext cx="4132200" cy="1650000"/>
           </a:xfrm>
           <a:prstGeom prst="roundRect">
             <a:avLst>
@@ -44434,8 +44830,8 @@
         </p:nvSpPr>
         <p:spPr>
           <a:xfrm>
-            <a:off x="4817873" y="3037500"/>
-            <a:ext cx="3789146" cy="225000"/>
+            <a:off x="4817873" y="3113700"/>
+            <a:ext cx="3789000" cy="123000"/>
           </a:xfrm>
           <a:prstGeom prst="rect">
             <a:avLst/>
@@ -44487,8 +44883,8 @@
         </p:nvSpPr>
         <p:spPr>
           <a:xfrm>
-            <a:off x="4817873" y="3270000"/>
-            <a:ext cx="3789146" cy="1237500"/>
+            <a:off x="4817873" y="3346200"/>
+            <a:ext cx="3789000" cy="1061700"/>
           </a:xfrm>
           <a:prstGeom prst="rect">
             <a:avLst/>
@@ -44996,8 +45392,8 @@
         </p:nvSpPr>
         <p:spPr>
           <a:xfrm>
-            <a:off x="342909" y="1042500"/>
-            <a:ext cx="4132055" cy="1350000"/>
+            <a:off x="342900" y="1042500"/>
+            <a:ext cx="4132200" cy="1529400"/>
           </a:xfrm>
           <a:prstGeom prst="roundRect">
             <a:avLst>
@@ -45105,8 +45501,8 @@
         </p:nvSpPr>
         <p:spPr>
           <a:xfrm>
-            <a:off x="514364" y="1380000"/>
-            <a:ext cx="3789146" cy="937500"/>
+            <a:off x="514375" y="1380000"/>
+            <a:ext cx="3889500" cy="1051800"/>
           </a:xfrm>
           <a:prstGeom prst="rect">
             <a:avLst/>
@@ -45135,43 +45531,70 @@
               <a:buNone/>
             </a:pPr>
             <a:r>
-              <a:rPr b="0" i="0" lang="en-GB" sz="800" u="none" cap="none" strike="noStrike">
+              <a:rPr i="0" lang="en-GB" sz="1000" u="none" cap="none" strike="noStrike">
                 <a:solidFill>
                   <a:srgbClr val="1A1D2B"/>
                 </a:solidFill>
-                <a:latin typeface="Calibri"/>
-                <a:ea typeface="Calibri"/>
-                <a:cs typeface="Calibri"/>
-                <a:sym typeface="Calibri"/>
+                <a:latin typeface="Ubuntu"/>
+                <a:ea typeface="Ubuntu"/>
+                <a:cs typeface="Ubuntu"/>
+                <a:sym typeface="Ubuntu"/>
               </a:rPr>
               <a:t>Minden új headline-hoz strukturált szemantikai annotáció készítése: szentiment, entitások, címke — ezek a H1–H3 hipotézisek magyarázó változói.</a:t>
             </a:r>
-            <a:endParaRPr sz="1100"/>
+            <a:endParaRPr sz="1300">
+              <a:latin typeface="Ubuntu"/>
+              <a:ea typeface="Ubuntu"/>
+              <a:cs typeface="Ubuntu"/>
+              <a:sym typeface="Ubuntu"/>
+            </a:endParaRPr>
           </a:p>
           <a:p>
-            <a:pPr indent="0" lvl="0" marL="0" marR="0" rtl="0" algn="l">
-              <a:lnSpc>
-                <a:spcPct val="100000"/>
-              </a:lnSpc>
-              <a:spcBef>
-                <a:spcPts val="0"/>
-              </a:spcBef>
-              <a:spcAft>
-                <a:spcPts val="0"/>
-              </a:spcAft>
+            <a:pPr indent="0" lvl="0" marL="0" rtl="0" algn="l">
+              <a:spcBef>
+                <a:spcPts val="500"/>
+              </a:spcBef>
+              <a:spcAft>
+                <a:spcPts val="0"/>
+              </a:spcAft>
+              <a:buClr>
+                <a:schemeClr val="dk1"/>
+              </a:buClr>
+              <a:buFont typeface="Arial"/>
               <a:buNone/>
             </a:pPr>
             <a:r>
-              <a:t/>
+              <a:rPr b="1" lang="en-GB" sz="900">
+                <a:solidFill>
+                  <a:srgbClr val="1E2761"/>
+                </a:solidFill>
+                <a:latin typeface="Ubuntu"/>
+                <a:ea typeface="Ubuntu"/>
+                <a:cs typeface="Ubuntu"/>
+                <a:sym typeface="Ubuntu"/>
+              </a:rPr>
+              <a:t>Használd model: </a:t>
             </a:r>
-            <a:endParaRPr b="0" i="0" sz="800" u="none" cap="none" strike="noStrike">
+            <a:r>
+              <a:rPr i="1" lang="en-GB" sz="900">
+                <a:solidFill>
+                  <a:srgbClr val="1E2761"/>
+                </a:solidFill>
+                <a:latin typeface="Ubuntu"/>
+                <a:ea typeface="Ubuntu"/>
+                <a:cs typeface="Ubuntu"/>
+                <a:sym typeface="Ubuntu"/>
+              </a:rPr>
+              <a:t>google/gemini-3.1-flash-lite-preview</a:t>
+            </a:r>
+            <a:endParaRPr i="1" sz="900" u="none" cap="none" strike="noStrike">
               <a:solidFill>
                 <a:srgbClr val="1A1D2B"/>
               </a:solidFill>
-              <a:latin typeface="Calibri"/>
-              <a:ea typeface="Calibri"/>
-              <a:cs typeface="Calibri"/>
-              <a:sym typeface="Calibri"/>
+              <a:latin typeface="Ubuntu"/>
+              <a:ea typeface="Ubuntu"/>
+              <a:cs typeface="Ubuntu"/>
+              <a:sym typeface="Ubuntu"/>
             </a:endParaRPr>
           </a:p>
           <a:p>
@@ -45188,45 +45611,44 @@
               <a:buNone/>
             </a:pPr>
             <a:r>
-              <a:rPr b="1" i="0" lang="en-GB" sz="800" u="none" cap="none" strike="noStrike">
+              <a:rPr b="1" i="0" lang="en-GB" sz="900" u="none" cap="none" strike="noStrike">
                 <a:solidFill>
                   <a:srgbClr val="1E2761"/>
                 </a:solidFill>
-                <a:latin typeface="Calibri"/>
-                <a:ea typeface="Calibri"/>
-                <a:cs typeface="Calibri"/>
-                <a:sym typeface="Calibri"/>
+                <a:latin typeface="Ubuntu"/>
+                <a:ea typeface="Ubuntu"/>
+                <a:cs typeface="Ubuntu"/>
+                <a:sym typeface="Ubuntu"/>
               </a:rPr>
-              <a:t>Kulcs</a:t>
+              <a:t>Kulcs:</a:t>
             </a:r>
-            <a:endParaRPr sz="1100"/>
-          </a:p>
-          <a:p>
-            <a:pPr indent="0" lvl="0" marL="0" marR="0" rtl="0" algn="l">
-              <a:lnSpc>
-                <a:spcPct val="125000"/>
-              </a:lnSpc>
-              <a:spcBef>
-                <a:spcPts val="0"/>
-              </a:spcBef>
-              <a:spcAft>
-                <a:spcPts val="0"/>
-              </a:spcAft>
-              <a:buNone/>
-            </a:pPr>
             <a:r>
-              <a:rPr b="0" i="0" lang="en-GB" sz="800" u="none" cap="none" strike="noStrike">
+              <a:rPr b="1" lang="en-GB" sz="1200">
+                <a:latin typeface="Ubuntu"/>
+                <a:ea typeface="Ubuntu"/>
+                <a:cs typeface="Ubuntu"/>
+                <a:sym typeface="Ubuntu"/>
+              </a:rPr>
+              <a:t> </a:t>
+            </a:r>
+            <a:r>
+              <a:rPr i="0" lang="en-GB" sz="900" u="none" cap="none" strike="noStrike">
                 <a:solidFill>
                   <a:srgbClr val="1A1D2B"/>
                 </a:solidFill>
-                <a:latin typeface="Calibri"/>
-                <a:ea typeface="Calibri"/>
-                <a:cs typeface="Calibri"/>
-                <a:sym typeface="Calibri"/>
+                <a:latin typeface="Ubuntu"/>
+                <a:ea typeface="Ubuntu"/>
+                <a:cs typeface="Ubuntu"/>
+                <a:sym typeface="Ubuntu"/>
               </a:rPr>
               <a:t>hashedId — közvetlenül csatlakoztatható a headlineDefinitions-hoz.</a:t>
             </a:r>
-            <a:endParaRPr sz="1100"/>
+            <a:endParaRPr sz="1200">
+              <a:latin typeface="Ubuntu"/>
+              <a:ea typeface="Ubuntu"/>
+              <a:cs typeface="Ubuntu"/>
+              <a:sym typeface="Ubuntu"/>
+            </a:endParaRPr>
           </a:p>
         </p:txBody>
       </p:sp>
@@ -45238,8 +45660,8 @@
         </p:nvSpPr>
         <p:spPr>
           <a:xfrm>
-            <a:off x="4646419" y="1042500"/>
-            <a:ext cx="4132055" cy="1350000"/>
+            <a:off x="4646425" y="1042500"/>
+            <a:ext cx="4132200" cy="1529400"/>
           </a:xfrm>
           <a:prstGeom prst="roundRect">
             <a:avLst>
@@ -45347,8 +45769,8 @@
         </p:nvSpPr>
         <p:spPr>
           <a:xfrm>
-            <a:off x="4817873" y="1380000"/>
-            <a:ext cx="3789146" cy="937500"/>
+            <a:off x="4817875" y="1380000"/>
+            <a:ext cx="3789000" cy="957300"/>
           </a:xfrm>
           <a:prstGeom prst="rect">
             <a:avLst/>
@@ -45377,7 +45799,7 @@
               <a:buNone/>
             </a:pPr>
             <a:r>
-              <a:rPr b="1" i="0" lang="en-GB" sz="900" u="none" cap="none" strike="noStrike">
+              <a:rPr b="1" i="0" lang="en-GB" sz="1000" u="none" cap="none" strike="noStrike">
                 <a:solidFill>
                   <a:srgbClr val="FFFFFF"/>
                 </a:solidFill>
@@ -45388,7 +45810,7 @@
               </a:rPr>
               <a:t>Scraper Convex  →  webhook  →  LLM-service</a:t>
             </a:r>
-            <a:endParaRPr sz="1100"/>
+            <a:endParaRPr sz="1200"/>
           </a:p>
           <a:p>
             <a:pPr indent="0" lvl="0" marL="0" marR="0" rtl="0" algn="l">
@@ -45404,7 +45826,7 @@
               <a:buNone/>
             </a:pPr>
             <a:r>
-              <a:rPr b="1" i="0" lang="en-GB" sz="900" u="none" cap="none" strike="noStrike">
+              <a:rPr b="1" i="0" lang="en-GB" sz="1000" u="none" cap="none" strike="noStrike">
                 <a:solidFill>
                   <a:srgbClr val="FFFFFF"/>
                 </a:solidFill>
@@ -45415,7 +45837,7 @@
               </a:rPr>
               <a:t>LLM-service  →  batch  →  Kilo API (OpenAI-kompatibilis)</a:t>
             </a:r>
-            <a:endParaRPr sz="1100"/>
+            <a:endParaRPr sz="1200"/>
           </a:p>
           <a:p>
             <a:pPr indent="0" lvl="0" marL="0" marR="0" rtl="0" algn="l">
@@ -45431,7 +45853,7 @@
               <a:buNone/>
             </a:pPr>
             <a:r>
-              <a:rPr b="1" i="0" lang="en-GB" sz="900" u="none" cap="none" strike="noStrike">
+              <a:rPr b="1" i="0" lang="en-GB" sz="1000" u="none" cap="none" strike="noStrike">
                 <a:solidFill>
                   <a:srgbClr val="FFFFFF"/>
                 </a:solidFill>
@@ -45442,25 +45864,7 @@
               </a:rPr>
               <a:t>Kilo  →  JSON-Schema válasz  →  Target Convex · llmAnalysis</a:t>
             </a:r>
-            <a:endParaRPr sz="1100"/>
-          </a:p>
-          <a:p>
-            <a:pPr indent="0" lvl="0" marL="0" marR="0" rtl="0" algn="l">
-              <a:lnSpc>
-                <a:spcPct val="100000"/>
-              </a:lnSpc>
-              <a:spcBef>
-                <a:spcPts val="0"/>
-              </a:spcBef>
-              <a:spcAft>
-                <a:spcPts val="0"/>
-              </a:spcAft>
-              <a:buNone/>
-            </a:pPr>
-            <a:r>
-              <a:t/>
-            </a:r>
-            <a:endParaRPr b="1" i="0" sz="900" u="none" cap="none" strike="noStrike">
+            <a:endParaRPr b="1" i="0" sz="1000" u="none" cap="none" strike="noStrike">
               <a:solidFill>
                 <a:srgbClr val="FFFFFF"/>
               </a:solidFill>
@@ -45484,7 +45888,7 @@
               <a:buNone/>
             </a:pPr>
             <a:r>
-              <a:rPr b="0" i="1" lang="en-GB" sz="800" u="none" cap="none" strike="noStrike">
+              <a:rPr b="0" i="1" lang="en-GB" sz="900" u="none" cap="none" strike="noStrike">
                 <a:solidFill>
                   <a:srgbClr val="EAEEF9"/>
                 </a:solidFill>
@@ -45495,7 +45899,7 @@
               </a:rPr>
               <a:t>Node.js · POST /webhook/scrape-complete · SOURCE_PAGE_SIZE=200 · CONVEX_SAVE_BATCH_SIZE=200</a:t>
             </a:r>
-            <a:endParaRPr sz="1100"/>
+            <a:endParaRPr sz="1200"/>
           </a:p>
         </p:txBody>
       </p:sp>
@@ -45507,8 +45911,8 @@
         </p:nvSpPr>
         <p:spPr>
           <a:xfrm>
-            <a:off x="342909" y="2587500"/>
-            <a:ext cx="5061339" cy="1837500"/>
+            <a:off x="342909" y="2816100"/>
+            <a:ext cx="5061300" cy="1837500"/>
           </a:xfrm>
           <a:prstGeom prst="roundRect">
             <a:avLst>
@@ -45563,8 +45967,8 @@
         </p:nvSpPr>
         <p:spPr>
           <a:xfrm>
-            <a:off x="514364" y="2700000"/>
-            <a:ext cx="4718430" cy="225000"/>
+            <a:off x="514364" y="2928600"/>
+            <a:ext cx="4718400" cy="123000"/>
           </a:xfrm>
           <a:prstGeom prst="rect">
             <a:avLst/>
@@ -45616,8 +46020,8 @@
         </p:nvSpPr>
         <p:spPr>
           <a:xfrm>
-            <a:off x="514364" y="2925000"/>
-            <a:ext cx="4718430" cy="1425000"/>
+            <a:off x="514364" y="3153600"/>
+            <a:ext cx="4718400" cy="1056900"/>
           </a:xfrm>
           <a:prstGeom prst="rect">
             <a:avLst/>
@@ -45646,7 +46050,7 @@
               <a:buNone/>
             </a:pPr>
             <a:r>
-              <a:rPr b="1" i="0" lang="en-GB" sz="800" u="none" cap="none" strike="noStrike">
+              <a:rPr b="1" i="0" lang="en-GB" sz="1000" u="none" cap="none" strike="noStrike">
                 <a:solidFill>
                   <a:srgbClr val="1E2761"/>
                 </a:solidFill>
@@ -45658,7 +46062,7 @@
               <a:t>label</a:t>
             </a:r>
             <a:r>
-              <a:rPr b="0" i="1" lang="en-GB" sz="800" u="none" cap="none" strike="noStrike">
+              <a:rPr b="0" i="1" lang="en-GB" sz="1000" u="none" cap="none" strike="noStrike">
                 <a:solidFill>
                   <a:srgbClr val="646B7E"/>
                 </a:solidFill>
@@ -45670,7 +46074,7 @@
               <a:t>   · string · </a:t>
             </a:r>
             <a:r>
-              <a:rPr b="0" i="0" lang="en-GB" sz="800" u="none" cap="none" strike="noStrike">
+              <a:rPr b="0" i="0" lang="en-GB" sz="1000" u="none" cap="none" strike="noStrike">
                 <a:solidFill>
                   <a:srgbClr val="1A1D2B"/>
                 </a:solidFill>
@@ -45681,7 +46085,7 @@
               </a:rPr>
               <a:t>tematikus címke</a:t>
             </a:r>
-            <a:endParaRPr sz="1100"/>
+            <a:endParaRPr sz="1300"/>
           </a:p>
           <a:p>
             <a:pPr indent="0" lvl="0" marL="0" marR="0" rtl="0" algn="l">
@@ -45697,7 +46101,7 @@
               <a:buNone/>
             </a:pPr>
             <a:r>
-              <a:rPr b="1" i="0" lang="en-GB" sz="800" u="none" cap="none" strike="noStrike">
+              <a:rPr b="1" i="0" lang="en-GB" sz="1000" u="none" cap="none" strike="noStrike">
                 <a:solidFill>
                   <a:srgbClr val="1E2761"/>
                 </a:solidFill>
@@ -45709,7 +46113,7 @@
               <a:t>sentiment</a:t>
             </a:r>
             <a:r>
-              <a:rPr b="0" i="1" lang="en-GB" sz="800" u="none" cap="none" strike="noStrike">
+              <a:rPr b="0" i="1" lang="en-GB" sz="1000" u="none" cap="none" strike="noStrike">
                 <a:solidFill>
                   <a:srgbClr val="646B7E"/>
                 </a:solidFill>
@@ -45721,7 +46125,7 @@
               <a:t>   · string · </a:t>
             </a:r>
             <a:r>
-              <a:rPr b="0" i="0" lang="en-GB" sz="800" u="none" cap="none" strike="noStrike">
+              <a:rPr b="0" i="0" lang="en-GB" sz="1000" u="none" cap="none" strike="noStrike">
                 <a:solidFill>
                   <a:srgbClr val="1A1D2B"/>
                 </a:solidFill>
@@ -45732,7 +46136,7 @@
               </a:rPr>
               <a:t>negatív / semleges / pozitív</a:t>
             </a:r>
-            <a:endParaRPr sz="1100"/>
+            <a:endParaRPr sz="1300"/>
           </a:p>
           <a:p>
             <a:pPr indent="0" lvl="0" marL="0" marR="0" rtl="0" algn="l">
@@ -45748,7 +46152,7 @@
               <a:buNone/>
             </a:pPr>
             <a:r>
-              <a:rPr b="1" i="0" lang="en-GB" sz="800" u="none" cap="none" strike="noStrike">
+              <a:rPr b="1" i="0" lang="en-GB" sz="1000" u="none" cap="none" strike="noStrike">
                 <a:solidFill>
                   <a:srgbClr val="1E2761"/>
                 </a:solidFill>
@@ -45760,7 +46164,7 @@
               <a:t>sentiment_score</a:t>
             </a:r>
             <a:r>
-              <a:rPr b="0" i="1" lang="en-GB" sz="800" u="none" cap="none" strike="noStrike">
+              <a:rPr b="0" i="1" lang="en-GB" sz="1000" u="none" cap="none" strike="noStrike">
                 <a:solidFill>
                   <a:srgbClr val="646B7E"/>
                 </a:solidFill>
@@ -45772,7 +46176,7 @@
               <a:t>   · float 0–1 · </a:t>
             </a:r>
             <a:r>
-              <a:rPr b="0" i="0" lang="en-GB" sz="800" u="none" cap="none" strike="noStrike">
+              <a:rPr b="0" i="0" lang="en-GB" sz="1000" u="none" cap="none" strike="noStrike">
                 <a:solidFill>
                   <a:srgbClr val="1A1D2B"/>
                 </a:solidFill>
@@ -45783,7 +46187,7 @@
               </a:rPr>
               <a:t>0 = negatív, 1 = pozitív</a:t>
             </a:r>
-            <a:endParaRPr sz="1100"/>
+            <a:endParaRPr sz="1300"/>
           </a:p>
           <a:p>
             <a:pPr indent="0" lvl="0" marL="0" marR="0" rtl="0" algn="l">
@@ -45799,7 +46203,7 @@
               <a:buNone/>
             </a:pPr>
             <a:r>
-              <a:rPr b="1" i="0" lang="en-GB" sz="800" u="none" cap="none" strike="noStrike">
+              <a:rPr b="1" i="0" lang="en-GB" sz="1000" u="none" cap="none" strike="noStrike">
                 <a:solidFill>
                   <a:srgbClr val="1E2761"/>
                 </a:solidFill>
@@ -45811,7 +46215,7 @@
               <a:t>entities</a:t>
             </a:r>
             <a:r>
-              <a:rPr b="0" i="1" lang="en-GB" sz="800" u="none" cap="none" strike="noStrike">
+              <a:rPr b="0" i="1" lang="en-GB" sz="1000" u="none" cap="none" strike="noStrike">
                 <a:solidFill>
                   <a:srgbClr val="646B7E"/>
                 </a:solidFill>
@@ -45823,7 +46227,7 @@
               <a:t>   · string[] · </a:t>
             </a:r>
             <a:r>
-              <a:rPr b="0" i="0" lang="en-GB" sz="800" u="none" cap="none" strike="noStrike">
+              <a:rPr b="0" i="0" lang="en-GB" sz="1000" u="none" cap="none" strike="noStrike">
                 <a:solidFill>
                   <a:srgbClr val="1A1D2B"/>
                 </a:solidFill>
@@ -45834,7 +46238,7 @@
               </a:rPr>
               <a:t>szereplők, szervezetek (pl. „Orbán Viktor”)</a:t>
             </a:r>
-            <a:endParaRPr sz="1100"/>
+            <a:endParaRPr sz="1300"/>
           </a:p>
           <a:p>
             <a:pPr indent="0" lvl="0" marL="0" marR="0" rtl="0" algn="l">
@@ -45850,7 +46254,7 @@
               <a:buNone/>
             </a:pPr>
             <a:r>
-              <a:rPr b="1" i="0" lang="en-GB" sz="800" u="none" cap="none" strike="noStrike">
+              <a:rPr b="1" i="0" lang="en-GB" sz="1000" u="none" cap="none" strike="noStrike">
                 <a:solidFill>
                   <a:srgbClr val="1E2761"/>
                 </a:solidFill>
@@ -45862,7 +46266,7 @@
               <a:t>confidence</a:t>
             </a:r>
             <a:r>
-              <a:rPr b="0" i="1" lang="en-GB" sz="800" u="none" cap="none" strike="noStrike">
+              <a:rPr b="0" i="1" lang="en-GB" sz="1000" u="none" cap="none" strike="noStrike">
                 <a:solidFill>
                   <a:srgbClr val="646B7E"/>
                 </a:solidFill>
@@ -45874,7 +46278,7 @@
               <a:t>   · float 0–1 · </a:t>
             </a:r>
             <a:r>
-              <a:rPr b="0" i="0" lang="en-GB" sz="800" u="none" cap="none" strike="noStrike">
+              <a:rPr b="0" i="0" lang="en-GB" sz="1000" u="none" cap="none" strike="noStrike">
                 <a:solidFill>
                   <a:srgbClr val="1A1D2B"/>
                 </a:solidFill>
@@ -45885,7 +46289,7 @@
               </a:rPr>
               <a:t>modell önbizalma</a:t>
             </a:r>
-            <a:endParaRPr sz="1100"/>
+            <a:endParaRPr sz="1300"/>
           </a:p>
         </p:txBody>
       </p:sp>
@@ -45897,8 +46301,8 @@
         </p:nvSpPr>
         <p:spPr>
           <a:xfrm>
-            <a:off x="5575703" y="2587500"/>
-            <a:ext cx="3202771" cy="1837500"/>
+            <a:off x="5575703" y="2816100"/>
+            <a:ext cx="3202800" cy="1837500"/>
           </a:xfrm>
           <a:prstGeom prst="roundRect">
             <a:avLst>
@@ -45953,8 +46357,8 @@
         </p:nvSpPr>
         <p:spPr>
           <a:xfrm>
-            <a:off x="5747157" y="2700000"/>
-            <a:ext cx="2859862" cy="225000"/>
+            <a:off x="5747157" y="2928600"/>
+            <a:ext cx="2859900" cy="123000"/>
           </a:xfrm>
           <a:prstGeom prst="rect">
             <a:avLst/>
@@ -46006,8 +46410,8 @@
         </p:nvSpPr>
         <p:spPr>
           <a:xfrm>
-            <a:off x="5747157" y="2925000"/>
-            <a:ext cx="2859862" cy="1425000"/>
+            <a:off x="5747157" y="3153600"/>
+            <a:ext cx="2859900" cy="1326600"/>
           </a:xfrm>
           <a:prstGeom prst="rect">
             <a:avLst/>
@@ -46036,7 +46440,7 @@
               <a:buNone/>
             </a:pPr>
             <a:r>
-              <a:rPr b="1" i="0" lang="en-GB" sz="800" u="none" cap="none" strike="noStrike">
+              <a:rPr b="1" i="0" lang="en-GB" sz="900" u="none" cap="none" strike="noStrike">
                 <a:solidFill>
                   <a:srgbClr val="1E2761"/>
                 </a:solidFill>
@@ -46047,7 +46451,7 @@
               </a:rPr>
               <a:t>JSON Schema response format</a:t>
             </a:r>
-            <a:endParaRPr sz="1100"/>
+            <a:endParaRPr sz="1200"/>
           </a:p>
           <a:p>
             <a:pPr indent="0" lvl="0" marL="0" marR="0" rtl="0" algn="l">
@@ -46063,7 +46467,7 @@
               <a:buNone/>
             </a:pPr>
             <a:r>
-              <a:rPr b="0" i="0" lang="en-GB" sz="800" u="none" cap="none" strike="noStrike">
+              <a:rPr b="0" i="0" lang="en-GB" sz="900" u="none" cap="none" strike="noStrike">
                 <a:solidFill>
                   <a:srgbClr val="1A1D2B"/>
                 </a:solidFill>
@@ -46074,7 +46478,7 @@
               </a:rPr>
               <a:t>nincs parsing-hiba — a modell kötött séma szerint ad választ.</a:t>
             </a:r>
-            <a:endParaRPr sz="1100"/>
+            <a:endParaRPr sz="1200"/>
           </a:p>
           <a:p>
             <a:pPr indent="0" lvl="0" marL="0" marR="0" rtl="0" algn="l">
@@ -46090,7 +46494,7 @@
               <a:buNone/>
             </a:pPr>
             <a:r>
-              <a:rPr b="1" i="0" lang="en-GB" sz="800" u="none" cap="none" strike="noStrike">
+              <a:rPr b="1" i="0" lang="en-GB" sz="900" u="none" cap="none" strike="noStrike">
                 <a:solidFill>
                   <a:srgbClr val="1E2761"/>
                 </a:solidFill>
@@ -46101,7 +46505,7 @@
               </a:rPr>
               <a:t>Retry logika</a:t>
             </a:r>
-            <a:endParaRPr sz="1100"/>
+            <a:endParaRPr sz="1200"/>
           </a:p>
           <a:p>
             <a:pPr indent="0" lvl="0" marL="0" marR="0" rtl="0" algn="l">
@@ -46117,7 +46521,7 @@
               <a:buNone/>
             </a:pPr>
             <a:r>
-              <a:rPr b="0" i="0" lang="en-GB" sz="800" u="none" cap="none" strike="noStrike">
+              <a:rPr b="0" i="0" lang="en-GB" sz="900" u="none" cap="none" strike="noStrike">
                 <a:solidFill>
                   <a:srgbClr val="1A1D2B"/>
                 </a:solidFill>
@@ -46128,7 +46532,7 @@
               </a:rPr>
               <a:t>max 3 kísérlet batchenként.</a:t>
             </a:r>
-            <a:endParaRPr sz="1100"/>
+            <a:endParaRPr sz="1200"/>
           </a:p>
           <a:p>
             <a:pPr indent="0" lvl="0" marL="0" marR="0" rtl="0" algn="l">
@@ -46144,7 +46548,7 @@
               <a:buNone/>
             </a:pPr>
             <a:r>
-              <a:rPr b="1" i="0" lang="en-GB" sz="800" u="none" cap="none" strike="noStrike">
+              <a:rPr b="1" i="0" lang="en-GB" sz="900" u="none" cap="none" strike="noStrike">
                 <a:solidFill>
                   <a:srgbClr val="1E2761"/>
                 </a:solidFill>
@@ -46155,7 +46559,7 @@
               </a:rPr>
               <a:t>Pointer-alapú szinkronizáció</a:t>
             </a:r>
-            <a:endParaRPr sz="1100"/>
+            <a:endParaRPr sz="1200"/>
           </a:p>
           <a:p>
             <a:pPr indent="0" lvl="0" marL="0" marR="0" rtl="0" algn="l">
@@ -46171,7 +46575,7 @@
               <a:buNone/>
             </a:pPr>
             <a:r>
-              <a:rPr b="0" i="0" lang="en-GB" sz="800" u="none" cap="none" strike="noStrike">
+              <a:rPr b="0" i="0" lang="en-GB" sz="900" u="none" cap="none" strike="noStrike">
                 <a:solidFill>
                   <a:srgbClr val="1A1D2B"/>
                 </a:solidFill>
@@ -46182,7 +46586,7 @@
               </a:rPr>
               <a:t>SYNC_STATE_KEY — sosem dolgoz fel kétszer ugyanazt a headline-t.</a:t>
             </a:r>
-            <a:endParaRPr sz="1100"/>
+            <a:endParaRPr sz="1200"/>
           </a:p>
         </p:txBody>
       </p:sp>
@@ -46754,7 +47158,7 @@
         <p:spPr>
           <a:xfrm>
             <a:off x="548655" y="1405889"/>
-            <a:ext cx="3840582" cy="1165860"/>
+            <a:ext cx="3840600" cy="674100"/>
           </a:xfrm>
           <a:prstGeom prst="rect">
             <a:avLst/>
@@ -46788,25 +47192,25 @@
               <a:buNone/>
             </a:pPr>
             <a:r>
-              <a:rPr b="0" i="0" lang="en-GB" sz="1100" u="none" cap="none" strike="noStrike">
+              <a:rPr i="0" lang="en-GB" sz="1200" u="none" cap="none" strike="noStrike">
                 <a:solidFill>
                   <a:srgbClr val="1A1D2B"/>
                 </a:solidFill>
-                <a:latin typeface="Calibri"/>
-                <a:ea typeface="Calibri"/>
-                <a:cs typeface="Calibri"/>
-                <a:sym typeface="Calibri"/>
+                <a:latin typeface="Ubuntu"/>
+                <a:ea typeface="Ubuntu"/>
+                <a:cs typeface="Ubuntu"/>
+                <a:sym typeface="Ubuntu"/>
               </a:rPr>
               <a:t>A kormányközeli és a független hírportálok jelentősen eltérő érzelmi szentimenttel és vizuális súllyal jelenítik meg ugyanazokat a politikai szereplőket.</a:t>
             </a:r>
-            <a:endParaRPr b="0" i="0" sz="1100" u="none" cap="none" strike="noStrike">
+            <a:endParaRPr i="0" sz="1200" u="none" cap="none" strike="noStrike">
               <a:solidFill>
                 <a:srgbClr val="000000"/>
               </a:solidFill>
-              <a:latin typeface="Arial"/>
-              <a:ea typeface="Arial"/>
-              <a:cs typeface="Arial"/>
-              <a:sym typeface="Arial"/>
+              <a:latin typeface="Ubuntu"/>
+              <a:ea typeface="Ubuntu"/>
+              <a:cs typeface="Ubuntu"/>
+              <a:sym typeface="Ubuntu"/>
             </a:endParaRPr>
           </a:p>
         </p:txBody>
@@ -46951,8 +47355,8 @@
         </p:nvSpPr>
         <p:spPr>
           <a:xfrm>
-            <a:off x="4924181" y="1350922"/>
-            <a:ext cx="3977656" cy="166275"/>
+            <a:off x="4924181" y="1350923"/>
+            <a:ext cx="3977700" cy="166200"/>
           </a:xfrm>
           <a:prstGeom prst="rect">
             <a:avLst/>
@@ -47096,7 +47500,7 @@
         <p:spPr>
           <a:xfrm>
             <a:off x="4924181" y="1647264"/>
-            <a:ext cx="3977656" cy="166275"/>
+            <a:ext cx="3977700" cy="166200"/>
           </a:xfrm>
           <a:prstGeom prst="rect">
             <a:avLst/>
@@ -47240,7 +47644,7 @@
         <p:spPr>
           <a:xfrm>
             <a:off x="4924181" y="1943605"/>
-            <a:ext cx="3977656" cy="166275"/>
+            <a:ext cx="3977700" cy="166200"/>
           </a:xfrm>
           <a:prstGeom prst="rect">
             <a:avLst/>
@@ -47384,7 +47788,7 @@
         <p:spPr>
           <a:xfrm>
             <a:off x="4924181" y="2239946"/>
-            <a:ext cx="3977656" cy="166275"/>
+            <a:ext cx="3977700" cy="166200"/>
           </a:xfrm>
           <a:prstGeom prst="rect">
             <a:avLst/>
@@ -47528,7 +47932,7 @@
         <p:spPr>
           <a:xfrm>
             <a:off x="4903612" y="2536287"/>
-            <a:ext cx="3977656" cy="166275"/>
+            <a:ext cx="3977700" cy="166200"/>
           </a:xfrm>
           <a:prstGeom prst="rect">
             <a:avLst/>
@@ -48004,7 +48408,7 @@
         <p:spPr>
           <a:xfrm>
             <a:off x="3360510" y="3154680"/>
-            <a:ext cx="5417964" cy="480060"/>
+            <a:ext cx="5418000" cy="443400"/>
           </a:xfrm>
           <a:prstGeom prst="rect">
             <a:avLst/>
@@ -48038,25 +48442,25 @@
               <a:buNone/>
             </a:pPr>
             <a:r>
-              <a:rPr b="0" i="0" lang="en-GB" sz="1000" u="none" cap="none" strike="noStrike">
+              <a:rPr i="0" lang="en-GB" sz="1200" u="none" cap="none" strike="noStrike">
                 <a:solidFill>
                   <a:srgbClr val="1A1D2B"/>
                 </a:solidFill>
-                <a:latin typeface="Calibri"/>
-                <a:ea typeface="Calibri"/>
-                <a:cs typeface="Calibri"/>
-                <a:sym typeface="Calibri"/>
+                <a:latin typeface="Ubuntu"/>
+                <a:ea typeface="Ubuntu"/>
+                <a:cs typeface="Ubuntu"/>
+                <a:sym typeface="Ubuntu"/>
               </a:rPr>
               <a:t>Kimutatni, hogy ugyanazokat a politikai szereplőket eltérő hangnemben és eltérő vizuális súllyal jelenítik meg a két médiablokk portáljai.</a:t>
             </a:r>
-            <a:endParaRPr b="0" i="0" sz="1100" u="none" cap="none" strike="noStrike">
+            <a:endParaRPr i="0" sz="1300" u="none" cap="none" strike="noStrike">
               <a:solidFill>
                 <a:srgbClr val="000000"/>
               </a:solidFill>
-              <a:latin typeface="Arial"/>
-              <a:ea typeface="Arial"/>
-              <a:cs typeface="Arial"/>
-              <a:sym typeface="Arial"/>
+              <a:latin typeface="Ubuntu"/>
+              <a:ea typeface="Ubuntu"/>
+              <a:cs typeface="Ubuntu"/>
+              <a:sym typeface="Ubuntu"/>
             </a:endParaRPr>
           </a:p>
         </p:txBody>
@@ -49150,7 +49554,7 @@
         <p:spPr>
           <a:xfrm>
             <a:off x="6309528" y="1405889"/>
-            <a:ext cx="2503237" cy="240030"/>
+            <a:ext cx="2503200" cy="166200"/>
           </a:xfrm>
           <a:prstGeom prst="rect">
             <a:avLst/>
@@ -49188,21 +49592,21 @@
                 <a:solidFill>
                   <a:srgbClr val="1E2761"/>
                 </a:solidFill>
-                <a:latin typeface="Calibri"/>
-                <a:ea typeface="Calibri"/>
-                <a:cs typeface="Calibri"/>
-                <a:sym typeface="Calibri"/>
+                <a:latin typeface="Ubuntu"/>
+                <a:ea typeface="Ubuntu"/>
+                <a:cs typeface="Ubuntu"/>
+                <a:sym typeface="Ubuntu"/>
               </a:rPr>
               <a:t>Tükörszerű mintázat</a:t>
             </a:r>
-            <a:endParaRPr b="0" i="0" sz="1100" u="none" cap="none" strike="noStrike">
+            <a:endParaRPr b="1" i="0" sz="1100" u="none" cap="none" strike="noStrike">
               <a:solidFill>
                 <a:srgbClr val="000000"/>
               </a:solidFill>
-              <a:latin typeface="Arial"/>
-              <a:ea typeface="Arial"/>
-              <a:cs typeface="Arial"/>
-              <a:sym typeface="Arial"/>
+              <a:latin typeface="Ubuntu"/>
+              <a:ea typeface="Ubuntu"/>
+              <a:cs typeface="Ubuntu"/>
+              <a:sym typeface="Ubuntu"/>
             </a:endParaRPr>
           </a:p>
         </p:txBody>
@@ -49216,7 +49620,7 @@
         <p:spPr>
           <a:xfrm>
             <a:off x="6309528" y="1632204"/>
-            <a:ext cx="2503237" cy="617220"/>
+            <a:ext cx="2503200" cy="332400"/>
           </a:xfrm>
           <a:prstGeom prst="rect">
             <a:avLst/>
@@ -49250,25 +49654,25 @@
               <a:buNone/>
             </a:pPr>
             <a:r>
-              <a:rPr b="0" i="0" lang="en-GB" sz="800" u="none" cap="none" strike="noStrike">
+              <a:rPr i="0" lang="en-GB" sz="900" u="none" cap="none" strike="noStrike">
                 <a:solidFill>
                   <a:srgbClr val="1A1D2B"/>
                 </a:solidFill>
-                <a:latin typeface="Calibri"/>
-                <a:ea typeface="Calibri"/>
-                <a:cs typeface="Calibri"/>
-                <a:sym typeface="Calibri"/>
+                <a:latin typeface="Ubuntu"/>
+                <a:ea typeface="Ubuntu"/>
+                <a:cs typeface="Ubuntu"/>
+                <a:sym typeface="Ubuntu"/>
               </a:rPr>
               <a:t>a kormányközeli oldalak Orbánt pozitívabban, Magyar Pétert negatívabban ábrázolják.</a:t>
             </a:r>
-            <a:endParaRPr b="0" i="0" sz="1100" u="none" cap="none" strike="noStrike">
+            <a:endParaRPr i="0" sz="1200" u="none" cap="none" strike="noStrike">
               <a:solidFill>
                 <a:srgbClr val="000000"/>
               </a:solidFill>
-              <a:latin typeface="Arial"/>
-              <a:ea typeface="Arial"/>
-              <a:cs typeface="Arial"/>
-              <a:sym typeface="Arial"/>
+              <a:latin typeface="Ubuntu"/>
+              <a:ea typeface="Ubuntu"/>
+              <a:cs typeface="Ubuntu"/>
+              <a:sym typeface="Ubuntu"/>
             </a:endParaRPr>
           </a:p>
         </p:txBody>
@@ -49348,7 +49752,7 @@
         <p:spPr>
           <a:xfrm>
             <a:off x="6309528" y="2194559"/>
-            <a:ext cx="2503237" cy="240030"/>
+            <a:ext cx="2503200" cy="166200"/>
           </a:xfrm>
           <a:prstGeom prst="rect">
             <a:avLst/>
@@ -49386,21 +49790,21 @@
                 <a:solidFill>
                   <a:srgbClr val="1E2761"/>
                 </a:solidFill>
-                <a:latin typeface="Calibri"/>
-                <a:ea typeface="Calibri"/>
-                <a:cs typeface="Calibri"/>
-                <a:sym typeface="Calibri"/>
+                <a:latin typeface="Ubuntu"/>
+                <a:ea typeface="Ubuntu"/>
+                <a:cs typeface="Ubuntu"/>
+                <a:sym typeface="Ubuntu"/>
               </a:rPr>
               <a:t>Fordított irány</a:t>
             </a:r>
-            <a:endParaRPr b="0" i="0" sz="1100" u="none" cap="none" strike="noStrike">
+            <a:endParaRPr b="1" i="0" sz="1100" u="none" cap="none" strike="noStrike">
               <a:solidFill>
                 <a:srgbClr val="000000"/>
               </a:solidFill>
-              <a:latin typeface="Arial"/>
-              <a:ea typeface="Arial"/>
-              <a:cs typeface="Arial"/>
-              <a:sym typeface="Arial"/>
+              <a:latin typeface="Ubuntu"/>
+              <a:ea typeface="Ubuntu"/>
+              <a:cs typeface="Ubuntu"/>
+              <a:sym typeface="Ubuntu"/>
             </a:endParaRPr>
           </a:p>
         </p:txBody>
@@ -49414,7 +49818,7 @@
         <p:spPr>
           <a:xfrm>
             <a:off x="6309528" y="2420874"/>
-            <a:ext cx="2503237" cy="617220"/>
+            <a:ext cx="2503200" cy="332400"/>
           </a:xfrm>
           <a:prstGeom prst="rect">
             <a:avLst/>
@@ -49448,25 +49852,25 @@
               <a:buNone/>
             </a:pPr>
             <a:r>
-              <a:rPr b="0" i="0" lang="en-GB" sz="800" u="none" cap="none" strike="noStrike">
+              <a:rPr i="0" lang="en-GB" sz="900" u="none" cap="none" strike="noStrike">
                 <a:solidFill>
                   <a:srgbClr val="1A1D2B"/>
                 </a:solidFill>
-                <a:latin typeface="Calibri"/>
-                <a:ea typeface="Calibri"/>
-                <a:cs typeface="Calibri"/>
-                <a:sym typeface="Calibri"/>
+                <a:latin typeface="Ubuntu"/>
+                <a:ea typeface="Ubuntu"/>
+                <a:cs typeface="Ubuntu"/>
+                <a:sym typeface="Ubuntu"/>
               </a:rPr>
               <a:t>a független oldalaknál ennek az ellentéte látszik.</a:t>
             </a:r>
-            <a:endParaRPr b="0" i="0" sz="1100" u="none" cap="none" strike="noStrike">
+            <a:endParaRPr i="0" sz="1200" u="none" cap="none" strike="noStrike">
               <a:solidFill>
                 <a:srgbClr val="000000"/>
               </a:solidFill>
-              <a:latin typeface="Arial"/>
-              <a:ea typeface="Arial"/>
-              <a:cs typeface="Arial"/>
-              <a:sym typeface="Arial"/>
+              <a:latin typeface="Ubuntu"/>
+              <a:ea typeface="Ubuntu"/>
+              <a:cs typeface="Ubuntu"/>
+              <a:sym typeface="Ubuntu"/>
             </a:endParaRPr>
           </a:p>
         </p:txBody>
@@ -49546,7 +49950,7 @@
         <p:spPr>
           <a:xfrm>
             <a:off x="6309528" y="2983229"/>
-            <a:ext cx="2503237" cy="240030"/>
+            <a:ext cx="2503200" cy="166200"/>
           </a:xfrm>
           <a:prstGeom prst="rect">
             <a:avLst/>
@@ -49584,21 +49988,21 @@
                 <a:solidFill>
                   <a:srgbClr val="1E2761"/>
                 </a:solidFill>
-                <a:latin typeface="Calibri"/>
-                <a:ea typeface="Calibri"/>
-                <a:cs typeface="Calibri"/>
-                <a:sym typeface="Calibri"/>
+                <a:latin typeface="Ubuntu"/>
+                <a:ea typeface="Ubuntu"/>
+                <a:cs typeface="Ubuntu"/>
+                <a:sym typeface="Ubuntu"/>
               </a:rPr>
               <a:t>Vizuális prominencia</a:t>
             </a:r>
-            <a:endParaRPr b="0" i="0" sz="1100" u="none" cap="none" strike="noStrike">
+            <a:endParaRPr b="1" i="0" sz="1100" u="none" cap="none" strike="noStrike">
               <a:solidFill>
                 <a:srgbClr val="000000"/>
               </a:solidFill>
-              <a:latin typeface="Arial"/>
-              <a:ea typeface="Arial"/>
-              <a:cs typeface="Arial"/>
-              <a:sym typeface="Arial"/>
+              <a:latin typeface="Ubuntu"/>
+              <a:ea typeface="Ubuntu"/>
+              <a:cs typeface="Ubuntu"/>
+              <a:sym typeface="Ubuntu"/>
             </a:endParaRPr>
           </a:p>
         </p:txBody>
@@ -49612,7 +50016,7 @@
         <p:spPr>
           <a:xfrm>
             <a:off x="6309528" y="3209544"/>
-            <a:ext cx="2503237" cy="617220"/>
+            <a:ext cx="2503200" cy="332400"/>
           </a:xfrm>
           <a:prstGeom prst="rect">
             <a:avLst/>
@@ -49646,25 +50050,25 @@
               <a:buNone/>
             </a:pPr>
             <a:r>
-              <a:rPr b="0" i="0" lang="en-GB" sz="800" u="none" cap="none" strike="noStrike">
+              <a:rPr i="0" lang="en-GB" sz="900" u="none" cap="none" strike="noStrike">
                 <a:solidFill>
                   <a:srgbClr val="1A1D2B"/>
                 </a:solidFill>
-                <a:latin typeface="Calibri"/>
-                <a:ea typeface="Calibri"/>
-                <a:cs typeface="Calibri"/>
-                <a:sym typeface="Calibri"/>
+                <a:latin typeface="Ubuntu"/>
+                <a:ea typeface="Ubuntu"/>
+                <a:cs typeface="Ubuntu"/>
+                <a:sym typeface="Ubuntu"/>
               </a:rPr>
               <a:t>mindkét szereplőnél magasabb a kormányközeli portálokon.</a:t>
             </a:r>
-            <a:endParaRPr b="0" i="0" sz="1100" u="none" cap="none" strike="noStrike">
+            <a:endParaRPr i="0" sz="1200" u="none" cap="none" strike="noStrike">
               <a:solidFill>
                 <a:srgbClr val="000000"/>
               </a:solidFill>
-              <a:latin typeface="Arial"/>
-              <a:ea typeface="Arial"/>
-              <a:cs typeface="Arial"/>
-              <a:sym typeface="Arial"/>
+              <a:latin typeface="Ubuntu"/>
+              <a:ea typeface="Ubuntu"/>
+              <a:cs typeface="Ubuntu"/>
+              <a:sym typeface="Ubuntu"/>
             </a:endParaRPr>
           </a:p>
         </p:txBody>
@@ -50592,8 +50996,8 @@
         </p:nvSpPr>
         <p:spPr>
           <a:xfrm>
-            <a:off x="6549565" y="1392173"/>
-            <a:ext cx="2263200" cy="205740"/>
+            <a:off x="6549565" y="1422806"/>
+            <a:ext cx="2263200" cy="166200"/>
           </a:xfrm>
           <a:prstGeom prst="rect">
             <a:avLst/>
@@ -50627,25 +51031,25 @@
               <a:buNone/>
             </a:pPr>
             <a:r>
-              <a:rPr b="1" i="0" lang="en-GB" sz="800" u="none" cap="none" strike="noStrike">
+              <a:rPr b="1" i="0" lang="en-GB" sz="900" u="none" cap="none" strike="noStrike">
                 <a:solidFill>
                   <a:srgbClr val="1E2761"/>
                 </a:solidFill>
-                <a:latin typeface="Calibri"/>
-                <a:ea typeface="Calibri"/>
-                <a:cs typeface="Calibri"/>
-                <a:sym typeface="Calibri"/>
+                <a:latin typeface="Ubuntu"/>
+                <a:ea typeface="Ubuntu"/>
+                <a:cs typeface="Ubuntu"/>
+                <a:sym typeface="Ubuntu"/>
               </a:rPr>
               <a:t>Szentiment</a:t>
             </a:r>
-            <a:endParaRPr b="0" i="0" sz="1100" u="none" cap="none" strike="noStrike">
+            <a:endParaRPr b="1" i="0" sz="1200" u="none" cap="none" strike="noStrike">
               <a:solidFill>
                 <a:srgbClr val="000000"/>
               </a:solidFill>
-              <a:latin typeface="Arial"/>
-              <a:ea typeface="Arial"/>
-              <a:cs typeface="Arial"/>
-              <a:sym typeface="Arial"/>
+              <a:latin typeface="Ubuntu"/>
+              <a:ea typeface="Ubuntu"/>
+              <a:cs typeface="Ubuntu"/>
+              <a:sym typeface="Ubuntu"/>
             </a:endParaRPr>
           </a:p>
         </p:txBody>
@@ -50658,8 +51062,8 @@
         </p:nvSpPr>
         <p:spPr>
           <a:xfrm>
-            <a:off x="6549565" y="1577340"/>
-            <a:ext cx="2263200" cy="411480"/>
+            <a:off x="6549565" y="1607973"/>
+            <a:ext cx="2263200" cy="166200"/>
           </a:xfrm>
           <a:prstGeom prst="rect">
             <a:avLst/>
@@ -50693,25 +51097,25 @@
               <a:buNone/>
             </a:pPr>
             <a:r>
-              <a:rPr b="0" i="0" lang="en-GB" sz="800" u="none" cap="none" strike="noStrike">
+              <a:rPr i="0" lang="en-GB" sz="900" u="none" cap="none" strike="noStrike">
                 <a:solidFill>
                   <a:srgbClr val="1A1D2B"/>
                 </a:solidFill>
-                <a:latin typeface="Calibri"/>
-                <a:ea typeface="Calibri"/>
-                <a:cs typeface="Calibri"/>
-                <a:sym typeface="Calibri"/>
+                <a:latin typeface="Ubuntu"/>
+                <a:ea typeface="Ubuntu"/>
+                <a:cs typeface="Ubuntu"/>
+                <a:sym typeface="Ubuntu"/>
               </a:rPr>
               <a:t>ellentétes előjelű Δ-k a két szereplőnél.</a:t>
             </a:r>
-            <a:endParaRPr b="0" i="0" sz="1100" u="none" cap="none" strike="noStrike">
+            <a:endParaRPr i="0" sz="1200" u="none" cap="none" strike="noStrike">
               <a:solidFill>
                 <a:srgbClr val="000000"/>
               </a:solidFill>
-              <a:latin typeface="Arial"/>
-              <a:ea typeface="Arial"/>
-              <a:cs typeface="Arial"/>
-              <a:sym typeface="Arial"/>
+              <a:latin typeface="Ubuntu"/>
+              <a:ea typeface="Ubuntu"/>
+              <a:cs typeface="Ubuntu"/>
+              <a:sym typeface="Ubuntu"/>
             </a:endParaRPr>
           </a:p>
         </p:txBody>
@@ -50790,8 +51194,8 @@
         </p:nvSpPr>
         <p:spPr>
           <a:xfrm>
-            <a:off x="6549565" y="1975104"/>
-            <a:ext cx="2263200" cy="205740"/>
+            <a:off x="6549565" y="2005737"/>
+            <a:ext cx="2263200" cy="166200"/>
           </a:xfrm>
           <a:prstGeom prst="rect">
             <a:avLst/>
@@ -50825,25 +51229,25 @@
               <a:buNone/>
             </a:pPr>
             <a:r>
-              <a:rPr b="1" i="0" lang="en-GB" sz="800" u="none" cap="none" strike="noStrike">
+              <a:rPr b="1" i="0" lang="en-GB" sz="900" u="none" cap="none" strike="noStrike">
                 <a:solidFill>
                   <a:srgbClr val="1E2761"/>
                 </a:solidFill>
-                <a:latin typeface="Calibri"/>
-                <a:ea typeface="Calibri"/>
-                <a:cs typeface="Calibri"/>
-                <a:sym typeface="Calibri"/>
+                <a:latin typeface="Ubuntu"/>
+                <a:ea typeface="Ubuntu"/>
+                <a:cs typeface="Ubuntu"/>
+                <a:sym typeface="Ubuntu"/>
               </a:rPr>
               <a:t>Vizuális prominencia</a:t>
             </a:r>
-            <a:endParaRPr b="0" i="0" sz="1100" u="none" cap="none" strike="noStrike">
+            <a:endParaRPr b="1" i="0" sz="1200" u="none" cap="none" strike="noStrike">
               <a:solidFill>
                 <a:srgbClr val="000000"/>
               </a:solidFill>
-              <a:latin typeface="Arial"/>
-              <a:ea typeface="Arial"/>
-              <a:cs typeface="Arial"/>
-              <a:sym typeface="Arial"/>
+              <a:latin typeface="Ubuntu"/>
+              <a:ea typeface="Ubuntu"/>
+              <a:cs typeface="Ubuntu"/>
+              <a:sym typeface="Ubuntu"/>
             </a:endParaRPr>
           </a:p>
         </p:txBody>
@@ -50856,8 +51260,8 @@
         </p:nvSpPr>
         <p:spPr>
           <a:xfrm>
-            <a:off x="6549565" y="2160270"/>
-            <a:ext cx="2263200" cy="411480"/>
+            <a:off x="6549565" y="2190903"/>
+            <a:ext cx="2263200" cy="166200"/>
           </a:xfrm>
           <a:prstGeom prst="rect">
             <a:avLst/>
@@ -50891,25 +51295,25 @@
               <a:buNone/>
             </a:pPr>
             <a:r>
-              <a:rPr b="0" i="0" lang="en-GB" sz="800" u="none" cap="none" strike="noStrike">
+              <a:rPr i="0" lang="en-GB" sz="900" u="none" cap="none" strike="noStrike">
                 <a:solidFill>
                   <a:srgbClr val="1A1D2B"/>
                 </a:solidFill>
-                <a:latin typeface="Calibri"/>
-                <a:ea typeface="Calibri"/>
-                <a:cs typeface="Calibri"/>
-                <a:sym typeface="Calibri"/>
+                <a:latin typeface="Ubuntu"/>
+                <a:ea typeface="Ubuntu"/>
+                <a:cs typeface="Ubuntu"/>
+                <a:sym typeface="Ubuntu"/>
               </a:rPr>
               <a:t>mindkét szereplőnél pozitív Δ.</a:t>
             </a:r>
-            <a:endParaRPr b="0" i="0" sz="1100" u="none" cap="none" strike="noStrike">
+            <a:endParaRPr i="0" sz="1200" u="none" cap="none" strike="noStrike">
               <a:solidFill>
                 <a:srgbClr val="000000"/>
               </a:solidFill>
-              <a:latin typeface="Arial"/>
-              <a:ea typeface="Arial"/>
-              <a:cs typeface="Arial"/>
-              <a:sym typeface="Arial"/>
+              <a:latin typeface="Ubuntu"/>
+              <a:ea typeface="Ubuntu"/>
+              <a:cs typeface="Ubuntu"/>
+              <a:sym typeface="Ubuntu"/>
             </a:endParaRPr>
           </a:p>
         </p:txBody>
@@ -50988,8 +51392,8 @@
         </p:nvSpPr>
         <p:spPr>
           <a:xfrm>
-            <a:off x="6549565" y="2558034"/>
-            <a:ext cx="2263200" cy="205740"/>
+            <a:off x="6549565" y="2588667"/>
+            <a:ext cx="2263200" cy="166200"/>
           </a:xfrm>
           <a:prstGeom prst="rect">
             <a:avLst/>
@@ -51023,25 +51427,25 @@
               <a:buNone/>
             </a:pPr>
             <a:r>
-              <a:rPr b="1" i="0" lang="en-GB" sz="800" u="none" cap="none" strike="noStrike">
+              <a:rPr b="1" i="0" lang="en-GB" sz="900" u="none" cap="none" strike="noStrike">
                 <a:solidFill>
                   <a:srgbClr val="1E2761"/>
                 </a:solidFill>
-                <a:latin typeface="Calibri"/>
-                <a:ea typeface="Calibri"/>
-                <a:cs typeface="Calibri"/>
-                <a:sym typeface="Calibri"/>
+                <a:latin typeface="Ubuntu"/>
+                <a:ea typeface="Ubuntu"/>
+                <a:cs typeface="Ubuntu"/>
+                <a:sym typeface="Ubuntu"/>
               </a:rPr>
               <a:t>Mintázat</a:t>
             </a:r>
-            <a:endParaRPr b="0" i="0" sz="1100" u="none" cap="none" strike="noStrike">
+            <a:endParaRPr b="1" i="0" sz="1200" u="none" cap="none" strike="noStrike">
               <a:solidFill>
                 <a:srgbClr val="000000"/>
               </a:solidFill>
-              <a:latin typeface="Arial"/>
-              <a:ea typeface="Arial"/>
-              <a:cs typeface="Arial"/>
-              <a:sym typeface="Arial"/>
+              <a:latin typeface="Ubuntu"/>
+              <a:ea typeface="Ubuntu"/>
+              <a:cs typeface="Ubuntu"/>
+              <a:sym typeface="Ubuntu"/>
             </a:endParaRPr>
           </a:p>
         </p:txBody>
@@ -51054,8 +51458,8 @@
         </p:nvSpPr>
         <p:spPr>
           <a:xfrm>
-            <a:off x="6549565" y="2743200"/>
-            <a:ext cx="2263200" cy="411480"/>
+            <a:off x="6549565" y="2773833"/>
+            <a:ext cx="2263200" cy="166200"/>
           </a:xfrm>
           <a:prstGeom prst="rect">
             <a:avLst/>
@@ -51089,25 +51493,25 @@
               <a:buNone/>
             </a:pPr>
             <a:r>
-              <a:rPr b="0" i="0" lang="en-GB" sz="800" u="none" cap="none" strike="noStrike">
+              <a:rPr i="0" lang="en-GB" sz="900" u="none" cap="none" strike="noStrike">
                 <a:solidFill>
                   <a:srgbClr val="1A1D2B"/>
                 </a:solidFill>
-                <a:latin typeface="Calibri"/>
-                <a:ea typeface="Calibri"/>
-                <a:cs typeface="Calibri"/>
-                <a:sym typeface="Calibri"/>
+                <a:latin typeface="Ubuntu"/>
+                <a:ea typeface="Ubuntu"/>
+                <a:cs typeface="Ubuntu"/>
+                <a:sym typeface="Ubuntu"/>
               </a:rPr>
               <a:t>támogatja a polarizáció hipotézisét.</a:t>
             </a:r>
-            <a:endParaRPr b="0" i="0" sz="1100" u="none" cap="none" strike="noStrike">
+            <a:endParaRPr i="0" sz="1200" u="none" cap="none" strike="noStrike">
               <a:solidFill>
                 <a:srgbClr val="000000"/>
               </a:solidFill>
-              <a:latin typeface="Arial"/>
-              <a:ea typeface="Arial"/>
-              <a:cs typeface="Arial"/>
-              <a:sym typeface="Arial"/>
+              <a:latin typeface="Ubuntu"/>
+              <a:ea typeface="Ubuntu"/>
+              <a:cs typeface="Ubuntu"/>
+              <a:sym typeface="Ubuntu"/>
             </a:endParaRPr>
           </a:p>
         </p:txBody>
@@ -51254,7 +51658,7 @@
         <p:spPr>
           <a:xfrm>
             <a:off x="411491" y="4217670"/>
-            <a:ext cx="1980300" cy="411480"/>
+            <a:ext cx="1980300" cy="366300"/>
           </a:xfrm>
           <a:prstGeom prst="rect">
             <a:avLst/>
@@ -51288,7 +51692,7 @@
               <a:buNone/>
             </a:pPr>
             <a:r>
-              <a:rPr b="0" i="0" lang="en-GB" sz="800" u="none" cap="none" strike="noStrike">
+              <a:rPr b="0" i="0" lang="en-GB" sz="1000" u="none" cap="none" strike="noStrike">
                 <a:solidFill>
                   <a:srgbClr val="646B7E"/>
                 </a:solidFill>
@@ -51300,7 +51704,7 @@
               <a:t>Δ szentiment</a:t>
             </a:r>
             <a:br>
-              <a:rPr b="0" i="0" lang="en-GB" sz="800" u="none" cap="none" strike="noStrike">
+              <a:rPr b="0" i="0" lang="en-GB" sz="1000" u="none" cap="none" strike="noStrike">
                 <a:solidFill>
                   <a:srgbClr val="646B7E"/>
                 </a:solidFill>
@@ -51311,7 +51715,7 @@
               </a:rPr>
             </a:br>
             <a:r>
-              <a:rPr b="0" i="0" lang="en-GB" sz="800" u="none" cap="none" strike="noStrike">
+              <a:rPr b="0" i="0" lang="en-GB" sz="1000" u="none" cap="none" strike="noStrike">
                 <a:solidFill>
                   <a:srgbClr val="646B7E"/>
                 </a:solidFill>
@@ -51322,7 +51726,7 @@
               </a:rPr>
               <a:t>Magyar Péter</a:t>
             </a:r>
-            <a:endParaRPr b="0" i="0" sz="1100" u="none" cap="none" strike="noStrike">
+            <a:endParaRPr b="0" i="0" sz="1300" u="none" cap="none" strike="noStrike">
               <a:solidFill>
                 <a:srgbClr val="000000"/>
               </a:solidFill>
@@ -51475,7 +51879,7 @@
         <p:spPr>
           <a:xfrm>
             <a:off x="2528955" y="4217670"/>
-            <a:ext cx="1980300" cy="411480"/>
+            <a:ext cx="1980300" cy="366300"/>
           </a:xfrm>
           <a:prstGeom prst="rect">
             <a:avLst/>
@@ -51509,7 +51913,7 @@
               <a:buNone/>
             </a:pPr>
             <a:r>
-              <a:rPr b="0" i="0" lang="en-GB" sz="800" u="none" cap="none" strike="noStrike">
+              <a:rPr b="0" i="0" lang="en-GB" sz="1000" u="none" cap="none" strike="noStrike">
                 <a:solidFill>
                   <a:srgbClr val="646B7E"/>
                 </a:solidFill>
@@ -51521,7 +51925,7 @@
               <a:t>Δ szentiment</a:t>
             </a:r>
             <a:br>
-              <a:rPr b="0" i="0" lang="en-GB" sz="800" u="none" cap="none" strike="noStrike">
+              <a:rPr b="0" i="0" lang="en-GB" sz="1000" u="none" cap="none" strike="noStrike">
                 <a:solidFill>
                   <a:srgbClr val="646B7E"/>
                 </a:solidFill>
@@ -51532,7 +51936,7 @@
               </a:rPr>
             </a:br>
             <a:r>
-              <a:rPr b="0" i="0" lang="en-GB" sz="800" u="none" cap="none" strike="noStrike">
+              <a:rPr b="0" i="0" lang="en-GB" sz="1000" u="none" cap="none" strike="noStrike">
                 <a:solidFill>
                   <a:srgbClr val="646B7E"/>
                 </a:solidFill>
@@ -51543,7 +51947,7 @@
               </a:rPr>
               <a:t>Orbán Viktor</a:t>
             </a:r>
-            <a:endParaRPr b="0" i="0" sz="1100" u="none" cap="none" strike="noStrike">
+            <a:endParaRPr b="0" i="0" sz="1300" u="none" cap="none" strike="noStrike">
               <a:solidFill>
                 <a:srgbClr val="000000"/>
               </a:solidFill>
@@ -51696,7 +52100,7 @@
         <p:spPr>
           <a:xfrm>
             <a:off x="4646418" y="4217670"/>
-            <a:ext cx="1980300" cy="411480"/>
+            <a:ext cx="1980300" cy="366300"/>
           </a:xfrm>
           <a:prstGeom prst="rect">
             <a:avLst/>
@@ -51730,7 +52134,7 @@
               <a:buNone/>
             </a:pPr>
             <a:r>
-              <a:rPr b="0" i="0" lang="en-GB" sz="800" u="none" cap="none" strike="noStrike">
+              <a:rPr b="0" i="0" lang="en-GB" sz="1000" u="none" cap="none" strike="noStrike">
                 <a:solidFill>
                   <a:srgbClr val="646B7E"/>
                 </a:solidFill>
@@ -51742,7 +52146,7 @@
               <a:t>Δ vizuális</a:t>
             </a:r>
             <a:br>
-              <a:rPr b="0" i="0" lang="en-GB" sz="800" u="none" cap="none" strike="noStrike">
+              <a:rPr b="0" i="0" lang="en-GB" sz="1000" u="none" cap="none" strike="noStrike">
                 <a:solidFill>
                   <a:srgbClr val="646B7E"/>
                 </a:solidFill>
@@ -51753,7 +52157,7 @@
               </a:rPr>
             </a:br>
             <a:r>
-              <a:rPr b="0" i="0" lang="en-GB" sz="800" u="none" cap="none" strike="noStrike">
+              <a:rPr b="0" i="0" lang="en-GB" sz="1000" u="none" cap="none" strike="noStrike">
                 <a:solidFill>
                   <a:srgbClr val="646B7E"/>
                 </a:solidFill>
@@ -51764,7 +52168,7 @@
               </a:rPr>
               <a:t>Magyar Péter</a:t>
             </a:r>
-            <a:endParaRPr b="0" i="0" sz="1100" u="none" cap="none" strike="noStrike">
+            <a:endParaRPr b="0" i="0" sz="1300" u="none" cap="none" strike="noStrike">
               <a:solidFill>
                 <a:srgbClr val="000000"/>
               </a:solidFill>
@@ -51917,7 +52321,7 @@
         <p:spPr>
           <a:xfrm>
             <a:off x="6763882" y="4217670"/>
-            <a:ext cx="1980300" cy="411480"/>
+            <a:ext cx="1980300" cy="366300"/>
           </a:xfrm>
           <a:prstGeom prst="rect">
             <a:avLst/>
@@ -51951,7 +52355,7 @@
               <a:buNone/>
             </a:pPr>
             <a:r>
-              <a:rPr b="0" i="0" lang="en-GB" sz="800" u="none" cap="none" strike="noStrike">
+              <a:rPr b="0" i="0" lang="en-GB" sz="1000" u="none" cap="none" strike="noStrike">
                 <a:solidFill>
                   <a:srgbClr val="646B7E"/>
                 </a:solidFill>
@@ -51963,7 +52367,7 @@
               <a:t>Δ vizuális</a:t>
             </a:r>
             <a:br>
-              <a:rPr b="0" i="0" lang="en-GB" sz="800" u="none" cap="none" strike="noStrike">
+              <a:rPr b="0" i="0" lang="en-GB" sz="1000" u="none" cap="none" strike="noStrike">
                 <a:solidFill>
                   <a:srgbClr val="646B7E"/>
                 </a:solidFill>
@@ -51974,7 +52378,7 @@
               </a:rPr>
             </a:br>
             <a:r>
-              <a:rPr b="0" i="0" lang="en-GB" sz="800" u="none" cap="none" strike="noStrike">
+              <a:rPr b="0" i="0" lang="en-GB" sz="1000" u="none" cap="none" strike="noStrike">
                 <a:solidFill>
                   <a:srgbClr val="646B7E"/>
                 </a:solidFill>
@@ -51985,7 +52389,7 @@
               </a:rPr>
               <a:t>Orbán Viktor</a:t>
             </a:r>
-            <a:endParaRPr b="0" i="0" sz="1100" u="none" cap="none" strike="noStrike">
+            <a:endParaRPr b="0" i="0" sz="1300" u="none" cap="none" strike="noStrike">
               <a:solidFill>
                 <a:srgbClr val="000000"/>
               </a:solidFill>
@@ -52445,7 +52849,7 @@
         <p:spPr>
           <a:xfrm>
             <a:off x="342909" y="1028700"/>
-            <a:ext cx="8435565" cy="548640"/>
+            <a:ext cx="8435700" cy="417000"/>
           </a:xfrm>
           <a:prstGeom prst="rect">
             <a:avLst/>
@@ -52479,7 +52883,7 @@
               <a:buNone/>
             </a:pPr>
             <a:r>
-              <a:rPr b="0" i="0" lang="en-GB" sz="900" u="none" cap="none" strike="noStrike">
+              <a:rPr b="0" i="0" lang="en-GB" sz="1100" u="none" cap="none" strike="noStrike">
                 <a:solidFill>
                   <a:srgbClr val="1A1D2B"/>
                 </a:solidFill>
@@ -52491,7 +52895,7 @@
               <a:t>Nem-paraméteres teszt, ezért jól illeszkedik a 0–1-re normalizált, ferde eloszlású adatokhoz.  </a:t>
             </a:r>
             <a:r>
-              <a:rPr b="1" i="0" lang="en-GB" sz="900" u="none" cap="none" strike="noStrike">
+              <a:rPr b="1" i="0" lang="en-GB" sz="1100" u="none" cap="none" strike="noStrike">
                 <a:solidFill>
                   <a:srgbClr val="1E2761"/>
                 </a:solidFill>
@@ -52503,7 +52907,7 @@
               <a:t>p &lt; 0.05</a:t>
             </a:r>
             <a:r>
-              <a:rPr b="0" i="0" lang="en-GB" sz="900" u="none" cap="none" strike="noStrike">
+              <a:rPr b="0" i="0" lang="en-GB" sz="1100" u="none" cap="none" strike="noStrike">
                 <a:solidFill>
                   <a:srgbClr val="1A1D2B"/>
                 </a:solidFill>
@@ -52512,10 +52916,21 @@
                 <a:cs typeface="Calibri"/>
                 <a:sym typeface="Calibri"/>
               </a:rPr>
-              <a:t>: a különbség nem a véletlen műve.  </a:t>
+              <a:t>: a különbség nem a véletlen műve. </a:t>
             </a:r>
+            <a:br>
+              <a:rPr b="0" i="0" lang="en-GB" sz="1100" u="none" cap="none" strike="noStrike">
+                <a:solidFill>
+                  <a:srgbClr val="1A1D2B"/>
+                </a:solidFill>
+                <a:latin typeface="Calibri"/>
+                <a:ea typeface="Calibri"/>
+                <a:cs typeface="Calibri"/>
+                <a:sym typeface="Calibri"/>
+              </a:rPr>
+            </a:br>
             <a:r>
-              <a:rPr b="1" i="0" lang="en-GB" sz="900" u="none" cap="none" strike="noStrike">
+              <a:rPr b="1" i="0" lang="en-GB" sz="1100" u="none" cap="none" strike="noStrike">
                 <a:solidFill>
                   <a:srgbClr val="1E2761"/>
                 </a:solidFill>
@@ -52527,7 +52942,7 @@
               <a:t>r</a:t>
             </a:r>
             <a:r>
-              <a:rPr b="0" i="0" lang="en-GB" sz="900" u="none" cap="none" strike="noStrike">
+              <a:rPr b="0" i="0" lang="en-GB" sz="1100" u="none" cap="none" strike="noStrike">
                 <a:solidFill>
                   <a:srgbClr val="1A1D2B"/>
                 </a:solidFill>
@@ -52538,7 +52953,7 @@
               </a:rPr>
               <a:t>: a különbség gyakorlati nagysága.</a:t>
             </a:r>
-            <a:endParaRPr b="0" i="0" sz="1100" u="none" cap="none" strike="noStrike">
+            <a:endParaRPr b="0" i="0" sz="1300" u="none" cap="none" strike="noStrike">
               <a:solidFill>
                 <a:srgbClr val="000000"/>
               </a:solidFill>
@@ -52565,7 +52980,7 @@
             <a:tbl>
               <a:tblPr>
                 <a:noFill/>
-                <a:tableStyleId>{02B4F9B2-E791-447A-981E-08FD4EC66F5B}</a:tableStyleId>
+                <a:tableStyleId>{29A1324E-E767-48CC-B2B4-CB8A3D8B7874}</a:tableStyleId>
               </a:tblPr>
               <a:tblGrid>
                 <a:gridCol w="1104925"/>
@@ -54875,7 +55290,7 @@
         <p:spPr>
           <a:xfrm>
             <a:off x="342909" y="205740"/>
-            <a:ext cx="7818283" cy="327825"/>
+            <a:ext cx="7818300" cy="335400"/>
           </a:xfrm>
           <a:prstGeom prst="rect">
             <a:avLst/>
@@ -54909,7 +55324,7 @@
               <a:buNone/>
             </a:pPr>
             <a:r>
-              <a:rPr b="0" i="0" lang="en-GB" sz="2000" u="none" cap="none" strike="noStrike">
+              <a:rPr i="0" lang="en-GB" sz="2000" u="none" cap="none" strike="noStrike">
                 <a:solidFill>
                   <a:srgbClr val="1E2761"/>
                 </a:solidFill>
@@ -54920,7 +55335,7 @@
               </a:rPr>
               <a:t>H1 Verdikt · Megerősítve</a:t>
             </a:r>
-            <a:endParaRPr b="0" i="0" sz="1100" u="none" cap="none" strike="noStrike">
+            <a:endParaRPr i="0" sz="1100" u="none" cap="none" strike="noStrike">
               <a:solidFill>
                 <a:srgbClr val="000000"/>
               </a:solidFill>
@@ -55206,7 +55621,7 @@
         <p:spPr>
           <a:xfrm>
             <a:off x="514364" y="1405889"/>
-            <a:ext cx="3909164" cy="754380"/>
+            <a:ext cx="3909300" cy="443400"/>
           </a:xfrm>
           <a:prstGeom prst="rect">
             <a:avLst/>
@@ -55240,25 +55655,25 @@
               <a:buNone/>
             </a:pPr>
             <a:r>
-              <a:rPr b="0" i="0" lang="en-GB" sz="1100" u="none" cap="none" strike="noStrike">
+              <a:rPr i="0" lang="en-GB" sz="1200" u="none" cap="none" strike="noStrike">
                 <a:solidFill>
                   <a:srgbClr val="1A1D2B"/>
                 </a:solidFill>
-                <a:latin typeface="Calibri"/>
-                <a:ea typeface="Calibri"/>
-                <a:cs typeface="Calibri"/>
-                <a:sym typeface="Calibri"/>
+                <a:latin typeface="Ubuntu"/>
+                <a:ea typeface="Ubuntu"/>
+                <a:cs typeface="Ubuntu"/>
+                <a:sym typeface="Ubuntu"/>
               </a:rPr>
               <a:t>Negatívabb szentiment a kormányközeli oldalakon, ugyanakkor nagyobb vizuális hangsúly.</a:t>
             </a:r>
-            <a:endParaRPr b="0" i="0" sz="1100" u="none" cap="none" strike="noStrike">
+            <a:endParaRPr i="0" sz="1200" u="none" cap="none" strike="noStrike">
               <a:solidFill>
                 <a:srgbClr val="000000"/>
               </a:solidFill>
-              <a:latin typeface="Arial"/>
-              <a:ea typeface="Arial"/>
-              <a:cs typeface="Arial"/>
-              <a:sym typeface="Arial"/>
+              <a:latin typeface="Ubuntu"/>
+              <a:ea typeface="Ubuntu"/>
+              <a:cs typeface="Ubuntu"/>
+              <a:sym typeface="Ubuntu"/>
             </a:endParaRPr>
           </a:p>
         </p:txBody>
@@ -55735,7 +56150,7 @@
         <p:spPr>
           <a:xfrm>
             <a:off x="4800728" y="1405889"/>
-            <a:ext cx="3909164" cy="754380"/>
+            <a:ext cx="3909300" cy="443400"/>
           </a:xfrm>
           <a:prstGeom prst="rect">
             <a:avLst/>
@@ -55769,25 +56184,25 @@
               <a:buNone/>
             </a:pPr>
             <a:r>
-              <a:rPr b="0" i="0" lang="en-GB" sz="1100" u="none" cap="none" strike="noStrike">
+              <a:rPr i="0" lang="en-GB" sz="1200" u="none" cap="none" strike="noStrike">
                 <a:solidFill>
                   <a:srgbClr val="1A1D2B"/>
                 </a:solidFill>
-                <a:latin typeface="Calibri"/>
-                <a:ea typeface="Calibri"/>
-                <a:cs typeface="Calibri"/>
-                <a:sym typeface="Calibri"/>
+                <a:latin typeface="Ubuntu"/>
+                <a:ea typeface="Ubuntu"/>
+                <a:cs typeface="Ubuntu"/>
+                <a:sym typeface="Ubuntu"/>
               </a:rPr>
               <a:t>Pozitívabb szentiment a kormányközeli oldalakon, szintén nagyobb vizuális hangsúllyal.</a:t>
             </a:r>
-            <a:endParaRPr b="0" i="0" sz="1100" u="none" cap="none" strike="noStrike">
+            <a:endParaRPr i="0" sz="1200" u="none" cap="none" strike="noStrike">
               <a:solidFill>
                 <a:srgbClr val="000000"/>
               </a:solidFill>
-              <a:latin typeface="Arial"/>
-              <a:ea typeface="Arial"/>
-              <a:cs typeface="Arial"/>
-              <a:sym typeface="Arial"/>
+              <a:latin typeface="Ubuntu"/>
+              <a:ea typeface="Ubuntu"/>
+              <a:cs typeface="Ubuntu"/>
+              <a:sym typeface="Ubuntu"/>
             </a:endParaRPr>
           </a:p>
         </p:txBody>
@@ -56330,7 +56745,7 @@
         <p:spPr>
           <a:xfrm>
             <a:off x="342909" y="4389120"/>
-            <a:ext cx="8435565" cy="377190"/>
+            <a:ext cx="8435700" cy="212400"/>
           </a:xfrm>
           <a:prstGeom prst="rect">
             <a:avLst/>
@@ -56364,25 +56779,25 @@
               <a:buNone/>
             </a:pPr>
             <a:r>
-              <a:rPr b="1" i="1" lang="en-GB" sz="1000" u="none" cap="none" strike="noStrike">
+              <a:rPr b="1" i="1" lang="en-GB" sz="1200" u="none" cap="none" strike="noStrike">
                 <a:solidFill>
                   <a:srgbClr val="1E2761"/>
                 </a:solidFill>
-                <a:latin typeface="Calibri"/>
-                <a:ea typeface="Calibri"/>
-                <a:cs typeface="Calibri"/>
-                <a:sym typeface="Calibri"/>
+                <a:latin typeface="Ubuntu"/>
+                <a:ea typeface="Ubuntu"/>
+                <a:cs typeface="Ubuntu"/>
+                <a:sym typeface="Ubuntu"/>
               </a:rPr>
               <a:t>Kulcsüzenet: a polarizáció nem csak hangnemben, hanem vizuális kiemelésben is mérhető.</a:t>
             </a:r>
-            <a:endParaRPr b="0" i="0" sz="1100" u="none" cap="none" strike="noStrike">
+            <a:endParaRPr b="1" i="0" sz="1300" u="none" cap="none" strike="noStrike">
               <a:solidFill>
                 <a:srgbClr val="000000"/>
               </a:solidFill>
-              <a:latin typeface="Arial"/>
-              <a:ea typeface="Arial"/>
-              <a:cs typeface="Arial"/>
-              <a:sym typeface="Arial"/>
+              <a:latin typeface="Ubuntu"/>
+              <a:ea typeface="Ubuntu"/>
+              <a:cs typeface="Ubuntu"/>
+              <a:sym typeface="Ubuntu"/>
             </a:endParaRPr>
           </a:p>
         </p:txBody>
